--- a/에너지경제학/자원에너지경제학_Chapter_4 (원자력).pptx
+++ b/에너지경제학/자원에너지경제학_Chapter_4 (원자력).pptx
@@ -5,7 +5,7 @@
     <p:sldMasterId id="2147483648" r:id="rId1"/>
   </p:sldMasterIdLst>
   <p:notesMasterIdLst>
-    <p:notesMasterId r:id="rId28"/>
+    <p:notesMasterId r:id="rId39"/>
   </p:notesMasterIdLst>
   <p:sldIdLst>
     <p:sldId id="375" r:id="rId2"/>
@@ -27,13 +27,24 @@
     <p:sldId id="618" r:id="rId18"/>
     <p:sldId id="619" r:id="rId19"/>
     <p:sldId id="601" r:id="rId20"/>
-    <p:sldId id="602" r:id="rId21"/>
-    <p:sldId id="603" r:id="rId22"/>
-    <p:sldId id="605" r:id="rId23"/>
-    <p:sldId id="604" r:id="rId24"/>
-    <p:sldId id="607" r:id="rId25"/>
-    <p:sldId id="606" r:id="rId26"/>
-    <p:sldId id="598" r:id="rId27"/>
+    <p:sldId id="620" r:id="rId21"/>
+    <p:sldId id="621" r:id="rId22"/>
+    <p:sldId id="622" r:id="rId23"/>
+    <p:sldId id="623" r:id="rId24"/>
+    <p:sldId id="624" r:id="rId25"/>
+    <p:sldId id="625" r:id="rId26"/>
+    <p:sldId id="626" r:id="rId27"/>
+    <p:sldId id="602" r:id="rId28"/>
+    <p:sldId id="627" r:id="rId29"/>
+    <p:sldId id="628" r:id="rId30"/>
+    <p:sldId id="629" r:id="rId31"/>
+    <p:sldId id="630" r:id="rId32"/>
+    <p:sldId id="603" r:id="rId33"/>
+    <p:sldId id="605" r:id="rId34"/>
+    <p:sldId id="604" r:id="rId35"/>
+    <p:sldId id="607" r:id="rId36"/>
+    <p:sldId id="606" r:id="rId37"/>
+    <p:sldId id="598" r:id="rId38"/>
   </p:sldIdLst>
   <p:sldSz cx="12192000" cy="6858000"/>
   <p:notesSz cx="6858000" cy="9144000"/>
@@ -244,7 +255,7 @@
           <a:p>
             <a:fld id="{4A5E00EF-AEA4-43E2-9451-8F9C59A39471}" type="datetimeFigureOut">
               <a:rPr lang="ko-KR" altLang="en-US" smtClean="0"/>
-              <a:t>2026-06-18</a:t>
+              <a:t>2026-06-19</a:t>
             </a:fld>
             <a:endParaRPr lang="ko-KR" altLang="en-US"/>
           </a:p>
@@ -666,7 +677,7 @@
           <a:p>
             <a:fld id="{CD32C56F-BD27-4999-9E6D-D4EACE3DA9F4}" type="datetime1">
               <a:rPr lang="ko-KR" altLang="en-US" smtClean="0"/>
-              <a:t>2026-06-18</a:t>
+              <a:t>2026-06-19</a:t>
             </a:fld>
             <a:endParaRPr lang="ko-KR" altLang="en-US"/>
           </a:p>
@@ -880,7 +891,7 @@
           <a:p>
             <a:fld id="{8EF4A19C-72C8-45CA-8E3F-68A7FA345D6C}" type="datetime1">
               <a:rPr lang="ko-KR" altLang="en-US" smtClean="0"/>
-              <a:t>2026-06-18</a:t>
+              <a:t>2026-06-19</a:t>
             </a:fld>
             <a:endParaRPr lang="ko-KR" altLang="en-US"/>
           </a:p>
@@ -1104,7 +1115,7 @@
           <a:p>
             <a:fld id="{56A175B2-010B-4341-954C-5F8F5C70B124}" type="datetime1">
               <a:rPr lang="ko-KR" altLang="en-US" smtClean="0"/>
-              <a:t>2026-06-18</a:t>
+              <a:t>2026-06-19</a:t>
             </a:fld>
             <a:endParaRPr lang="ko-KR" altLang="en-US"/>
           </a:p>
@@ -1318,7 +1329,7 @@
           <a:p>
             <a:fld id="{16B83F9E-22C9-45CA-9E85-070F1D3EF530}" type="datetime1">
               <a:rPr lang="ko-KR" altLang="en-US" smtClean="0"/>
-              <a:t>2026-06-18</a:t>
+              <a:t>2026-06-19</a:t>
             </a:fld>
             <a:endParaRPr lang="ko-KR" altLang="en-US"/>
           </a:p>
@@ -1609,7 +1620,7 @@
           <a:p>
             <a:fld id="{03278F45-FB3C-4C4D-B89A-7BC3F5F229F6}" type="datetime1">
               <a:rPr lang="ko-KR" altLang="en-US" smtClean="0"/>
-              <a:t>2026-06-18</a:t>
+              <a:t>2026-06-19</a:t>
             </a:fld>
             <a:endParaRPr lang="ko-KR" altLang="en-US"/>
           </a:p>
@@ -2002,7 +2013,7 @@
           <a:p>
             <a:fld id="{38FDAC3C-35A6-415C-9F03-738A6AC328B1}" type="datetime1">
               <a:rPr lang="ko-KR" altLang="en-US" smtClean="0"/>
-              <a:t>2026-06-18</a:t>
+              <a:t>2026-06-19</a:t>
             </a:fld>
             <a:endParaRPr lang="ko-KR" altLang="en-US"/>
           </a:p>
@@ -3596,7 +3607,7 @@
           <a:p>
             <a:fld id="{507A0DF1-AEE6-4B0D-89D2-351E7B3EF65C}" type="datetime1">
               <a:rPr lang="ko-KR" altLang="en-US" smtClean="0"/>
-              <a:t>2026-06-18</a:t>
+              <a:t>2026-06-19</a:t>
             </a:fld>
             <a:endParaRPr lang="ko-KR" altLang="en-US"/>
           </a:p>
@@ -4024,7 +4035,7 @@
           <a:p>
             <a:fld id="{CA93B8C9-630F-4D57-944D-04FD37CECCD3}" type="datetime1">
               <a:rPr lang="ko-KR" altLang="en-US" smtClean="0"/>
-              <a:t>2026-06-18</a:t>
+              <a:t>2026-06-19</a:t>
             </a:fld>
             <a:endParaRPr lang="ko-KR" altLang="en-US"/>
           </a:p>
@@ -4181,7 +4192,7 @@
           <a:p>
             <a:fld id="{E986165A-AC43-4902-9541-874ECD310BA3}" type="datetime1">
               <a:rPr lang="ko-KR" altLang="en-US" smtClean="0"/>
-              <a:t>2026-06-18</a:t>
+              <a:t>2026-06-19</a:t>
             </a:fld>
             <a:endParaRPr lang="ko-KR" altLang="en-US"/>
           </a:p>
@@ -4508,7 +4519,7 @@
           <a:p>
             <a:fld id="{47E6EE6D-2B0E-43A9-87A2-7354CDB998F4}" type="datetime1">
               <a:rPr lang="ko-KR" altLang="en-US" smtClean="0"/>
-              <a:t>2026-06-18</a:t>
+              <a:t>2026-06-19</a:t>
             </a:fld>
             <a:endParaRPr lang="ko-KR" altLang="en-US"/>
           </a:p>
@@ -4812,7 +4823,7 @@
           <a:p>
             <a:fld id="{5CC5944E-0BC8-4FAA-9F94-6B4B05834E10}" type="datetime1">
               <a:rPr lang="ko-KR" altLang="en-US" smtClean="0"/>
-              <a:t>2026-06-18</a:t>
+              <a:t>2026-06-19</a:t>
             </a:fld>
             <a:endParaRPr lang="ko-KR" altLang="en-US"/>
           </a:p>
@@ -7080,8 +7091,8 @@
         </p:nvSpPr>
         <p:spPr>
           <a:xfrm>
-            <a:off x="869950" y="192979"/>
-            <a:ext cx="10452100" cy="2912171"/>
+            <a:off x="869950" y="2169190"/>
+            <a:ext cx="10452100" cy="935960"/>
           </a:xfrm>
           <a:effectLst>
             <a:reflection blurRad="50800" stA="45000" endPos="44000" dir="5400000" sy="-100000" algn="bl" rotWithShape="0"/>
@@ -11160,6 +11171,2604 @@
         <p:cNvPr id="1" name="">
           <a:extLst>
             <a:ext uri="{FF2B5EF4-FFF2-40B4-BE49-F238E27FC236}">
+              <a16:creationId xmlns:a16="http://schemas.microsoft.com/office/drawing/2014/main" id="{2482233F-B1D3-C97F-9CD8-73104D33723D}"/>
+            </a:ext>
+          </a:extLst>
+        </p:cNvPr>
+        <p:cNvGrpSpPr/>
+        <p:nvPr/>
+      </p:nvGrpSpPr>
+      <p:grpSpPr>
+        <a:xfrm>
+          <a:off x="0" y="0"/>
+          <a:ext cx="0" cy="0"/>
+          <a:chOff x="0" y="0"/>
+          <a:chExt cx="0" cy="0"/>
+        </a:xfrm>
+      </p:grpSpPr>
+      <p:sp>
+        <p:nvSpPr>
+          <p:cNvPr id="2" name="제목 1">
+            <a:extLst>
+              <a:ext uri="{FF2B5EF4-FFF2-40B4-BE49-F238E27FC236}">
+                <a16:creationId xmlns:a16="http://schemas.microsoft.com/office/drawing/2014/main" id="{46268716-BB84-E8F1-6881-9896AEFDCD0B}"/>
+              </a:ext>
+            </a:extLst>
+          </p:cNvPr>
+          <p:cNvSpPr>
+            <a:spLocks noGrp="1"/>
+          </p:cNvSpPr>
+          <p:nvPr>
+            <p:ph type="title"/>
+          </p:nvPr>
+        </p:nvSpPr>
+        <p:spPr/>
+        <p:txBody>
+          <a:bodyPr/>
+          <a:lstStyle/>
+          <a:p>
+            <a:r>
+              <a:rPr lang="ko-KR" altLang="en-US" dirty="0"/>
+              <a:t>주요 원자로 유형</a:t>
+            </a:r>
+          </a:p>
+        </p:txBody>
+      </p:sp>
+      <p:sp>
+        <p:nvSpPr>
+          <p:cNvPr id="4" name="슬라이드 번호 개체 틀 3">
+            <a:extLst>
+              <a:ext uri="{FF2B5EF4-FFF2-40B4-BE49-F238E27FC236}">
+                <a16:creationId xmlns:a16="http://schemas.microsoft.com/office/drawing/2014/main" id="{9043D0AB-00DA-0612-4A66-EB6F7E947F1B}"/>
+              </a:ext>
+            </a:extLst>
+          </p:cNvPr>
+          <p:cNvSpPr>
+            <a:spLocks noGrp="1"/>
+          </p:cNvSpPr>
+          <p:nvPr>
+            <p:ph type="sldNum" sz="quarter" idx="12"/>
+          </p:nvPr>
+        </p:nvSpPr>
+        <p:spPr/>
+        <p:txBody>
+          <a:bodyPr/>
+          <a:lstStyle/>
+          <a:p>
+            <a:fld id="{109C872D-39A9-4065-8BF3-6A613116E2A1}" type="slidenum">
+              <a:rPr lang="ko-KR" altLang="en-US" smtClean="0"/>
+              <a:t>20</a:t>
+            </a:fld>
+            <a:endParaRPr lang="ko-KR" altLang="en-US"/>
+          </a:p>
+        </p:txBody>
+      </p:sp>
+      <p:sp>
+        <p:nvSpPr>
+          <p:cNvPr id="3" name="TextBox 2">
+            <a:extLst>
+              <a:ext uri="{FF2B5EF4-FFF2-40B4-BE49-F238E27FC236}">
+                <a16:creationId xmlns:a16="http://schemas.microsoft.com/office/drawing/2014/main" id="{9A464B4F-C690-A738-BBD0-804DB2D29EA4}"/>
+              </a:ext>
+            </a:extLst>
+          </p:cNvPr>
+          <p:cNvSpPr txBox="1"/>
+          <p:nvPr/>
+        </p:nvSpPr>
+        <p:spPr>
+          <a:xfrm>
+            <a:off x="288790" y="958844"/>
+            <a:ext cx="11118453" cy="5584670"/>
+          </a:xfrm>
+          <a:prstGeom prst="rect">
+            <a:avLst/>
+          </a:prstGeom>
+          <a:noFill/>
+        </p:spPr>
+        <p:txBody>
+          <a:bodyPr wrap="square" rtlCol="0" anchor="t">
+            <a:spAutoFit/>
+          </a:bodyPr>
+          <a:lstStyle/>
+          <a:p>
+            <a:pPr marL="377825" indent="-285750">
+              <a:lnSpc>
+                <a:spcPct val="150000"/>
+              </a:lnSpc>
+              <a:buFont typeface="Arial" panose="020B0604020202020204" pitchFamily="34" charset="0"/>
+              <a:buChar char="•"/>
+            </a:pPr>
+            <a:r>
+              <a:rPr lang="ko-KR" altLang="en-US" sz="1600" dirty="0"/>
+              <a:t>원자력 발전소는 전력생산을 위해 핵분열로 생성된 에너지를 활용하기 위해 설계된 매우 복잡한 설비다</a:t>
+            </a:r>
+            <a:r>
+              <a:rPr lang="en-US" altLang="ko-KR" sz="1600" dirty="0"/>
+              <a:t>.</a:t>
+            </a:r>
+          </a:p>
+          <a:p>
+            <a:pPr marL="835025" lvl="1" indent="-285750">
+              <a:lnSpc>
+                <a:spcPct val="150000"/>
+              </a:lnSpc>
+              <a:buFont typeface="Wingdings" panose="05000000000000000000" pitchFamily="2" charset="2"/>
+              <a:buChar char="ü"/>
+            </a:pPr>
+            <a:r>
+              <a:rPr lang="ko-KR" altLang="en-US" sz="1600" dirty="0"/>
+              <a:t>여러 종류의 원자로</a:t>
+            </a:r>
+            <a:r>
+              <a:rPr lang="en-US" altLang="ko-KR" sz="1600" dirty="0"/>
+              <a:t>, </a:t>
+            </a:r>
+            <a:r>
+              <a:rPr lang="ko-KR" altLang="en-US" sz="1600" dirty="0"/>
+              <a:t>발전소의 설계와 건설</a:t>
+            </a:r>
+            <a:r>
+              <a:rPr lang="en-US" altLang="ko-KR" sz="1600" dirty="0"/>
+              <a:t>, </a:t>
+            </a:r>
+            <a:r>
+              <a:rPr lang="ko-KR" altLang="en-US" sz="1600" dirty="0"/>
+              <a:t>운영 보수 등 주요한 핵심 구성요소와 과정을 포함한다</a:t>
+            </a:r>
+            <a:r>
+              <a:rPr lang="en-US" altLang="ko-KR" sz="1600" dirty="0"/>
+              <a:t>.</a:t>
+            </a:r>
+          </a:p>
+          <a:p>
+            <a:pPr marL="377825" indent="-285750">
+              <a:lnSpc>
+                <a:spcPct val="150000"/>
+              </a:lnSpc>
+              <a:buFont typeface="Arial" panose="020B0604020202020204" pitchFamily="34" charset="0"/>
+              <a:buChar char="•"/>
+            </a:pPr>
+            <a:r>
+              <a:rPr lang="ko-KR" altLang="en-US" sz="1600" dirty="0"/>
+              <a:t>원자로는 설계 구조</a:t>
+            </a:r>
+            <a:r>
+              <a:rPr lang="en-US" altLang="ko-KR" sz="1600" dirty="0"/>
+              <a:t>, </a:t>
+            </a:r>
+            <a:r>
+              <a:rPr lang="ko-KR" altLang="en-US" sz="1600" dirty="0"/>
+              <a:t>연료 형태</a:t>
+            </a:r>
+            <a:r>
+              <a:rPr lang="en-US" altLang="ko-KR" sz="1600" dirty="0"/>
+              <a:t>, </a:t>
+            </a:r>
+            <a:r>
+              <a:rPr lang="ko-KR" altLang="en-US" sz="1600" dirty="0"/>
+              <a:t>감속재와 냉각재의 종류</a:t>
+            </a:r>
+            <a:r>
+              <a:rPr lang="en-US" altLang="ko-KR" sz="1600" dirty="0"/>
+              <a:t>, </a:t>
+            </a:r>
+            <a:r>
+              <a:rPr lang="ko-KR" altLang="en-US" sz="1600" dirty="0"/>
+              <a:t>연료 교체 방식</a:t>
+            </a:r>
+            <a:r>
+              <a:rPr lang="en-US" altLang="ko-KR" sz="1600" dirty="0"/>
+              <a:t>, </a:t>
+            </a:r>
+            <a:r>
+              <a:rPr lang="ko-KR" altLang="en-US" sz="1600" dirty="0"/>
+              <a:t>중성자 활용 방식 등에 따라 여러 유형으로 구분되며</a:t>
+            </a:r>
+            <a:r>
+              <a:rPr lang="en-US" altLang="ko-KR" sz="1600" dirty="0"/>
+              <a:t>, </a:t>
+            </a:r>
+            <a:r>
+              <a:rPr lang="ko-KR" altLang="en-US" sz="1600" dirty="0"/>
+              <a:t>각 원자로는 기술적 선택에 따라 특정한 운전 특성</a:t>
+            </a:r>
+            <a:r>
+              <a:rPr lang="en-US" altLang="ko-KR" sz="1600" dirty="0"/>
+              <a:t>, </a:t>
+            </a:r>
+            <a:r>
+              <a:rPr lang="ko-KR" altLang="en-US" sz="1600" dirty="0"/>
+              <a:t>효율성</a:t>
+            </a:r>
+            <a:r>
+              <a:rPr lang="en-US" altLang="ko-KR" sz="1600" dirty="0"/>
+              <a:t>, </a:t>
+            </a:r>
+            <a:r>
+              <a:rPr lang="ko-KR" altLang="en-US" sz="1600" dirty="0"/>
+              <a:t>안정성</a:t>
+            </a:r>
+            <a:r>
+              <a:rPr lang="en-US" altLang="ko-KR" sz="1600" dirty="0"/>
+              <a:t>, </a:t>
+            </a:r>
+            <a:r>
+              <a:rPr lang="ko-KR" altLang="en-US" sz="1600" dirty="0"/>
+              <a:t>경제성을 지닌다</a:t>
+            </a:r>
+            <a:r>
+              <a:rPr lang="en-US" altLang="ko-KR" sz="1600" dirty="0"/>
+              <a:t>.</a:t>
+            </a:r>
+          </a:p>
+          <a:p>
+            <a:pPr marL="835025" lvl="1" indent="-285750">
+              <a:lnSpc>
+                <a:spcPct val="150000"/>
+              </a:lnSpc>
+              <a:buFont typeface="Wingdings" panose="05000000000000000000" pitchFamily="2" charset="2"/>
+              <a:buChar char="ü"/>
+            </a:pPr>
+            <a:r>
+              <a:rPr lang="ko-KR" altLang="en-US" sz="1600" dirty="0"/>
+              <a:t>현재 상용화된 원자로는 대부분 </a:t>
+            </a:r>
+            <a:r>
+              <a:rPr lang="ko-KR" altLang="en-US" sz="1600" dirty="0" err="1"/>
+              <a:t>경수로형이지만</a:t>
+            </a:r>
+            <a:r>
+              <a:rPr lang="en-US" altLang="ko-KR" sz="1600" dirty="0"/>
+              <a:t>, </a:t>
+            </a:r>
+            <a:r>
+              <a:rPr lang="ko-KR" altLang="en-US" sz="1600" dirty="0"/>
+              <a:t>국가별 전략과 기술력에 따라 중수로</a:t>
+            </a:r>
+            <a:r>
+              <a:rPr lang="en-US" altLang="ko-KR" sz="1600" dirty="0"/>
+              <a:t>, </a:t>
+            </a:r>
+            <a:r>
+              <a:rPr lang="ko-KR" altLang="en-US" sz="1600" dirty="0"/>
+              <a:t>가스냉각형</a:t>
+            </a:r>
+            <a:r>
+              <a:rPr lang="en-US" altLang="ko-KR" sz="1600" dirty="0"/>
+              <a:t>, </a:t>
+            </a:r>
+            <a:r>
+              <a:rPr lang="ko-KR" altLang="en-US" sz="1600" dirty="0" err="1"/>
+              <a:t>고속로</a:t>
+            </a:r>
+            <a:r>
+              <a:rPr lang="ko-KR" altLang="en-US" sz="1600" dirty="0"/>
+              <a:t> 등 다양한 설계가 존재한다</a:t>
+            </a:r>
+            <a:r>
+              <a:rPr lang="en-US" altLang="ko-KR" sz="1600" dirty="0"/>
+              <a:t>.</a:t>
+            </a:r>
+          </a:p>
+          <a:p>
+            <a:pPr marL="835025" lvl="1" indent="-285750">
+              <a:lnSpc>
+                <a:spcPct val="150000"/>
+              </a:lnSpc>
+              <a:buFont typeface="Wingdings" panose="05000000000000000000" pitchFamily="2" charset="2"/>
+              <a:buChar char="ü"/>
+            </a:pPr>
+            <a:endParaRPr lang="en-US" altLang="ko-KR" sz="1600" dirty="0"/>
+          </a:p>
+          <a:p>
+            <a:pPr marL="377825" indent="-285750">
+              <a:lnSpc>
+                <a:spcPct val="150000"/>
+              </a:lnSpc>
+              <a:buFont typeface="Arial" panose="020B0604020202020204" pitchFamily="34" charset="0"/>
+              <a:buChar char="•"/>
+            </a:pPr>
+            <a:r>
+              <a:rPr lang="ko-KR" altLang="en-US" sz="1600" dirty="0"/>
+              <a:t>가장 널리 보급된 원자로 유형은 </a:t>
+            </a:r>
+            <a:r>
+              <a:rPr lang="ko-KR" altLang="en-US" sz="1600" dirty="0" err="1"/>
+              <a:t>가압수형</a:t>
+            </a:r>
+            <a:r>
+              <a:rPr lang="ko-KR" altLang="en-US" sz="1600" dirty="0"/>
+              <a:t> 원자로 </a:t>
+            </a:r>
+            <a:r>
+              <a:rPr lang="en-US" altLang="ko-KR" sz="1600" dirty="0"/>
+              <a:t>(Pressurized Water Reactor, PWR)</a:t>
+            </a:r>
+            <a:r>
+              <a:rPr lang="ko-KR" altLang="en-US" sz="1600" dirty="0"/>
+              <a:t>이며</a:t>
+            </a:r>
+            <a:r>
+              <a:rPr lang="en-US" altLang="ko-KR" sz="1600" dirty="0"/>
+              <a:t>, </a:t>
+            </a:r>
+            <a:r>
+              <a:rPr lang="ko-KR" altLang="en-US" sz="1600" dirty="0"/>
+              <a:t>전 세계 상업용 원자로의 약 </a:t>
+            </a:r>
+            <a:r>
+              <a:rPr lang="en-US" altLang="ko-KR" sz="1600" dirty="0"/>
+              <a:t>60% </a:t>
+            </a:r>
+            <a:r>
+              <a:rPr lang="ko-KR" altLang="en-US" sz="1600" dirty="0"/>
+              <a:t>이상이 이 방식에 기반한다</a:t>
+            </a:r>
+            <a:r>
+              <a:rPr lang="en-US" altLang="ko-KR" sz="1600" dirty="0"/>
+              <a:t>.</a:t>
+            </a:r>
+          </a:p>
+          <a:p>
+            <a:pPr marL="835025" lvl="1" indent="-285750">
+              <a:lnSpc>
+                <a:spcPct val="150000"/>
+              </a:lnSpc>
+              <a:buFont typeface="Wingdings" panose="05000000000000000000" pitchFamily="2" charset="2"/>
+              <a:buChar char="ü"/>
+            </a:pPr>
+            <a:r>
+              <a:rPr lang="ko-KR" altLang="en-US" sz="1600" dirty="0"/>
+              <a:t>물</a:t>
+            </a:r>
+            <a:r>
+              <a:rPr lang="en-US" altLang="ko-KR" sz="1600" dirty="0"/>
+              <a:t>(</a:t>
+            </a:r>
+            <a:r>
+              <a:rPr lang="ko-KR" altLang="en-US" sz="1600" dirty="0"/>
+              <a:t>경수</a:t>
+            </a:r>
+            <a:r>
+              <a:rPr lang="en-US" altLang="ko-KR" sz="1600" dirty="0"/>
+              <a:t>, light water)</a:t>
+            </a:r>
+            <a:r>
+              <a:rPr lang="ko-KR" altLang="en-US" sz="1600" dirty="0"/>
+              <a:t>을 냉각재이자 감속재로 사용하며</a:t>
+            </a:r>
+            <a:r>
+              <a:rPr lang="en-US" altLang="ko-KR" sz="1600" dirty="0"/>
+              <a:t>, </a:t>
+            </a:r>
+            <a:r>
+              <a:rPr lang="ko-KR" altLang="en-US" sz="1600" dirty="0"/>
+              <a:t>냉각수가 노심 내에서 비등하지 않도록 </a:t>
+            </a:r>
+            <a:r>
+              <a:rPr lang="en-US" altLang="ko-KR" sz="1600" dirty="0"/>
+              <a:t>(</a:t>
+            </a:r>
+            <a:r>
+              <a:rPr lang="ko-KR" altLang="en-US" sz="1600" dirty="0"/>
+              <a:t>물이 끓지 않도록</a:t>
+            </a:r>
+            <a:r>
+              <a:rPr lang="en-US" altLang="ko-KR" sz="1600" dirty="0"/>
+              <a:t>)</a:t>
+            </a:r>
+            <a:r>
+              <a:rPr lang="ko-KR" altLang="en-US" sz="1600" dirty="0"/>
+              <a:t> 고압 상태</a:t>
+            </a:r>
+            <a:r>
+              <a:rPr lang="en-US" altLang="ko-KR" sz="1600" dirty="0"/>
+              <a:t> (</a:t>
+            </a:r>
+            <a:r>
+              <a:rPr lang="ko-KR" altLang="en-US" sz="1600" dirty="0"/>
+              <a:t>약 </a:t>
+            </a:r>
+            <a:r>
+              <a:rPr lang="en-US" altLang="ko-KR" sz="1600" dirty="0"/>
+              <a:t>150</a:t>
+            </a:r>
+            <a:r>
+              <a:rPr lang="ko-KR" altLang="en-US" sz="1600" dirty="0"/>
+              <a:t>기압</a:t>
+            </a:r>
+            <a:r>
+              <a:rPr lang="en-US" altLang="ko-KR" sz="1600" dirty="0"/>
+              <a:t>)</a:t>
+            </a:r>
+            <a:r>
+              <a:rPr lang="ko-KR" altLang="en-US" sz="1600" dirty="0"/>
+              <a:t>로 유지된다</a:t>
+            </a:r>
+            <a:r>
+              <a:rPr lang="en-US" altLang="ko-KR" sz="1600" dirty="0"/>
+              <a:t>.</a:t>
+            </a:r>
+          </a:p>
+          <a:p>
+            <a:pPr marL="835025" lvl="1" indent="-285750">
+              <a:lnSpc>
+                <a:spcPct val="150000"/>
+              </a:lnSpc>
+              <a:buFont typeface="Wingdings" panose="05000000000000000000" pitchFamily="2" charset="2"/>
+              <a:buChar char="ü"/>
+            </a:pPr>
+            <a:r>
+              <a:rPr lang="ko-KR" altLang="en-US" sz="1600" dirty="0"/>
+              <a:t>핵분열 반응으로 발생한 열은 고압의 냉각수를 가열하고</a:t>
+            </a:r>
+            <a:r>
+              <a:rPr lang="en-US" altLang="ko-KR" sz="1600" dirty="0"/>
+              <a:t>, </a:t>
+            </a:r>
+            <a:r>
+              <a:rPr lang="ko-KR" altLang="en-US" sz="1600" dirty="0"/>
+              <a:t>이 열은 </a:t>
+            </a:r>
+            <a:r>
+              <a:rPr lang="en-US" altLang="ko-KR" sz="1600" dirty="0"/>
+              <a:t>2</a:t>
+            </a:r>
+            <a:r>
+              <a:rPr lang="ko-KR" altLang="en-US" sz="1600" dirty="0"/>
+              <a:t>차 계통의 증기발생기를 통해 별도의 증기 회로로 전달된다</a:t>
+            </a:r>
+            <a:r>
+              <a:rPr lang="en-US" altLang="ko-KR" sz="1600" dirty="0"/>
+              <a:t>.</a:t>
+            </a:r>
+          </a:p>
+          <a:p>
+            <a:pPr marL="835025" lvl="1" indent="-285750">
+              <a:lnSpc>
+                <a:spcPct val="150000"/>
+              </a:lnSpc>
+              <a:buFont typeface="Wingdings" panose="05000000000000000000" pitchFamily="2" charset="2"/>
+              <a:buChar char="ü"/>
+            </a:pPr>
+            <a:r>
+              <a:rPr lang="ko-KR" altLang="en-US" sz="1600" dirty="0"/>
+              <a:t>이로써 </a:t>
+            </a:r>
+            <a:r>
+              <a:rPr lang="en-US" altLang="ko-KR" sz="1600" dirty="0"/>
+              <a:t>2</a:t>
+            </a:r>
+            <a:r>
+              <a:rPr lang="ko-KR" altLang="en-US" sz="1600" dirty="0"/>
+              <a:t>차 계통의 물이 증기로 변하여 터빈을 회전시키고</a:t>
+            </a:r>
+            <a:r>
+              <a:rPr lang="en-US" altLang="ko-KR" sz="1600" dirty="0"/>
+              <a:t>, </a:t>
+            </a:r>
+            <a:r>
+              <a:rPr lang="ko-KR" altLang="en-US" sz="1600" dirty="0"/>
+              <a:t>발전기를 통해 전력이 생산된다</a:t>
+            </a:r>
+            <a:r>
+              <a:rPr lang="en-US" altLang="ko-KR" sz="1600" dirty="0"/>
+              <a:t>.</a:t>
+            </a:r>
+          </a:p>
+          <a:p>
+            <a:pPr marL="835025" lvl="1" indent="-285750">
+              <a:lnSpc>
+                <a:spcPct val="150000"/>
+              </a:lnSpc>
+              <a:buFont typeface="Wingdings" panose="05000000000000000000" pitchFamily="2" charset="2"/>
+              <a:buChar char="ü"/>
+            </a:pPr>
+            <a:r>
+              <a:rPr lang="ko-KR" altLang="en-US" sz="1600" dirty="0"/>
+              <a:t>노심과 터빈 계통이 물리적으로 분리되어 있어 방사선 관리가 용이하고</a:t>
+            </a:r>
+            <a:r>
+              <a:rPr lang="en-US" altLang="ko-KR" sz="1600" dirty="0"/>
+              <a:t>, </a:t>
+            </a:r>
+            <a:r>
+              <a:rPr lang="ko-KR" altLang="en-US" sz="1600" dirty="0"/>
+              <a:t>안정성이 높다</a:t>
+            </a:r>
+            <a:r>
+              <a:rPr lang="en-US" altLang="ko-KR" sz="1600" dirty="0"/>
+              <a:t>.</a:t>
+            </a:r>
+          </a:p>
+        </p:txBody>
+      </p:sp>
+    </p:spTree>
+    <p:extLst>
+      <p:ext uri="{BB962C8B-B14F-4D97-AF65-F5344CB8AC3E}">
+        <p14:creationId xmlns:p14="http://schemas.microsoft.com/office/powerpoint/2010/main" val="3632602004"/>
+      </p:ext>
+    </p:extLst>
+  </p:cSld>
+  <p:clrMapOvr>
+    <a:masterClrMapping/>
+  </p:clrMapOvr>
+</p:sld>
+</file>
+
+<file path=ppt/slides/slide21.xml><?xml version="1.0" encoding="utf-8"?>
+<p:sld xmlns:a="http://schemas.openxmlformats.org/drawingml/2006/main" xmlns:r="http://schemas.openxmlformats.org/officeDocument/2006/relationships" xmlns:p="http://schemas.openxmlformats.org/presentationml/2006/main">
+  <p:cSld>
+    <p:spTree>
+      <p:nvGrpSpPr>
+        <p:cNvPr id="1" name="">
+          <a:extLst>
+            <a:ext uri="{FF2B5EF4-FFF2-40B4-BE49-F238E27FC236}">
+              <a16:creationId xmlns:a16="http://schemas.microsoft.com/office/drawing/2014/main" id="{360713A2-393F-E88B-B0A2-09793D9CF62B}"/>
+            </a:ext>
+          </a:extLst>
+        </p:cNvPr>
+        <p:cNvGrpSpPr/>
+        <p:nvPr/>
+      </p:nvGrpSpPr>
+      <p:grpSpPr>
+        <a:xfrm>
+          <a:off x="0" y="0"/>
+          <a:ext cx="0" cy="0"/>
+          <a:chOff x="0" y="0"/>
+          <a:chExt cx="0" cy="0"/>
+        </a:xfrm>
+      </p:grpSpPr>
+      <p:sp>
+        <p:nvSpPr>
+          <p:cNvPr id="2" name="제목 1">
+            <a:extLst>
+              <a:ext uri="{FF2B5EF4-FFF2-40B4-BE49-F238E27FC236}">
+                <a16:creationId xmlns:a16="http://schemas.microsoft.com/office/drawing/2014/main" id="{3CACC7E3-CA1F-696D-9685-949DC1900EFF}"/>
+              </a:ext>
+            </a:extLst>
+          </p:cNvPr>
+          <p:cNvSpPr>
+            <a:spLocks noGrp="1"/>
+          </p:cNvSpPr>
+          <p:nvPr>
+            <p:ph type="title"/>
+          </p:nvPr>
+        </p:nvSpPr>
+        <p:spPr/>
+        <p:txBody>
+          <a:bodyPr/>
+          <a:lstStyle/>
+          <a:p>
+            <a:r>
+              <a:rPr lang="ko-KR" altLang="en-US" dirty="0"/>
+              <a:t>주요 원자로 유형</a:t>
+            </a:r>
+          </a:p>
+        </p:txBody>
+      </p:sp>
+      <p:sp>
+        <p:nvSpPr>
+          <p:cNvPr id="4" name="슬라이드 번호 개체 틀 3">
+            <a:extLst>
+              <a:ext uri="{FF2B5EF4-FFF2-40B4-BE49-F238E27FC236}">
+                <a16:creationId xmlns:a16="http://schemas.microsoft.com/office/drawing/2014/main" id="{B9376F46-70F9-FF87-7E26-9F54D6302309}"/>
+              </a:ext>
+            </a:extLst>
+          </p:cNvPr>
+          <p:cNvSpPr>
+            <a:spLocks noGrp="1"/>
+          </p:cNvSpPr>
+          <p:nvPr>
+            <p:ph type="sldNum" sz="quarter" idx="12"/>
+          </p:nvPr>
+        </p:nvSpPr>
+        <p:spPr/>
+        <p:txBody>
+          <a:bodyPr/>
+          <a:lstStyle/>
+          <a:p>
+            <a:fld id="{109C872D-39A9-4065-8BF3-6A613116E2A1}" type="slidenum">
+              <a:rPr lang="ko-KR" altLang="en-US" smtClean="0"/>
+              <a:t>21</a:t>
+            </a:fld>
+            <a:endParaRPr lang="ko-KR" altLang="en-US"/>
+          </a:p>
+        </p:txBody>
+      </p:sp>
+      <p:sp>
+        <p:nvSpPr>
+          <p:cNvPr id="3" name="TextBox 2">
+            <a:extLst>
+              <a:ext uri="{FF2B5EF4-FFF2-40B4-BE49-F238E27FC236}">
+                <a16:creationId xmlns:a16="http://schemas.microsoft.com/office/drawing/2014/main" id="{F059E40B-AA33-493D-27A0-ED6A582A4EA3}"/>
+              </a:ext>
+            </a:extLst>
+          </p:cNvPr>
+          <p:cNvSpPr txBox="1"/>
+          <p:nvPr/>
+        </p:nvSpPr>
+        <p:spPr>
+          <a:xfrm>
+            <a:off x="288790" y="958844"/>
+            <a:ext cx="5950645" cy="4107343"/>
+          </a:xfrm>
+          <a:prstGeom prst="rect">
+            <a:avLst/>
+          </a:prstGeom>
+          <a:noFill/>
+        </p:spPr>
+        <p:txBody>
+          <a:bodyPr wrap="square" rtlCol="0" anchor="t">
+            <a:spAutoFit/>
+          </a:bodyPr>
+          <a:lstStyle/>
+          <a:p>
+            <a:pPr marL="377825" indent="-285750">
+              <a:lnSpc>
+                <a:spcPct val="150000"/>
+              </a:lnSpc>
+              <a:buFont typeface="Arial" panose="020B0604020202020204" pitchFamily="34" charset="0"/>
+              <a:buChar char="•"/>
+            </a:pPr>
+            <a:r>
+              <a:rPr lang="ko-KR" altLang="en-US" sz="1600" dirty="0" err="1"/>
+              <a:t>비등수형</a:t>
+            </a:r>
+            <a:r>
+              <a:rPr lang="ko-KR" altLang="en-US" sz="1600" dirty="0"/>
+              <a:t> 원자로</a:t>
+            </a:r>
+            <a:r>
+              <a:rPr lang="en-US" altLang="ko-KR" sz="1600" dirty="0"/>
+              <a:t>(Boiling Water Reactor, BWR) </a:t>
+            </a:r>
+            <a:r>
+              <a:rPr lang="ko-KR" altLang="en-US" sz="1600" dirty="0"/>
+              <a:t>역시 경수를 냉각재와 감소재로 사용하지만</a:t>
+            </a:r>
+            <a:r>
+              <a:rPr lang="en-US" altLang="ko-KR" sz="1600" dirty="0"/>
+              <a:t>, </a:t>
+            </a:r>
+            <a:r>
+              <a:rPr lang="ko-KR" altLang="en-US" sz="1600" dirty="0"/>
+              <a:t>냉각수가 노심에서 직접 비등하여</a:t>
+            </a:r>
+            <a:r>
+              <a:rPr lang="en-US" altLang="ko-KR" sz="1600" dirty="0"/>
+              <a:t>(</a:t>
+            </a:r>
+            <a:r>
+              <a:rPr lang="ko-KR" altLang="en-US" sz="1600" dirty="0"/>
+              <a:t>끓어</a:t>
+            </a:r>
+            <a:r>
+              <a:rPr lang="en-US" altLang="ko-KR" sz="1600" dirty="0"/>
+              <a:t>), </a:t>
+            </a:r>
+            <a:r>
+              <a:rPr lang="ko-KR" altLang="en-US" sz="1600" dirty="0"/>
+              <a:t>증기로 변환된다는 점에서 </a:t>
+            </a:r>
+            <a:r>
+              <a:rPr lang="en-US" altLang="ko-KR" sz="1600" dirty="0"/>
+              <a:t>PWR</a:t>
+            </a:r>
+            <a:r>
+              <a:rPr lang="ko-KR" altLang="en-US" sz="1600" dirty="0"/>
+              <a:t>과 구별된다</a:t>
+            </a:r>
+            <a:r>
+              <a:rPr lang="en-US" altLang="ko-KR" sz="1600" dirty="0"/>
+              <a:t>.</a:t>
+            </a:r>
+          </a:p>
+          <a:p>
+            <a:pPr marL="835025" lvl="1" indent="-285750">
+              <a:lnSpc>
+                <a:spcPct val="150000"/>
+              </a:lnSpc>
+              <a:buFont typeface="Wingdings" panose="05000000000000000000" pitchFamily="2" charset="2"/>
+              <a:buChar char="ü"/>
+            </a:pPr>
+            <a:r>
+              <a:rPr lang="ko-KR" altLang="en-US" sz="1600" dirty="0"/>
+              <a:t>생성된 증기는 중간 열 교환기를 거치지 않고 곧바로 터빈으로 직접 공급되어 발전을 수행한다</a:t>
+            </a:r>
+            <a:r>
+              <a:rPr lang="en-US" altLang="ko-KR" sz="1600" dirty="0"/>
+              <a:t>.</a:t>
+            </a:r>
+          </a:p>
+          <a:p>
+            <a:pPr marL="1292225" lvl="2" indent="-285750">
+              <a:lnSpc>
+                <a:spcPct val="150000"/>
+              </a:lnSpc>
+              <a:buFont typeface="Wingdings" panose="05000000000000000000" pitchFamily="2" charset="2"/>
+              <a:buChar char="Ø"/>
+            </a:pPr>
+            <a:r>
+              <a:rPr lang="ko-KR" altLang="en-US" sz="1600" dirty="0"/>
+              <a:t>이러한 구조는 열효율을 높이는 동시에 설계 단순화를 가능하게 하지만</a:t>
+            </a:r>
+            <a:r>
+              <a:rPr lang="en-US" altLang="ko-KR" sz="1600" dirty="0"/>
+              <a:t>, </a:t>
+            </a:r>
+            <a:r>
+              <a:rPr lang="ko-KR" altLang="en-US" sz="1600" dirty="0"/>
+              <a:t>노심에서 생성된 증기가 직접 터빈으로 유입되기 때문에 터빈 계통에도 방사성 물질이 포함될 가능성이 있으며</a:t>
+            </a:r>
+            <a:r>
+              <a:rPr lang="en-US" altLang="ko-KR" sz="1600" dirty="0"/>
+              <a:t>, </a:t>
+            </a:r>
+            <a:r>
+              <a:rPr lang="ko-KR" altLang="en-US" sz="1600" dirty="0"/>
+              <a:t>이에 따라 방사선 차폐 및 유지관리 기준이 상대적으로 엄격하다</a:t>
+            </a:r>
+            <a:r>
+              <a:rPr lang="en-US" altLang="ko-KR" sz="1600" dirty="0"/>
+              <a:t>.</a:t>
+            </a:r>
+          </a:p>
+        </p:txBody>
+      </p:sp>
+      <p:pic>
+        <p:nvPicPr>
+          <p:cNvPr id="6" name="그림 5">
+            <a:extLst>
+              <a:ext uri="{FF2B5EF4-FFF2-40B4-BE49-F238E27FC236}">
+                <a16:creationId xmlns:a16="http://schemas.microsoft.com/office/drawing/2014/main" id="{37B96352-D774-C5DA-2D3E-DDEE1C15A4F2}"/>
+              </a:ext>
+            </a:extLst>
+          </p:cNvPr>
+          <p:cNvPicPr>
+            <a:picLocks noChangeAspect="1"/>
+          </p:cNvPicPr>
+          <p:nvPr/>
+        </p:nvPicPr>
+        <p:blipFill>
+          <a:blip r:embed="rId2"/>
+          <a:stretch>
+            <a:fillRect/>
+          </a:stretch>
+        </p:blipFill>
+        <p:spPr>
+          <a:xfrm>
+            <a:off x="7093324" y="260149"/>
+            <a:ext cx="4192807" cy="6481793"/>
+          </a:xfrm>
+          <a:prstGeom prst="rect">
+            <a:avLst/>
+          </a:prstGeom>
+        </p:spPr>
+      </p:pic>
+      <p:sp>
+        <p:nvSpPr>
+          <p:cNvPr id="7" name="TextBox 6">
+            <a:extLst>
+              <a:ext uri="{FF2B5EF4-FFF2-40B4-BE49-F238E27FC236}">
+                <a16:creationId xmlns:a16="http://schemas.microsoft.com/office/drawing/2014/main" id="{EE3EC377-8BA2-A45D-7694-4BD98EE24C11}"/>
+              </a:ext>
+            </a:extLst>
+          </p:cNvPr>
+          <p:cNvSpPr txBox="1"/>
+          <p:nvPr/>
+        </p:nvSpPr>
+        <p:spPr>
+          <a:xfrm>
+            <a:off x="2174155" y="6350290"/>
+            <a:ext cx="6135220" cy="261610"/>
+          </a:xfrm>
+          <a:prstGeom prst="rect">
+            <a:avLst/>
+          </a:prstGeom>
+          <a:noFill/>
+        </p:spPr>
+        <p:txBody>
+          <a:bodyPr wrap="square">
+            <a:spAutoFit/>
+          </a:bodyPr>
+          <a:lstStyle/>
+          <a:p>
+            <a:r>
+              <a:rPr lang="ko-KR" altLang="en-US" sz="1100" dirty="0"/>
+              <a:t>http://www.kns.org:8116/index.php?mid=kns_board_02&amp;document_srl=270</a:t>
+            </a:r>
+          </a:p>
+        </p:txBody>
+      </p:sp>
+    </p:spTree>
+    <p:extLst>
+      <p:ext uri="{BB962C8B-B14F-4D97-AF65-F5344CB8AC3E}">
+        <p14:creationId xmlns:p14="http://schemas.microsoft.com/office/powerpoint/2010/main" val="2822524612"/>
+      </p:ext>
+    </p:extLst>
+  </p:cSld>
+  <p:clrMapOvr>
+    <a:masterClrMapping/>
+  </p:clrMapOvr>
+</p:sld>
+</file>
+
+<file path=ppt/slides/slide22.xml><?xml version="1.0" encoding="utf-8"?>
+<p:sld xmlns:a="http://schemas.openxmlformats.org/drawingml/2006/main" xmlns:r="http://schemas.openxmlformats.org/officeDocument/2006/relationships" xmlns:p="http://schemas.openxmlformats.org/presentationml/2006/main">
+  <p:cSld>
+    <p:spTree>
+      <p:nvGrpSpPr>
+        <p:cNvPr id="1" name="">
+          <a:extLst>
+            <a:ext uri="{FF2B5EF4-FFF2-40B4-BE49-F238E27FC236}">
+              <a16:creationId xmlns:a16="http://schemas.microsoft.com/office/drawing/2014/main" id="{64167020-7DB5-736E-519E-593C08065E03}"/>
+            </a:ext>
+          </a:extLst>
+        </p:cNvPr>
+        <p:cNvGrpSpPr/>
+        <p:nvPr/>
+      </p:nvGrpSpPr>
+      <p:grpSpPr>
+        <a:xfrm>
+          <a:off x="0" y="0"/>
+          <a:ext cx="0" cy="0"/>
+          <a:chOff x="0" y="0"/>
+          <a:chExt cx="0" cy="0"/>
+        </a:xfrm>
+      </p:grpSpPr>
+      <p:sp>
+        <p:nvSpPr>
+          <p:cNvPr id="2" name="제목 1">
+            <a:extLst>
+              <a:ext uri="{FF2B5EF4-FFF2-40B4-BE49-F238E27FC236}">
+                <a16:creationId xmlns:a16="http://schemas.microsoft.com/office/drawing/2014/main" id="{BACF7CF9-8359-B3E7-6C84-E6BA000ECA46}"/>
+              </a:ext>
+            </a:extLst>
+          </p:cNvPr>
+          <p:cNvSpPr>
+            <a:spLocks noGrp="1"/>
+          </p:cNvSpPr>
+          <p:nvPr>
+            <p:ph type="title"/>
+          </p:nvPr>
+        </p:nvSpPr>
+        <p:spPr/>
+        <p:txBody>
+          <a:bodyPr/>
+          <a:lstStyle/>
+          <a:p>
+            <a:r>
+              <a:rPr lang="ko-KR" altLang="en-US" dirty="0"/>
+              <a:t>원자력 발전소의 설계와 건설 과정</a:t>
+            </a:r>
+          </a:p>
+        </p:txBody>
+      </p:sp>
+      <p:sp>
+        <p:nvSpPr>
+          <p:cNvPr id="4" name="슬라이드 번호 개체 틀 3">
+            <a:extLst>
+              <a:ext uri="{FF2B5EF4-FFF2-40B4-BE49-F238E27FC236}">
+                <a16:creationId xmlns:a16="http://schemas.microsoft.com/office/drawing/2014/main" id="{34733FC6-9E73-E7B9-F92D-629F67054A8A}"/>
+              </a:ext>
+            </a:extLst>
+          </p:cNvPr>
+          <p:cNvSpPr>
+            <a:spLocks noGrp="1"/>
+          </p:cNvSpPr>
+          <p:nvPr>
+            <p:ph type="sldNum" sz="quarter" idx="12"/>
+          </p:nvPr>
+        </p:nvSpPr>
+        <p:spPr/>
+        <p:txBody>
+          <a:bodyPr/>
+          <a:lstStyle/>
+          <a:p>
+            <a:fld id="{109C872D-39A9-4065-8BF3-6A613116E2A1}" type="slidenum">
+              <a:rPr lang="ko-KR" altLang="en-US" smtClean="0"/>
+              <a:t>22</a:t>
+            </a:fld>
+            <a:endParaRPr lang="ko-KR" altLang="en-US"/>
+          </a:p>
+        </p:txBody>
+      </p:sp>
+      <p:sp>
+        <p:nvSpPr>
+          <p:cNvPr id="3" name="TextBox 2">
+            <a:extLst>
+              <a:ext uri="{FF2B5EF4-FFF2-40B4-BE49-F238E27FC236}">
+                <a16:creationId xmlns:a16="http://schemas.microsoft.com/office/drawing/2014/main" id="{431FDE57-A040-9601-DA62-8E9F0AA8CE6D}"/>
+              </a:ext>
+            </a:extLst>
+          </p:cNvPr>
+          <p:cNvSpPr txBox="1"/>
+          <p:nvPr/>
+        </p:nvSpPr>
+        <p:spPr>
+          <a:xfrm>
+            <a:off x="288790" y="958844"/>
+            <a:ext cx="11118453" cy="4107343"/>
+          </a:xfrm>
+          <a:prstGeom prst="rect">
+            <a:avLst/>
+          </a:prstGeom>
+          <a:noFill/>
+        </p:spPr>
+        <p:txBody>
+          <a:bodyPr wrap="square" rtlCol="0" anchor="t">
+            <a:spAutoFit/>
+          </a:bodyPr>
+          <a:lstStyle/>
+          <a:p>
+            <a:pPr marL="377825" indent="-285750">
+              <a:lnSpc>
+                <a:spcPct val="150000"/>
+              </a:lnSpc>
+              <a:buFont typeface="Arial" panose="020B0604020202020204" pitchFamily="34" charset="0"/>
+              <a:buChar char="•"/>
+            </a:pPr>
+            <a:r>
+              <a:rPr lang="ko-KR" altLang="en-US" sz="1600" dirty="0"/>
+              <a:t>원자력 발전소의 설계 및 건설은 일반적인 발전소에 비해 훨씬 더 장기적이고 복잡한 과정을 수반한다</a:t>
+            </a:r>
+            <a:r>
+              <a:rPr lang="en-US" altLang="ko-KR" sz="1600" dirty="0"/>
+              <a:t>.</a:t>
+            </a:r>
+          </a:p>
+          <a:p>
+            <a:pPr marL="835025" lvl="1" indent="-285750">
+              <a:lnSpc>
+                <a:spcPct val="150000"/>
+              </a:lnSpc>
+              <a:buFont typeface="Wingdings" panose="05000000000000000000" pitchFamily="2" charset="2"/>
+              <a:buChar char="ü"/>
+            </a:pPr>
+            <a:r>
+              <a:rPr lang="ko-KR" altLang="en-US" sz="1600" dirty="0"/>
+              <a:t>평균 </a:t>
+            </a:r>
+            <a:r>
+              <a:rPr lang="en-US" altLang="ko-KR" sz="1600" dirty="0"/>
+              <a:t>10</a:t>
+            </a:r>
+            <a:r>
+              <a:rPr lang="ko-KR" altLang="en-US" sz="1600" dirty="0"/>
+              <a:t>년 이상의 시간</a:t>
+            </a:r>
+            <a:r>
+              <a:rPr lang="en-US" altLang="ko-KR" sz="1600" dirty="0"/>
+              <a:t>, </a:t>
+            </a:r>
+            <a:r>
+              <a:rPr lang="ko-KR" altLang="en-US" sz="1600" dirty="0"/>
+              <a:t>수십억 달러의 투자 자금</a:t>
+            </a:r>
+            <a:r>
+              <a:rPr lang="en-US" altLang="ko-KR" sz="1600" dirty="0"/>
+              <a:t>, </a:t>
+            </a:r>
+            <a:r>
+              <a:rPr lang="ko-KR" altLang="en-US" sz="1600" dirty="0"/>
+              <a:t>수많은 기술적</a:t>
+            </a:r>
+            <a:r>
+              <a:rPr lang="en-US" altLang="ko-KR" sz="1600" dirty="0"/>
+              <a:t>·</a:t>
+            </a:r>
+            <a:r>
+              <a:rPr lang="ko-KR" altLang="en-US" sz="1600" dirty="0"/>
+              <a:t>제도적 요건이 요구된다</a:t>
+            </a:r>
+            <a:r>
+              <a:rPr lang="en-US" altLang="ko-KR" sz="1600" dirty="0"/>
+              <a:t>.</a:t>
+            </a:r>
+          </a:p>
+          <a:p>
+            <a:pPr marL="835025" lvl="1" indent="-285750">
+              <a:lnSpc>
+                <a:spcPct val="150000"/>
+              </a:lnSpc>
+              <a:buFont typeface="Wingdings" panose="05000000000000000000" pitchFamily="2" charset="2"/>
+              <a:buChar char="ü"/>
+            </a:pPr>
+            <a:r>
+              <a:rPr lang="ko-KR" altLang="en-US" sz="1600" dirty="0"/>
+              <a:t>방사선과 고온 고압 환경을 다루는 핵심 기반시설인 만큼</a:t>
+            </a:r>
+            <a:r>
+              <a:rPr lang="en-US" altLang="ko-KR" sz="1600" dirty="0"/>
+              <a:t>, </a:t>
+            </a:r>
+            <a:r>
+              <a:rPr lang="ko-KR" altLang="en-US" sz="1600" dirty="0"/>
+              <a:t>이 과정은 국가별 규제체계와 국제 안전 기준에 따라 철저히 관리되며</a:t>
+            </a:r>
+            <a:r>
+              <a:rPr lang="en-US" altLang="ko-KR" sz="1600" dirty="0"/>
+              <a:t>, </a:t>
+            </a:r>
+            <a:r>
+              <a:rPr lang="ko-KR" altLang="en-US" sz="1600" dirty="0"/>
+              <a:t>사회적 수용성과 정치적 안정성도 프로젝트의 성공에 결정적 영향을 미친다</a:t>
+            </a:r>
+            <a:r>
+              <a:rPr lang="en-US" altLang="ko-KR" sz="1600" dirty="0"/>
+              <a:t>.</a:t>
+            </a:r>
+          </a:p>
+          <a:p>
+            <a:pPr marL="377825" indent="-285750">
+              <a:lnSpc>
+                <a:spcPct val="150000"/>
+              </a:lnSpc>
+              <a:buFont typeface="Arial" panose="020B0604020202020204" pitchFamily="34" charset="0"/>
+              <a:buChar char="•"/>
+            </a:pPr>
+            <a:endParaRPr lang="en-US" altLang="ko-KR" sz="1600" dirty="0"/>
+          </a:p>
+          <a:p>
+            <a:pPr marL="377825" indent="-285750">
+              <a:lnSpc>
+                <a:spcPct val="150000"/>
+              </a:lnSpc>
+              <a:buFont typeface="Arial" panose="020B0604020202020204" pitchFamily="34" charset="0"/>
+              <a:buChar char="•"/>
+            </a:pPr>
+            <a:r>
+              <a:rPr lang="ko-KR" altLang="en-US" sz="1600" dirty="0"/>
+              <a:t>가장 초기 단계인 부지 선정은 지질학적 안정성</a:t>
+            </a:r>
+            <a:r>
+              <a:rPr lang="en-US" altLang="ko-KR" sz="1600" dirty="0"/>
+              <a:t>, </a:t>
+            </a:r>
+            <a:r>
+              <a:rPr lang="ko-KR" altLang="en-US" sz="1600" dirty="0"/>
+              <a:t>인근 활성 단층의 유무</a:t>
+            </a:r>
+            <a:r>
+              <a:rPr lang="en-US" altLang="ko-KR" sz="1600" dirty="0"/>
+              <a:t>, </a:t>
+            </a:r>
+            <a:r>
+              <a:rPr lang="ko-KR" altLang="en-US" sz="1600" dirty="0"/>
+              <a:t>해수나 담수와 같은 냉각수원의 접근성</a:t>
+            </a:r>
+            <a:r>
+              <a:rPr lang="en-US" altLang="ko-KR" sz="1600" dirty="0"/>
+              <a:t>, </a:t>
+            </a:r>
+            <a:r>
+              <a:rPr lang="ko-KR" altLang="en-US" sz="1600" dirty="0"/>
+              <a:t>홍수</a:t>
+            </a:r>
+            <a:r>
+              <a:rPr lang="en-US" altLang="ko-KR" sz="1600" dirty="0"/>
+              <a:t>·</a:t>
+            </a:r>
+            <a:r>
+              <a:rPr lang="ko-KR" altLang="en-US" sz="1600" dirty="0"/>
+              <a:t>지진</a:t>
+            </a:r>
+            <a:r>
+              <a:rPr lang="en-US" altLang="ko-KR" sz="1600" dirty="0"/>
+              <a:t>·</a:t>
+            </a:r>
+            <a:r>
+              <a:rPr lang="ko-KR" altLang="en-US" sz="1600" dirty="0"/>
+              <a:t>해일</a:t>
+            </a:r>
+            <a:r>
+              <a:rPr lang="en-US" altLang="ko-KR" sz="1600" dirty="0"/>
+              <a:t> </a:t>
+            </a:r>
+            <a:r>
+              <a:rPr lang="ko-KR" altLang="en-US" sz="1600" dirty="0"/>
+              <a:t>등의 자연재해 위험</a:t>
+            </a:r>
+            <a:r>
+              <a:rPr lang="en-US" altLang="ko-KR" sz="1600" dirty="0"/>
+              <a:t>, </a:t>
+            </a:r>
+            <a:r>
+              <a:rPr lang="ko-KR" altLang="en-US" sz="1600" dirty="0"/>
+              <a:t>그리고 인구 밀집 지역과의 거리 등 복합적인 환경적</a:t>
+            </a:r>
+            <a:r>
+              <a:rPr lang="en-US" altLang="ko-KR" sz="1600" dirty="0"/>
+              <a:t>·</a:t>
+            </a:r>
+            <a:r>
+              <a:rPr lang="ko-KR" altLang="en-US" sz="1600" dirty="0"/>
+              <a:t>사회적 요인을 종합적으로 고려하여 결정하게 된다</a:t>
+            </a:r>
+            <a:r>
+              <a:rPr lang="en-US" altLang="ko-KR" sz="1600" dirty="0"/>
+              <a:t>.</a:t>
+            </a:r>
+          </a:p>
+          <a:p>
+            <a:pPr marL="835025" lvl="1" indent="-285750">
+              <a:lnSpc>
+                <a:spcPct val="150000"/>
+              </a:lnSpc>
+              <a:buFont typeface="Wingdings" panose="05000000000000000000" pitchFamily="2" charset="2"/>
+              <a:buChar char="ü"/>
+            </a:pPr>
+            <a:r>
+              <a:rPr lang="ko-KR" altLang="en-US" sz="1600" dirty="0"/>
+              <a:t>부지 선정단계에서는 사전 환경영향평가</a:t>
+            </a:r>
+            <a:r>
+              <a:rPr lang="en-US" altLang="ko-KR" sz="1600" dirty="0"/>
+              <a:t>, </a:t>
+            </a:r>
+            <a:r>
+              <a:rPr lang="ko-KR" altLang="en-US" sz="1600" dirty="0"/>
+              <a:t>방사능 확산 모델링</a:t>
+            </a:r>
+            <a:r>
+              <a:rPr lang="en-US" altLang="ko-KR" sz="1600" dirty="0"/>
+              <a:t>, </a:t>
+            </a:r>
+            <a:r>
+              <a:rPr lang="ko-KR" altLang="en-US" sz="1600" dirty="0"/>
+              <a:t>비상대응계획 수립 가능성 등을 포함한다</a:t>
+            </a:r>
+            <a:r>
+              <a:rPr lang="en-US" altLang="ko-KR" sz="1600" dirty="0"/>
+              <a:t>.</a:t>
+            </a:r>
+          </a:p>
+          <a:p>
+            <a:pPr marL="835025" lvl="1" indent="-285750">
+              <a:lnSpc>
+                <a:spcPct val="150000"/>
+              </a:lnSpc>
+              <a:buFont typeface="Wingdings" panose="05000000000000000000" pitchFamily="2" charset="2"/>
+              <a:buChar char="ü"/>
+            </a:pPr>
+            <a:r>
+              <a:rPr lang="ko-KR" altLang="en-US" sz="1600" dirty="0"/>
+              <a:t>국제원자력기구의 지침에 따르면</a:t>
+            </a:r>
+            <a:r>
+              <a:rPr lang="en-US" altLang="ko-KR" sz="1600" dirty="0"/>
+              <a:t>, </a:t>
+            </a:r>
+            <a:r>
+              <a:rPr lang="ko-KR" altLang="en-US" sz="1600" dirty="0"/>
+              <a:t>이러한 평가 과정은 기술적 타당성 뿐만 아니라 공공참여와 지역사회 의견 수렴 절차를 포함한다</a:t>
+            </a:r>
+            <a:r>
+              <a:rPr lang="en-US" altLang="ko-KR" sz="1600" dirty="0"/>
+              <a:t>.</a:t>
+            </a:r>
+          </a:p>
+        </p:txBody>
+      </p:sp>
+    </p:spTree>
+    <p:extLst>
+      <p:ext uri="{BB962C8B-B14F-4D97-AF65-F5344CB8AC3E}">
+        <p14:creationId xmlns:p14="http://schemas.microsoft.com/office/powerpoint/2010/main" val="1928768237"/>
+      </p:ext>
+    </p:extLst>
+  </p:cSld>
+  <p:clrMapOvr>
+    <a:masterClrMapping/>
+  </p:clrMapOvr>
+</p:sld>
+</file>
+
+<file path=ppt/slides/slide23.xml><?xml version="1.0" encoding="utf-8"?>
+<p:sld xmlns:a="http://schemas.openxmlformats.org/drawingml/2006/main" xmlns:r="http://schemas.openxmlformats.org/officeDocument/2006/relationships" xmlns:p="http://schemas.openxmlformats.org/presentationml/2006/main">
+  <p:cSld>
+    <p:spTree>
+      <p:nvGrpSpPr>
+        <p:cNvPr id="1" name="">
+          <a:extLst>
+            <a:ext uri="{FF2B5EF4-FFF2-40B4-BE49-F238E27FC236}">
+              <a16:creationId xmlns:a16="http://schemas.microsoft.com/office/drawing/2014/main" id="{719DA936-2B01-E8B3-0415-5696951688B6}"/>
+            </a:ext>
+          </a:extLst>
+        </p:cNvPr>
+        <p:cNvGrpSpPr/>
+        <p:nvPr/>
+      </p:nvGrpSpPr>
+      <p:grpSpPr>
+        <a:xfrm>
+          <a:off x="0" y="0"/>
+          <a:ext cx="0" cy="0"/>
+          <a:chOff x="0" y="0"/>
+          <a:chExt cx="0" cy="0"/>
+        </a:xfrm>
+      </p:grpSpPr>
+      <p:sp>
+        <p:nvSpPr>
+          <p:cNvPr id="2" name="제목 1">
+            <a:extLst>
+              <a:ext uri="{FF2B5EF4-FFF2-40B4-BE49-F238E27FC236}">
+                <a16:creationId xmlns:a16="http://schemas.microsoft.com/office/drawing/2014/main" id="{9476DC7B-4C01-596C-B642-D3B854B60B37}"/>
+              </a:ext>
+            </a:extLst>
+          </p:cNvPr>
+          <p:cNvSpPr>
+            <a:spLocks noGrp="1"/>
+          </p:cNvSpPr>
+          <p:nvPr>
+            <p:ph type="title"/>
+          </p:nvPr>
+        </p:nvSpPr>
+        <p:spPr/>
+        <p:txBody>
+          <a:bodyPr/>
+          <a:lstStyle/>
+          <a:p>
+            <a:r>
+              <a:rPr lang="ko-KR" altLang="en-US" dirty="0"/>
+              <a:t>원자력 발전소의 설계와 건설 과정</a:t>
+            </a:r>
+          </a:p>
+        </p:txBody>
+      </p:sp>
+      <p:sp>
+        <p:nvSpPr>
+          <p:cNvPr id="4" name="슬라이드 번호 개체 틀 3">
+            <a:extLst>
+              <a:ext uri="{FF2B5EF4-FFF2-40B4-BE49-F238E27FC236}">
+                <a16:creationId xmlns:a16="http://schemas.microsoft.com/office/drawing/2014/main" id="{B3061744-BE55-86BE-78A8-8F5A8895B5E6}"/>
+              </a:ext>
+            </a:extLst>
+          </p:cNvPr>
+          <p:cNvSpPr>
+            <a:spLocks noGrp="1"/>
+          </p:cNvSpPr>
+          <p:nvPr>
+            <p:ph type="sldNum" sz="quarter" idx="12"/>
+          </p:nvPr>
+        </p:nvSpPr>
+        <p:spPr/>
+        <p:txBody>
+          <a:bodyPr/>
+          <a:lstStyle/>
+          <a:p>
+            <a:fld id="{109C872D-39A9-4065-8BF3-6A613116E2A1}" type="slidenum">
+              <a:rPr lang="ko-KR" altLang="en-US" smtClean="0"/>
+              <a:t>23</a:t>
+            </a:fld>
+            <a:endParaRPr lang="ko-KR" altLang="en-US"/>
+          </a:p>
+        </p:txBody>
+      </p:sp>
+      <p:sp>
+        <p:nvSpPr>
+          <p:cNvPr id="3" name="TextBox 2">
+            <a:extLst>
+              <a:ext uri="{FF2B5EF4-FFF2-40B4-BE49-F238E27FC236}">
+                <a16:creationId xmlns:a16="http://schemas.microsoft.com/office/drawing/2014/main" id="{7449D114-CBDB-0D49-BD73-795E80033010}"/>
+              </a:ext>
+            </a:extLst>
+          </p:cNvPr>
+          <p:cNvSpPr txBox="1"/>
+          <p:nvPr/>
+        </p:nvSpPr>
+        <p:spPr>
+          <a:xfrm>
+            <a:off x="288790" y="958844"/>
+            <a:ext cx="11118453" cy="4476675"/>
+          </a:xfrm>
+          <a:prstGeom prst="rect">
+            <a:avLst/>
+          </a:prstGeom>
+          <a:noFill/>
+        </p:spPr>
+        <p:txBody>
+          <a:bodyPr wrap="square" rtlCol="0" anchor="t">
+            <a:spAutoFit/>
+          </a:bodyPr>
+          <a:lstStyle/>
+          <a:p>
+            <a:pPr marL="377825" indent="-285750">
+              <a:lnSpc>
+                <a:spcPct val="150000"/>
+              </a:lnSpc>
+              <a:buFont typeface="Arial" panose="020B0604020202020204" pitchFamily="34" charset="0"/>
+              <a:buChar char="•"/>
+            </a:pPr>
+            <a:r>
+              <a:rPr lang="ko-KR" altLang="en-US" sz="1600" dirty="0"/>
+              <a:t>부지 승인이 완료되면 설계 및 엔지니어링 단계가 본격적으로 시작된다</a:t>
+            </a:r>
+            <a:r>
+              <a:rPr lang="en-US" altLang="ko-KR" sz="1600" dirty="0"/>
+              <a:t>.</a:t>
+            </a:r>
+          </a:p>
+          <a:p>
+            <a:pPr marL="835025" lvl="1" indent="-285750">
+              <a:lnSpc>
+                <a:spcPct val="150000"/>
+              </a:lnSpc>
+              <a:buFont typeface="Wingdings" panose="05000000000000000000" pitchFamily="2" charset="2"/>
+              <a:buChar char="ü"/>
+            </a:pPr>
+            <a:r>
+              <a:rPr lang="ko-KR" altLang="en-US" sz="1600" dirty="0"/>
+              <a:t>이 과정에서는 원자로의 종류</a:t>
+            </a:r>
+            <a:r>
+              <a:rPr lang="en-US" altLang="ko-KR" sz="1600" dirty="0"/>
+              <a:t>(PWR, BWR </a:t>
+            </a:r>
+            <a:r>
+              <a:rPr lang="ko-KR" altLang="en-US" sz="1600" dirty="0"/>
+              <a:t>등</a:t>
+            </a:r>
+            <a:r>
+              <a:rPr lang="en-US" altLang="ko-KR" sz="1600" dirty="0"/>
+              <a:t>), </a:t>
+            </a:r>
+            <a:r>
+              <a:rPr lang="ko-KR" altLang="en-US" sz="1600" dirty="0"/>
+              <a:t>냉각 및 감속 시스템의 구성</a:t>
+            </a:r>
+            <a:r>
+              <a:rPr lang="en-US" altLang="ko-KR" sz="1600" dirty="0"/>
+              <a:t>, </a:t>
+            </a:r>
+            <a:r>
+              <a:rPr lang="ko-KR" altLang="en-US" sz="1600" dirty="0" err="1"/>
+              <a:t>격납건물의</a:t>
+            </a:r>
+            <a:r>
+              <a:rPr lang="ko-KR" altLang="en-US" sz="1600" dirty="0"/>
+              <a:t> 형태 등등 세부 공학설계가 이루어진다</a:t>
+            </a:r>
+            <a:r>
+              <a:rPr lang="en-US" altLang="ko-KR" sz="1600" dirty="0"/>
+              <a:t>.</a:t>
+            </a:r>
+          </a:p>
+          <a:p>
+            <a:pPr marL="1292225" lvl="2" indent="-285750">
+              <a:lnSpc>
+                <a:spcPct val="150000"/>
+              </a:lnSpc>
+              <a:buFont typeface="Wingdings" panose="05000000000000000000" pitchFamily="2" charset="2"/>
+              <a:buChar char="Ø"/>
+            </a:pPr>
+            <a:r>
+              <a:rPr lang="ko-KR" altLang="en-US" sz="1600" dirty="0"/>
+              <a:t>설계는 국제원자력기구</a:t>
+            </a:r>
+            <a:r>
+              <a:rPr lang="en-US" altLang="ko-KR" sz="1600" dirty="0"/>
+              <a:t>(IAEA)</a:t>
+            </a:r>
+            <a:r>
+              <a:rPr lang="ko-KR" altLang="en-US" sz="1600" dirty="0"/>
+              <a:t>와 같은 국제 규범 및 국가별 안전 기준 </a:t>
+            </a:r>
+            <a:r>
+              <a:rPr lang="en-US" altLang="ko-KR" sz="1600" dirty="0"/>
+              <a:t>(</a:t>
+            </a:r>
+            <a:r>
+              <a:rPr lang="ko-KR" altLang="en-US" sz="1600" dirty="0"/>
+              <a:t>지진</a:t>
+            </a:r>
+            <a:r>
+              <a:rPr lang="en-US" altLang="ko-KR" sz="1600" dirty="0"/>
+              <a:t>, </a:t>
+            </a:r>
+            <a:r>
+              <a:rPr lang="ko-KR" altLang="en-US" sz="1600" dirty="0"/>
+              <a:t>항공기 충돌</a:t>
+            </a:r>
+            <a:r>
+              <a:rPr lang="en-US" altLang="ko-KR" sz="1600" dirty="0"/>
+              <a:t>, </a:t>
+            </a:r>
+            <a:r>
+              <a:rPr lang="ko-KR" altLang="en-US" sz="1600" dirty="0" err="1"/>
+              <a:t>내외부</a:t>
+            </a:r>
+            <a:r>
+              <a:rPr lang="ko-KR" altLang="en-US" sz="1600" dirty="0"/>
+              <a:t> 폭발</a:t>
+            </a:r>
+            <a:r>
+              <a:rPr lang="en-US" altLang="ko-KR" sz="1600" dirty="0"/>
+              <a:t>, </a:t>
+            </a:r>
+            <a:r>
+              <a:rPr lang="ko-KR" altLang="en-US" sz="1600" dirty="0"/>
+              <a:t>사이버 공격 등</a:t>
+            </a:r>
+            <a:r>
+              <a:rPr lang="en-US" altLang="ko-KR" sz="1600" dirty="0"/>
+              <a:t>)</a:t>
+            </a:r>
+            <a:r>
+              <a:rPr lang="ko-KR" altLang="en-US" sz="1600" dirty="0"/>
+              <a:t>에 부합해야 한다</a:t>
+            </a:r>
+            <a:r>
+              <a:rPr lang="en-US" altLang="ko-KR" sz="1600" dirty="0"/>
+              <a:t>. </a:t>
+            </a:r>
+          </a:p>
+          <a:p>
+            <a:pPr marL="1292225" lvl="2" indent="-285750">
+              <a:lnSpc>
+                <a:spcPct val="150000"/>
+              </a:lnSpc>
+              <a:buFont typeface="Wingdings" panose="05000000000000000000" pitchFamily="2" charset="2"/>
+              <a:buChar char="Ø"/>
+            </a:pPr>
+            <a:endParaRPr lang="en-US" altLang="ko-KR" sz="1600" dirty="0"/>
+          </a:p>
+          <a:p>
+            <a:pPr marL="377825" indent="-285750">
+              <a:lnSpc>
+                <a:spcPct val="150000"/>
+              </a:lnSpc>
+              <a:buFont typeface="Arial" panose="020B0604020202020204" pitchFamily="34" charset="0"/>
+              <a:buChar char="•"/>
+            </a:pPr>
+            <a:r>
+              <a:rPr lang="ko-KR" altLang="en-US" sz="1600" dirty="0"/>
+              <a:t>이후 건설단계로 넘어가면</a:t>
+            </a:r>
+            <a:r>
+              <a:rPr lang="en-US" altLang="ko-KR" sz="1600" dirty="0"/>
+              <a:t>, </a:t>
+            </a:r>
+            <a:r>
+              <a:rPr lang="ko-KR" altLang="en-US" sz="1600" dirty="0"/>
+              <a:t>원자로 본체</a:t>
+            </a:r>
+            <a:r>
+              <a:rPr lang="en-US" altLang="ko-KR" sz="1600" dirty="0"/>
+              <a:t>, </a:t>
+            </a:r>
+            <a:r>
+              <a:rPr lang="ko-KR" altLang="en-US" sz="1600" dirty="0" err="1"/>
+              <a:t>격납건물</a:t>
+            </a:r>
+            <a:r>
+              <a:rPr lang="en-US" altLang="ko-KR" sz="1600" dirty="0"/>
+              <a:t>, </a:t>
+            </a:r>
+            <a:r>
+              <a:rPr lang="ko-KR" altLang="en-US" sz="1600" dirty="0"/>
+              <a:t>증기발생기</a:t>
+            </a:r>
+            <a:r>
+              <a:rPr lang="en-US" altLang="ko-KR" sz="1600" dirty="0"/>
+              <a:t>, </a:t>
+            </a:r>
+            <a:r>
+              <a:rPr lang="ko-KR" altLang="en-US" sz="1600" dirty="0"/>
+              <a:t>터빈계통</a:t>
+            </a:r>
+            <a:r>
+              <a:rPr lang="en-US" altLang="ko-KR" sz="1600" dirty="0"/>
+              <a:t>, </a:t>
+            </a:r>
+            <a:r>
+              <a:rPr lang="ko-KR" altLang="en-US" sz="1600" dirty="0"/>
+              <a:t>등등 대규모 기반시설의 시공이 진행된다</a:t>
+            </a:r>
+            <a:r>
+              <a:rPr lang="en-US" altLang="ko-KR" sz="1600" dirty="0"/>
+              <a:t>.</a:t>
+            </a:r>
+          </a:p>
+          <a:p>
+            <a:pPr marL="835025" lvl="1" indent="-285750">
+              <a:lnSpc>
+                <a:spcPct val="150000"/>
+              </a:lnSpc>
+              <a:buFont typeface="Wingdings" panose="05000000000000000000" pitchFamily="2" charset="2"/>
+              <a:buChar char="ü"/>
+            </a:pPr>
+            <a:r>
+              <a:rPr lang="ko-KR" altLang="en-US" sz="1600" dirty="0"/>
+              <a:t>원자력 건설은 고도의 기술과 정밀성이 요구되는 동시에</a:t>
+            </a:r>
+            <a:r>
+              <a:rPr lang="en-US" altLang="ko-KR" sz="1600" dirty="0"/>
+              <a:t>, </a:t>
+            </a:r>
+            <a:r>
+              <a:rPr lang="ko-KR" altLang="en-US" sz="1600" dirty="0"/>
+              <a:t>작업자의 방사선 노출</a:t>
+            </a:r>
+            <a:r>
+              <a:rPr lang="en-US" altLang="ko-KR" sz="1600" dirty="0"/>
+              <a:t>, </a:t>
+            </a:r>
+            <a:r>
+              <a:rPr lang="ko-KR" altLang="en-US" sz="1600" dirty="0"/>
+              <a:t>고신뢰성 유지</a:t>
+            </a:r>
+            <a:r>
+              <a:rPr lang="en-US" altLang="ko-KR" sz="1600" dirty="0"/>
+              <a:t>, </a:t>
+            </a:r>
+            <a:r>
+              <a:rPr lang="ko-KR" altLang="en-US" sz="1600" dirty="0"/>
+              <a:t>공정 간 오차 허용범위 제한 등 엄격한 품질관리 요건을 수반한다</a:t>
+            </a:r>
+            <a:r>
+              <a:rPr lang="en-US" altLang="ko-KR" sz="1600" dirty="0"/>
+              <a:t>.</a:t>
+            </a:r>
+          </a:p>
+          <a:p>
+            <a:pPr marL="1292225" lvl="2" indent="-285750">
+              <a:lnSpc>
+                <a:spcPct val="150000"/>
+              </a:lnSpc>
+              <a:buFont typeface="Wingdings" panose="05000000000000000000" pitchFamily="2" charset="2"/>
+              <a:buChar char="Ø"/>
+            </a:pPr>
+            <a:r>
+              <a:rPr lang="ko-KR" altLang="en-US" sz="1600" dirty="0"/>
+              <a:t>국가 규제기관의 단계별 승인과 검사를 통과해야 하고</a:t>
+            </a:r>
+            <a:r>
+              <a:rPr lang="en-US" altLang="ko-KR" sz="1600" dirty="0"/>
+              <a:t>, </a:t>
+            </a:r>
+            <a:r>
+              <a:rPr lang="ko-KR" altLang="en-US" sz="1600" dirty="0"/>
+              <a:t>오류 및 변경 시 즉각 보고 및 수정의무가 있다</a:t>
+            </a:r>
+            <a:r>
+              <a:rPr lang="en-US" altLang="ko-KR" sz="1600" dirty="0"/>
+              <a:t>.</a:t>
+            </a:r>
+          </a:p>
+          <a:p>
+            <a:pPr marL="835025" lvl="1" indent="-285750">
+              <a:lnSpc>
+                <a:spcPct val="150000"/>
+              </a:lnSpc>
+              <a:buFont typeface="Wingdings" panose="05000000000000000000" pitchFamily="2" charset="2"/>
+              <a:buChar char="ü"/>
+            </a:pPr>
+            <a:r>
+              <a:rPr lang="ko-KR" altLang="en-US" sz="1600" dirty="0"/>
+              <a:t>높은 규제 강도와 프로젝트 규모</a:t>
+            </a:r>
+            <a:r>
+              <a:rPr lang="en-US" altLang="ko-KR" sz="1600" dirty="0"/>
+              <a:t>, </a:t>
+            </a:r>
+            <a:r>
+              <a:rPr lang="ko-KR" altLang="en-US" sz="1600" dirty="0"/>
+              <a:t>다수의 이해관계자 조정 문제 등으로 인해 공사 기간의 지연이나 예산 초과는 매우 흔한 현상이며</a:t>
+            </a:r>
+            <a:r>
+              <a:rPr lang="en-US" altLang="ko-KR" sz="1600" dirty="0"/>
+              <a:t>, </a:t>
+            </a:r>
+            <a:r>
+              <a:rPr lang="ko-KR" altLang="en-US" sz="1600" dirty="0"/>
+              <a:t>이는 원전 사업의 경제성을 저해하는 주요 리스크 중 하나로 꼽힌다</a:t>
+            </a:r>
+            <a:r>
+              <a:rPr lang="en-US" altLang="ko-KR" sz="1600" dirty="0"/>
+              <a:t>.</a:t>
+            </a:r>
+          </a:p>
+        </p:txBody>
+      </p:sp>
+    </p:spTree>
+    <p:extLst>
+      <p:ext uri="{BB962C8B-B14F-4D97-AF65-F5344CB8AC3E}">
+        <p14:creationId xmlns:p14="http://schemas.microsoft.com/office/powerpoint/2010/main" val="4062393931"/>
+      </p:ext>
+    </p:extLst>
+  </p:cSld>
+  <p:clrMapOvr>
+    <a:masterClrMapping/>
+  </p:clrMapOvr>
+</p:sld>
+</file>
+
+<file path=ppt/slides/slide24.xml><?xml version="1.0" encoding="utf-8"?>
+<p:sld xmlns:a="http://schemas.openxmlformats.org/drawingml/2006/main" xmlns:r="http://schemas.openxmlformats.org/officeDocument/2006/relationships" xmlns:p="http://schemas.openxmlformats.org/presentationml/2006/main">
+  <p:cSld>
+    <p:spTree>
+      <p:nvGrpSpPr>
+        <p:cNvPr id="1" name="">
+          <a:extLst>
+            <a:ext uri="{FF2B5EF4-FFF2-40B4-BE49-F238E27FC236}">
+              <a16:creationId xmlns:a16="http://schemas.microsoft.com/office/drawing/2014/main" id="{010FA87C-C901-C2CE-4DD1-3BFB6F88C149}"/>
+            </a:ext>
+          </a:extLst>
+        </p:cNvPr>
+        <p:cNvGrpSpPr/>
+        <p:nvPr/>
+      </p:nvGrpSpPr>
+      <p:grpSpPr>
+        <a:xfrm>
+          <a:off x="0" y="0"/>
+          <a:ext cx="0" cy="0"/>
+          <a:chOff x="0" y="0"/>
+          <a:chExt cx="0" cy="0"/>
+        </a:xfrm>
+      </p:grpSpPr>
+      <p:sp>
+        <p:nvSpPr>
+          <p:cNvPr id="2" name="제목 1">
+            <a:extLst>
+              <a:ext uri="{FF2B5EF4-FFF2-40B4-BE49-F238E27FC236}">
+                <a16:creationId xmlns:a16="http://schemas.microsoft.com/office/drawing/2014/main" id="{EBDFCA18-DF36-6BE2-F919-A4FA5026A00E}"/>
+              </a:ext>
+            </a:extLst>
+          </p:cNvPr>
+          <p:cNvSpPr>
+            <a:spLocks noGrp="1"/>
+          </p:cNvSpPr>
+          <p:nvPr>
+            <p:ph type="title"/>
+          </p:nvPr>
+        </p:nvSpPr>
+        <p:spPr/>
+        <p:txBody>
+          <a:bodyPr/>
+          <a:lstStyle/>
+          <a:p>
+            <a:r>
+              <a:rPr lang="ko-KR" altLang="en-US" dirty="0"/>
+              <a:t>원자력 발전소의 설계와 건설 과정</a:t>
+            </a:r>
+          </a:p>
+        </p:txBody>
+      </p:sp>
+      <p:sp>
+        <p:nvSpPr>
+          <p:cNvPr id="4" name="슬라이드 번호 개체 틀 3">
+            <a:extLst>
+              <a:ext uri="{FF2B5EF4-FFF2-40B4-BE49-F238E27FC236}">
+                <a16:creationId xmlns:a16="http://schemas.microsoft.com/office/drawing/2014/main" id="{B6C6E185-3013-BE36-AEF1-63DFDF0E4BDE}"/>
+              </a:ext>
+            </a:extLst>
+          </p:cNvPr>
+          <p:cNvSpPr>
+            <a:spLocks noGrp="1"/>
+          </p:cNvSpPr>
+          <p:nvPr>
+            <p:ph type="sldNum" sz="quarter" idx="12"/>
+          </p:nvPr>
+        </p:nvSpPr>
+        <p:spPr/>
+        <p:txBody>
+          <a:bodyPr/>
+          <a:lstStyle/>
+          <a:p>
+            <a:fld id="{109C872D-39A9-4065-8BF3-6A613116E2A1}" type="slidenum">
+              <a:rPr lang="ko-KR" altLang="en-US" smtClean="0"/>
+              <a:t>24</a:t>
+            </a:fld>
+            <a:endParaRPr lang="ko-KR" altLang="en-US"/>
+          </a:p>
+        </p:txBody>
+      </p:sp>
+      <p:sp>
+        <p:nvSpPr>
+          <p:cNvPr id="3" name="TextBox 2">
+            <a:extLst>
+              <a:ext uri="{FF2B5EF4-FFF2-40B4-BE49-F238E27FC236}">
+                <a16:creationId xmlns:a16="http://schemas.microsoft.com/office/drawing/2014/main" id="{9A1486C3-76BF-918B-40F6-BE6658F839AF}"/>
+              </a:ext>
+            </a:extLst>
+          </p:cNvPr>
+          <p:cNvSpPr txBox="1"/>
+          <p:nvPr/>
+        </p:nvSpPr>
+        <p:spPr>
+          <a:xfrm>
+            <a:off x="288790" y="958844"/>
+            <a:ext cx="11118453" cy="2630015"/>
+          </a:xfrm>
+          <a:prstGeom prst="rect">
+            <a:avLst/>
+          </a:prstGeom>
+          <a:noFill/>
+        </p:spPr>
+        <p:txBody>
+          <a:bodyPr wrap="square" rtlCol="0" anchor="t">
+            <a:spAutoFit/>
+          </a:bodyPr>
+          <a:lstStyle/>
+          <a:p>
+            <a:pPr marL="377825" indent="-285750">
+              <a:lnSpc>
+                <a:spcPct val="150000"/>
+              </a:lnSpc>
+              <a:buFont typeface="Arial" panose="020B0604020202020204" pitchFamily="34" charset="0"/>
+              <a:buChar char="•"/>
+            </a:pPr>
+            <a:r>
+              <a:rPr lang="ko-KR" altLang="en-US" sz="1600" dirty="0"/>
+              <a:t>건설이 완료된 후에는 원전의 안정성과 기능 적합성을 검증하기 위한 시운전 단계가 수행된다</a:t>
+            </a:r>
+            <a:r>
+              <a:rPr lang="en-US" altLang="ko-KR" sz="1600" dirty="0"/>
+              <a:t>.</a:t>
+            </a:r>
+          </a:p>
+          <a:p>
+            <a:pPr marL="835025" lvl="1" indent="-285750">
+              <a:lnSpc>
+                <a:spcPct val="150000"/>
+              </a:lnSpc>
+              <a:buFont typeface="Wingdings" panose="05000000000000000000" pitchFamily="2" charset="2"/>
+              <a:buChar char="ü"/>
+            </a:pPr>
+            <a:r>
+              <a:rPr lang="ko-KR" altLang="en-US" sz="1600" dirty="0"/>
+              <a:t>이 단계에서는 원자로에 핵연료를 장전하기 전의 </a:t>
+            </a:r>
+            <a:r>
+              <a:rPr lang="en-US" altLang="ko-KR" sz="1600" dirty="0"/>
+              <a:t>‘</a:t>
+            </a:r>
+            <a:r>
+              <a:rPr lang="ko-KR" altLang="en-US" sz="1600" dirty="0" err="1"/>
+              <a:t>비핵시운전</a:t>
+            </a:r>
+            <a:r>
+              <a:rPr lang="ko-KR" altLang="en-US" sz="1600" dirty="0"/>
+              <a:t> </a:t>
+            </a:r>
+            <a:r>
+              <a:rPr lang="en-US" altLang="ko-KR" sz="1600" dirty="0"/>
+              <a:t>(non-nuclear testing)‘</a:t>
+            </a:r>
+            <a:r>
+              <a:rPr lang="ko-KR" altLang="en-US" sz="1600" dirty="0"/>
+              <a:t>과 연료 장전 후에 수행되는 </a:t>
+            </a:r>
+            <a:r>
+              <a:rPr lang="en-US" altLang="ko-KR" sz="1600" dirty="0"/>
+              <a:t>‘</a:t>
+            </a:r>
+            <a:r>
+              <a:rPr lang="ko-KR" altLang="en-US" sz="1600" dirty="0" err="1"/>
+              <a:t>핵시운전</a:t>
+            </a:r>
+            <a:r>
+              <a:rPr lang="ko-KR" altLang="en-US" sz="1600" dirty="0"/>
+              <a:t> </a:t>
+            </a:r>
+            <a:r>
+              <a:rPr lang="en-US" altLang="ko-KR" sz="1600" dirty="0"/>
+              <a:t>(nuclear testing)’</a:t>
+            </a:r>
+            <a:r>
+              <a:rPr lang="ko-KR" altLang="en-US" sz="1600" dirty="0"/>
+              <a:t>이 포함된다</a:t>
+            </a:r>
+            <a:r>
+              <a:rPr lang="en-US" altLang="ko-KR" sz="1600" dirty="0"/>
+              <a:t>. </a:t>
+            </a:r>
+          </a:p>
+          <a:p>
+            <a:pPr marL="835025" lvl="1" indent="-285750">
+              <a:lnSpc>
+                <a:spcPct val="150000"/>
+              </a:lnSpc>
+              <a:buFont typeface="Wingdings" panose="05000000000000000000" pitchFamily="2" charset="2"/>
+              <a:buChar char="ü"/>
+            </a:pPr>
+            <a:r>
+              <a:rPr lang="ko-KR" altLang="en-US" sz="1600" dirty="0"/>
+              <a:t>주요 설비의 작동 여부</a:t>
+            </a:r>
+            <a:r>
+              <a:rPr lang="en-US" altLang="ko-KR" sz="1600" dirty="0"/>
+              <a:t>, </a:t>
+            </a:r>
+            <a:r>
+              <a:rPr lang="ko-KR" altLang="en-US" sz="1600" dirty="0"/>
+              <a:t>냉각계통과 계측제어 계통의 반응 특성</a:t>
+            </a:r>
+            <a:r>
+              <a:rPr lang="en-US" altLang="ko-KR" sz="1600" dirty="0"/>
+              <a:t>, </a:t>
+            </a:r>
+            <a:r>
+              <a:rPr lang="ko-KR" altLang="en-US" sz="1600" dirty="0"/>
+              <a:t>방호체계의 작동성을 시험하고</a:t>
+            </a:r>
+            <a:r>
+              <a:rPr lang="en-US" altLang="ko-KR" sz="1600" dirty="0"/>
+              <a:t>, </a:t>
+            </a:r>
+            <a:r>
+              <a:rPr lang="ko-KR" altLang="en-US" sz="1600" dirty="0"/>
+              <a:t>핵연료를 장전하고 연쇄반응을 개시하여 점진적으로 출력을 상승시킨다</a:t>
+            </a:r>
+            <a:r>
+              <a:rPr lang="en-US" altLang="ko-KR" sz="1600" dirty="0"/>
+              <a:t>.</a:t>
+            </a:r>
+          </a:p>
+          <a:p>
+            <a:pPr marL="835025" lvl="1" indent="-285750">
+              <a:lnSpc>
+                <a:spcPct val="150000"/>
+              </a:lnSpc>
+              <a:buFont typeface="Wingdings" panose="05000000000000000000" pitchFamily="2" charset="2"/>
+              <a:buChar char="ü"/>
+            </a:pPr>
+            <a:r>
+              <a:rPr lang="ko-KR" altLang="en-US" sz="1600" dirty="0"/>
+              <a:t>모든 절차는 단계별 운전승인과 규제기관의 검사</a:t>
+            </a:r>
+            <a:r>
+              <a:rPr lang="en-US" altLang="ko-KR" sz="1600" dirty="0"/>
+              <a:t>·</a:t>
+            </a:r>
+            <a:r>
+              <a:rPr lang="ko-KR" altLang="en-US" sz="1600" dirty="0"/>
+              <a:t>감시 하에 이루어지며</a:t>
+            </a:r>
+            <a:r>
+              <a:rPr lang="en-US" altLang="ko-KR" sz="1600" dirty="0"/>
+              <a:t>, </a:t>
+            </a:r>
+            <a:r>
+              <a:rPr lang="ko-KR" altLang="en-US" sz="1600" dirty="0"/>
+              <a:t>문제가 발견되면 즉시 수정 또는 운전 중단 조치가 취해진다</a:t>
+            </a:r>
+            <a:r>
+              <a:rPr lang="en-US" altLang="ko-KR" sz="1600" dirty="0"/>
+              <a:t>.</a:t>
+            </a:r>
+          </a:p>
+        </p:txBody>
+      </p:sp>
+    </p:spTree>
+    <p:extLst>
+      <p:ext uri="{BB962C8B-B14F-4D97-AF65-F5344CB8AC3E}">
+        <p14:creationId xmlns:p14="http://schemas.microsoft.com/office/powerpoint/2010/main" val="1734393348"/>
+      </p:ext>
+    </p:extLst>
+  </p:cSld>
+  <p:clrMapOvr>
+    <a:masterClrMapping/>
+  </p:clrMapOvr>
+</p:sld>
+</file>
+
+<file path=ppt/slides/slide25.xml><?xml version="1.0" encoding="utf-8"?>
+<p:sld xmlns:a="http://schemas.openxmlformats.org/drawingml/2006/main" xmlns:r="http://schemas.openxmlformats.org/officeDocument/2006/relationships" xmlns:p="http://schemas.openxmlformats.org/presentationml/2006/main">
+  <p:cSld>
+    <p:spTree>
+      <p:nvGrpSpPr>
+        <p:cNvPr id="1" name="">
+          <a:extLst>
+            <a:ext uri="{FF2B5EF4-FFF2-40B4-BE49-F238E27FC236}">
+              <a16:creationId xmlns:a16="http://schemas.microsoft.com/office/drawing/2014/main" id="{D7B02E1A-F3A5-C096-49DE-26443780C80B}"/>
+            </a:ext>
+          </a:extLst>
+        </p:cNvPr>
+        <p:cNvGrpSpPr/>
+        <p:nvPr/>
+      </p:nvGrpSpPr>
+      <p:grpSpPr>
+        <a:xfrm>
+          <a:off x="0" y="0"/>
+          <a:ext cx="0" cy="0"/>
+          <a:chOff x="0" y="0"/>
+          <a:chExt cx="0" cy="0"/>
+        </a:xfrm>
+      </p:grpSpPr>
+      <p:sp>
+        <p:nvSpPr>
+          <p:cNvPr id="2" name="제목 1">
+            <a:extLst>
+              <a:ext uri="{FF2B5EF4-FFF2-40B4-BE49-F238E27FC236}">
+                <a16:creationId xmlns:a16="http://schemas.microsoft.com/office/drawing/2014/main" id="{7040430A-50F0-9CE9-D333-9D65F984068A}"/>
+              </a:ext>
+            </a:extLst>
+          </p:cNvPr>
+          <p:cNvSpPr>
+            <a:spLocks noGrp="1"/>
+          </p:cNvSpPr>
+          <p:nvPr>
+            <p:ph type="title"/>
+          </p:nvPr>
+        </p:nvSpPr>
+        <p:spPr/>
+        <p:txBody>
+          <a:bodyPr/>
+          <a:lstStyle/>
+          <a:p>
+            <a:r>
+              <a:rPr lang="ko-KR" altLang="en-US" dirty="0"/>
+              <a:t>원자력 발전소의 운영과 유지 보수</a:t>
+            </a:r>
+          </a:p>
+        </p:txBody>
+      </p:sp>
+      <p:sp>
+        <p:nvSpPr>
+          <p:cNvPr id="4" name="슬라이드 번호 개체 틀 3">
+            <a:extLst>
+              <a:ext uri="{FF2B5EF4-FFF2-40B4-BE49-F238E27FC236}">
+                <a16:creationId xmlns:a16="http://schemas.microsoft.com/office/drawing/2014/main" id="{AA4A703E-58AA-CE0F-39FC-FC374E844D53}"/>
+              </a:ext>
+            </a:extLst>
+          </p:cNvPr>
+          <p:cNvSpPr>
+            <a:spLocks noGrp="1"/>
+          </p:cNvSpPr>
+          <p:nvPr>
+            <p:ph type="sldNum" sz="quarter" idx="12"/>
+          </p:nvPr>
+        </p:nvSpPr>
+        <p:spPr/>
+        <p:txBody>
+          <a:bodyPr/>
+          <a:lstStyle/>
+          <a:p>
+            <a:fld id="{109C872D-39A9-4065-8BF3-6A613116E2A1}" type="slidenum">
+              <a:rPr lang="ko-KR" altLang="en-US" smtClean="0"/>
+              <a:t>25</a:t>
+            </a:fld>
+            <a:endParaRPr lang="ko-KR" altLang="en-US"/>
+          </a:p>
+        </p:txBody>
+      </p:sp>
+      <p:sp>
+        <p:nvSpPr>
+          <p:cNvPr id="3" name="TextBox 2">
+            <a:extLst>
+              <a:ext uri="{FF2B5EF4-FFF2-40B4-BE49-F238E27FC236}">
+                <a16:creationId xmlns:a16="http://schemas.microsoft.com/office/drawing/2014/main" id="{FD493C47-8DBF-CC7C-B958-7992CC8BF121}"/>
+              </a:ext>
+            </a:extLst>
+          </p:cNvPr>
+          <p:cNvSpPr txBox="1"/>
+          <p:nvPr/>
+        </p:nvSpPr>
+        <p:spPr>
+          <a:xfrm>
+            <a:off x="288790" y="958844"/>
+            <a:ext cx="11118453" cy="4846007"/>
+          </a:xfrm>
+          <a:prstGeom prst="rect">
+            <a:avLst/>
+          </a:prstGeom>
+          <a:noFill/>
+        </p:spPr>
+        <p:txBody>
+          <a:bodyPr wrap="square" rtlCol="0" anchor="t">
+            <a:spAutoFit/>
+          </a:bodyPr>
+          <a:lstStyle/>
+          <a:p>
+            <a:pPr marL="377825" indent="-285750">
+              <a:lnSpc>
+                <a:spcPct val="150000"/>
+              </a:lnSpc>
+              <a:buFont typeface="Arial" panose="020B0604020202020204" pitchFamily="34" charset="0"/>
+              <a:buChar char="•"/>
+            </a:pPr>
+            <a:r>
+              <a:rPr lang="ko-KR" altLang="en-US" sz="1600" dirty="0"/>
+              <a:t>원자력 발전소의 운영은 고도의 기술적 정밀성과 안전성이 요구되는 복합적 과정으로</a:t>
+            </a:r>
+            <a:r>
+              <a:rPr lang="en-US" altLang="ko-KR" sz="1600" dirty="0"/>
+              <a:t>, </a:t>
+            </a:r>
+            <a:r>
+              <a:rPr lang="ko-KR" altLang="en-US" sz="1600" dirty="0"/>
+              <a:t>핵 연쇄 반응을 안정적으로 유지하면서도 지속적인 전력 공급을 보장해야 한다</a:t>
+            </a:r>
+            <a:r>
+              <a:rPr lang="en-US" altLang="ko-KR" sz="1600" dirty="0"/>
+              <a:t>.</a:t>
+            </a:r>
+          </a:p>
+          <a:p>
+            <a:pPr marL="835025" lvl="1" indent="-285750">
+              <a:lnSpc>
+                <a:spcPct val="150000"/>
+              </a:lnSpc>
+              <a:buFont typeface="Wingdings" panose="05000000000000000000" pitchFamily="2" charset="2"/>
+              <a:buChar char="ü"/>
+            </a:pPr>
+            <a:r>
+              <a:rPr lang="ko-KR" altLang="en-US" sz="1600" dirty="0"/>
+              <a:t>원자로 내에서의 연쇄 반응은 제어봉을 통해 중성자의 수를 조절함으로써 제어되고</a:t>
+            </a:r>
+            <a:r>
+              <a:rPr lang="en-US" altLang="ko-KR" sz="1600" dirty="0"/>
+              <a:t>, </a:t>
+            </a:r>
+            <a:r>
+              <a:rPr lang="ko-KR" altLang="en-US" sz="1600" dirty="0"/>
+              <a:t>이를 통해 핵분열 속도와 출력을 안정적으로 유지한다</a:t>
+            </a:r>
+            <a:r>
+              <a:rPr lang="en-US" altLang="ko-KR" sz="1600" dirty="0"/>
+              <a:t>.</a:t>
+            </a:r>
+          </a:p>
+          <a:p>
+            <a:pPr marL="835025" lvl="1" indent="-285750">
+              <a:lnSpc>
+                <a:spcPct val="150000"/>
+              </a:lnSpc>
+              <a:buFont typeface="Wingdings" panose="05000000000000000000" pitchFamily="2" charset="2"/>
+              <a:buChar char="ü"/>
+            </a:pPr>
+            <a:r>
+              <a:rPr lang="ko-KR" altLang="en-US" sz="1600" dirty="0"/>
+              <a:t>제어봉은 붕소 또는 카드뮴과 같이 중성자를 흡수하는 물질로 만들어지며</a:t>
+            </a:r>
+            <a:r>
+              <a:rPr lang="en-US" altLang="ko-KR" sz="1600" dirty="0"/>
+              <a:t>, </a:t>
+            </a:r>
+            <a:r>
+              <a:rPr lang="ko-KR" altLang="en-US" sz="1600" dirty="0"/>
+              <a:t>원자로 출력 </a:t>
+            </a:r>
+            <a:r>
+              <a:rPr lang="ko-KR" altLang="en-US" sz="1600" dirty="0" err="1"/>
+              <a:t>조절뿐만</a:t>
+            </a:r>
+            <a:r>
+              <a:rPr lang="ko-KR" altLang="en-US" sz="1600" dirty="0"/>
+              <a:t> 아니라 비상시 자동 정지 기능에도 활용된다</a:t>
+            </a:r>
+            <a:r>
+              <a:rPr lang="en-US" altLang="ko-KR" sz="1600" dirty="0"/>
+              <a:t>.</a:t>
+            </a:r>
+          </a:p>
+          <a:p>
+            <a:pPr marL="377825" indent="-285750">
+              <a:lnSpc>
+                <a:spcPct val="150000"/>
+              </a:lnSpc>
+              <a:buFont typeface="Arial" panose="020B0604020202020204" pitchFamily="34" charset="0"/>
+              <a:buChar char="•"/>
+            </a:pPr>
+            <a:endParaRPr lang="en-US" altLang="ko-KR" sz="1600" dirty="0"/>
+          </a:p>
+          <a:p>
+            <a:pPr marL="377825" indent="-285750">
+              <a:lnSpc>
+                <a:spcPct val="150000"/>
+              </a:lnSpc>
+              <a:buFont typeface="Arial" panose="020B0604020202020204" pitchFamily="34" charset="0"/>
+              <a:buChar char="•"/>
+            </a:pPr>
+            <a:r>
+              <a:rPr lang="ko-KR" altLang="en-US" sz="1600" dirty="0"/>
+              <a:t>발전소의 전반적인 운영은 제어실에서 수행되며</a:t>
+            </a:r>
+            <a:r>
+              <a:rPr lang="en-US" altLang="ko-KR" sz="1600" dirty="0"/>
+              <a:t>, </a:t>
+            </a:r>
+            <a:r>
+              <a:rPr lang="ko-KR" altLang="en-US" sz="1600" dirty="0" err="1"/>
+              <a:t>냉각계</a:t>
+            </a:r>
+            <a:r>
+              <a:rPr lang="en-US" altLang="ko-KR" sz="1600" dirty="0"/>
+              <a:t>, </a:t>
+            </a:r>
+            <a:r>
+              <a:rPr lang="ko-KR" altLang="en-US" sz="1600" dirty="0"/>
+              <a:t>터빈계통</a:t>
+            </a:r>
+            <a:r>
+              <a:rPr lang="en-US" altLang="ko-KR" sz="1600" dirty="0"/>
+              <a:t>, </a:t>
+            </a:r>
+            <a:r>
+              <a:rPr lang="ko-KR" altLang="en-US" sz="1600" dirty="0"/>
+              <a:t>전기 계통</a:t>
+            </a:r>
+            <a:r>
+              <a:rPr lang="en-US" altLang="ko-KR" sz="1600" dirty="0"/>
+              <a:t>, </a:t>
+            </a:r>
+            <a:r>
+              <a:rPr lang="ko-KR" altLang="en-US" sz="1600" dirty="0"/>
+              <a:t>압력 및 온도 상태 등을 포함한 주요 설비의 작동 상황이 실시간으로 감시된다</a:t>
+            </a:r>
+            <a:r>
+              <a:rPr lang="en-US" altLang="ko-KR" sz="1600" dirty="0"/>
+              <a:t>.</a:t>
+            </a:r>
+          </a:p>
+          <a:p>
+            <a:pPr marL="835025" lvl="1" indent="-285750">
+              <a:lnSpc>
+                <a:spcPct val="150000"/>
+              </a:lnSpc>
+              <a:buFont typeface="Wingdings" panose="05000000000000000000" pitchFamily="2" charset="2"/>
+              <a:buChar char="ü"/>
+            </a:pPr>
+            <a:r>
+              <a:rPr lang="ko-KR" altLang="en-US" sz="1600" dirty="0"/>
+              <a:t>운영자는 이상 징후를 조기에 감지하고</a:t>
+            </a:r>
+            <a:r>
+              <a:rPr lang="en-US" altLang="ko-KR" sz="1600" dirty="0"/>
+              <a:t>, </a:t>
+            </a:r>
+            <a:r>
+              <a:rPr lang="ko-KR" altLang="en-US" sz="1600" dirty="0"/>
+              <a:t>즉각적인 조치를 취할 수 있도록 정밀한 감시 시스템과 자동화된 계측장비를 활용한다</a:t>
+            </a:r>
+            <a:r>
+              <a:rPr lang="en-US" altLang="ko-KR" sz="1600" dirty="0"/>
+              <a:t>.</a:t>
+            </a:r>
+          </a:p>
+          <a:p>
+            <a:pPr marL="835025" lvl="1" indent="-285750">
+              <a:lnSpc>
+                <a:spcPct val="150000"/>
+              </a:lnSpc>
+              <a:buFont typeface="Wingdings" panose="05000000000000000000" pitchFamily="2" charset="2"/>
+              <a:buChar char="ü"/>
+            </a:pPr>
+            <a:r>
+              <a:rPr lang="ko-KR" altLang="en-US" sz="1600" dirty="0"/>
+              <a:t>방사선 관리와 인근 지역의 환경 모니터링도 병행하여</a:t>
+            </a:r>
+            <a:r>
+              <a:rPr lang="en-US" altLang="ko-KR" sz="1600" dirty="0"/>
+              <a:t>, </a:t>
+            </a:r>
+            <a:r>
+              <a:rPr lang="ko-KR" altLang="en-US" sz="1600" dirty="0"/>
+              <a:t>방사성 물질의 누출이나 환경 영향이 발생하지 않도록 관리한다</a:t>
+            </a:r>
+            <a:r>
+              <a:rPr lang="en-US" altLang="ko-KR" sz="1600" dirty="0"/>
+              <a:t>.</a:t>
+            </a:r>
+          </a:p>
+        </p:txBody>
+      </p:sp>
+    </p:spTree>
+    <p:extLst>
+      <p:ext uri="{BB962C8B-B14F-4D97-AF65-F5344CB8AC3E}">
+        <p14:creationId xmlns:p14="http://schemas.microsoft.com/office/powerpoint/2010/main" val="2945242015"/>
+      </p:ext>
+    </p:extLst>
+  </p:cSld>
+  <p:clrMapOvr>
+    <a:masterClrMapping/>
+  </p:clrMapOvr>
+</p:sld>
+</file>
+
+<file path=ppt/slides/slide26.xml><?xml version="1.0" encoding="utf-8"?>
+<p:sld xmlns:a="http://schemas.openxmlformats.org/drawingml/2006/main" xmlns:r="http://schemas.openxmlformats.org/officeDocument/2006/relationships" xmlns:p="http://schemas.openxmlformats.org/presentationml/2006/main">
+  <p:cSld>
+    <p:spTree>
+      <p:nvGrpSpPr>
+        <p:cNvPr id="1" name="">
+          <a:extLst>
+            <a:ext uri="{FF2B5EF4-FFF2-40B4-BE49-F238E27FC236}">
+              <a16:creationId xmlns:a16="http://schemas.microsoft.com/office/drawing/2014/main" id="{BC92FB00-8C08-D979-C8FF-B39FAB875F08}"/>
+            </a:ext>
+          </a:extLst>
+        </p:cNvPr>
+        <p:cNvGrpSpPr/>
+        <p:nvPr/>
+      </p:nvGrpSpPr>
+      <p:grpSpPr>
+        <a:xfrm>
+          <a:off x="0" y="0"/>
+          <a:ext cx="0" cy="0"/>
+          <a:chOff x="0" y="0"/>
+          <a:chExt cx="0" cy="0"/>
+        </a:xfrm>
+      </p:grpSpPr>
+      <p:sp>
+        <p:nvSpPr>
+          <p:cNvPr id="2" name="제목 1">
+            <a:extLst>
+              <a:ext uri="{FF2B5EF4-FFF2-40B4-BE49-F238E27FC236}">
+                <a16:creationId xmlns:a16="http://schemas.microsoft.com/office/drawing/2014/main" id="{A9CF2DA0-A258-A229-E098-9B788DADF480}"/>
+              </a:ext>
+            </a:extLst>
+          </p:cNvPr>
+          <p:cNvSpPr>
+            <a:spLocks noGrp="1"/>
+          </p:cNvSpPr>
+          <p:nvPr>
+            <p:ph type="title"/>
+          </p:nvPr>
+        </p:nvSpPr>
+        <p:spPr/>
+        <p:txBody>
+          <a:bodyPr/>
+          <a:lstStyle/>
+          <a:p>
+            <a:r>
+              <a:rPr lang="ko-KR" altLang="en-US" dirty="0"/>
+              <a:t>원자력 발전소의 운영과 유지 보수</a:t>
+            </a:r>
+          </a:p>
+        </p:txBody>
+      </p:sp>
+      <p:sp>
+        <p:nvSpPr>
+          <p:cNvPr id="4" name="슬라이드 번호 개체 틀 3">
+            <a:extLst>
+              <a:ext uri="{FF2B5EF4-FFF2-40B4-BE49-F238E27FC236}">
+                <a16:creationId xmlns:a16="http://schemas.microsoft.com/office/drawing/2014/main" id="{C7BD4AE6-7903-FE4B-FC75-4DA72817E071}"/>
+              </a:ext>
+            </a:extLst>
+          </p:cNvPr>
+          <p:cNvSpPr>
+            <a:spLocks noGrp="1"/>
+          </p:cNvSpPr>
+          <p:nvPr>
+            <p:ph type="sldNum" sz="quarter" idx="12"/>
+          </p:nvPr>
+        </p:nvSpPr>
+        <p:spPr/>
+        <p:txBody>
+          <a:bodyPr/>
+          <a:lstStyle/>
+          <a:p>
+            <a:fld id="{109C872D-39A9-4065-8BF3-6A613116E2A1}" type="slidenum">
+              <a:rPr lang="ko-KR" altLang="en-US" smtClean="0"/>
+              <a:t>26</a:t>
+            </a:fld>
+            <a:endParaRPr lang="ko-KR" altLang="en-US"/>
+          </a:p>
+        </p:txBody>
+      </p:sp>
+      <p:sp>
+        <p:nvSpPr>
+          <p:cNvPr id="3" name="TextBox 2">
+            <a:extLst>
+              <a:ext uri="{FF2B5EF4-FFF2-40B4-BE49-F238E27FC236}">
+                <a16:creationId xmlns:a16="http://schemas.microsoft.com/office/drawing/2014/main" id="{F3D3DF25-2DA2-9ACC-3A4B-9489FA9E14F6}"/>
+              </a:ext>
+            </a:extLst>
+          </p:cNvPr>
+          <p:cNvSpPr txBox="1"/>
+          <p:nvPr/>
+        </p:nvSpPr>
+        <p:spPr>
+          <a:xfrm>
+            <a:off x="288790" y="958844"/>
+            <a:ext cx="11118453" cy="4846007"/>
+          </a:xfrm>
+          <a:prstGeom prst="rect">
+            <a:avLst/>
+          </a:prstGeom>
+          <a:noFill/>
+        </p:spPr>
+        <p:txBody>
+          <a:bodyPr wrap="square" rtlCol="0" anchor="t">
+            <a:spAutoFit/>
+          </a:bodyPr>
+          <a:lstStyle/>
+          <a:p>
+            <a:pPr marL="377825" indent="-285750">
+              <a:lnSpc>
+                <a:spcPct val="150000"/>
+              </a:lnSpc>
+              <a:buFont typeface="Arial" panose="020B0604020202020204" pitchFamily="34" charset="0"/>
+              <a:buChar char="•"/>
+            </a:pPr>
+            <a:r>
+              <a:rPr lang="ko-KR" altLang="en-US" sz="1600" dirty="0"/>
+              <a:t>안전성 확보를 위한 다중 안전계통은 원자력 발전소 운영의 핵심이다</a:t>
+            </a:r>
+            <a:r>
+              <a:rPr lang="en-US" altLang="ko-KR" sz="1600" dirty="0"/>
+              <a:t>.</a:t>
+            </a:r>
+          </a:p>
+          <a:p>
+            <a:pPr marL="835025" lvl="1" indent="-285750">
+              <a:lnSpc>
+                <a:spcPct val="150000"/>
+              </a:lnSpc>
+              <a:buFont typeface="Wingdings" panose="05000000000000000000" pitchFamily="2" charset="2"/>
+              <a:buChar char="ü"/>
+            </a:pPr>
+            <a:r>
+              <a:rPr lang="ko-KR" altLang="en-US" sz="1600" dirty="0"/>
+              <a:t>대표적인 설비로는 </a:t>
+            </a:r>
+            <a:r>
+              <a:rPr lang="ko-KR" altLang="en-US" sz="1600" dirty="0" err="1"/>
+              <a:t>비상노심냉각계통</a:t>
+            </a:r>
+            <a:r>
+              <a:rPr lang="en-US" altLang="ko-KR" sz="1600" dirty="0"/>
+              <a:t>, </a:t>
+            </a:r>
+            <a:r>
+              <a:rPr lang="ko-KR" altLang="en-US" sz="1600" dirty="0" err="1"/>
+              <a:t>격납건물</a:t>
+            </a:r>
+            <a:r>
+              <a:rPr lang="en-US" altLang="ko-KR" sz="1600" dirty="0"/>
+              <a:t>, </a:t>
+            </a:r>
+            <a:r>
+              <a:rPr lang="ko-KR" altLang="en-US" sz="1600" dirty="0"/>
+              <a:t>자동 정지 시스템</a:t>
+            </a:r>
+            <a:r>
+              <a:rPr lang="en-US" altLang="ko-KR" sz="1600" dirty="0"/>
+              <a:t>, </a:t>
+            </a:r>
+            <a:r>
+              <a:rPr lang="ko-KR" altLang="en-US" sz="1600" dirty="0"/>
+              <a:t>여과 배기 시스템 등이 있고</a:t>
+            </a:r>
+            <a:r>
+              <a:rPr lang="en-US" altLang="ko-KR" sz="1600" dirty="0"/>
+              <a:t>, </a:t>
+            </a:r>
+            <a:r>
+              <a:rPr lang="ko-KR" altLang="en-US" sz="1600" dirty="0"/>
+              <a:t>각 계통은 독립적으로 작동할 수 있도록 설계되어 사고 발생시 피해를 최소화 하도록 되어 있다</a:t>
+            </a:r>
+            <a:r>
+              <a:rPr lang="en-US" altLang="ko-KR" sz="1600" dirty="0"/>
+              <a:t>.</a:t>
+            </a:r>
+          </a:p>
+          <a:p>
+            <a:pPr marL="835025" lvl="1" indent="-285750">
+              <a:lnSpc>
+                <a:spcPct val="150000"/>
+              </a:lnSpc>
+              <a:buFont typeface="Wingdings" panose="05000000000000000000" pitchFamily="2" charset="2"/>
+              <a:buChar char="ü"/>
+            </a:pPr>
+            <a:endParaRPr lang="en-US" altLang="ko-KR" sz="1600" dirty="0"/>
+          </a:p>
+          <a:p>
+            <a:pPr marL="377825" indent="-285750">
+              <a:lnSpc>
+                <a:spcPct val="150000"/>
+              </a:lnSpc>
+              <a:buFont typeface="Arial" panose="020B0604020202020204" pitchFamily="34" charset="0"/>
+              <a:buChar char="•"/>
+            </a:pPr>
+            <a:r>
+              <a:rPr lang="ko-KR" altLang="en-US" sz="1600" dirty="0"/>
+              <a:t>원자력 발전소는 주기적인 유지</a:t>
+            </a:r>
+            <a:r>
+              <a:rPr lang="en-US" altLang="ko-KR" sz="1600" dirty="0"/>
+              <a:t>·</a:t>
+            </a:r>
+            <a:r>
+              <a:rPr lang="ko-KR" altLang="en-US" sz="1600" dirty="0"/>
+              <a:t>보수 계획에 따라 안정성과 신뢰성을 확보한다</a:t>
+            </a:r>
+            <a:r>
+              <a:rPr lang="en-US" altLang="ko-KR" sz="1600" dirty="0"/>
+              <a:t>.</a:t>
+            </a:r>
+          </a:p>
+          <a:p>
+            <a:pPr marL="835025" lvl="1" indent="-285750">
+              <a:lnSpc>
+                <a:spcPct val="150000"/>
+              </a:lnSpc>
+              <a:buFont typeface="Wingdings" panose="05000000000000000000" pitchFamily="2" charset="2"/>
+              <a:buChar char="ü"/>
+            </a:pPr>
+            <a:r>
+              <a:rPr lang="ko-KR" altLang="en-US" sz="1600" dirty="0"/>
+              <a:t>정비 활동에는 주요 기계 부품의 마모 상태 점검</a:t>
+            </a:r>
+            <a:r>
+              <a:rPr lang="en-US" altLang="ko-KR" sz="1600" dirty="0"/>
+              <a:t>, </a:t>
+            </a:r>
+            <a:r>
+              <a:rPr lang="ko-KR" altLang="en-US" sz="1600" dirty="0"/>
+              <a:t>냉각수 화학 성분 분석</a:t>
+            </a:r>
+            <a:r>
+              <a:rPr lang="en-US" altLang="ko-KR" sz="1600" dirty="0"/>
+              <a:t>, </a:t>
+            </a:r>
+            <a:r>
+              <a:rPr lang="ko-KR" altLang="en-US" sz="1600" dirty="0"/>
+              <a:t>배관 시스템의 이상 유무 확인 등이 포함되며</a:t>
+            </a:r>
+            <a:r>
+              <a:rPr lang="en-US" altLang="ko-KR" sz="1600" dirty="0"/>
+              <a:t>, </a:t>
+            </a:r>
+            <a:r>
+              <a:rPr lang="ko-KR" altLang="en-US" sz="1600" dirty="0"/>
+              <a:t>이와 함께 약 </a:t>
+            </a:r>
+            <a:r>
+              <a:rPr lang="en-US" altLang="ko-KR" sz="1600" dirty="0"/>
+              <a:t>12~24</a:t>
+            </a:r>
+            <a:r>
+              <a:rPr lang="ko-KR" altLang="en-US" sz="1600" dirty="0"/>
+              <a:t>개월 주기로 연료 재장전이 수행된다</a:t>
+            </a:r>
+            <a:r>
+              <a:rPr lang="en-US" altLang="ko-KR" sz="1600" dirty="0"/>
+              <a:t>.</a:t>
+            </a:r>
+          </a:p>
+          <a:p>
+            <a:pPr marL="1292225" lvl="2" indent="-285750">
+              <a:lnSpc>
+                <a:spcPct val="150000"/>
+              </a:lnSpc>
+              <a:buFont typeface="Wingdings" panose="05000000000000000000" pitchFamily="2" charset="2"/>
+              <a:buChar char="Ø"/>
+            </a:pPr>
+            <a:r>
+              <a:rPr lang="ko-KR" altLang="en-US" sz="1600" dirty="0"/>
+              <a:t>연료 재장전 기간에는 발전소를 일시정지 시키고</a:t>
+            </a:r>
+            <a:r>
+              <a:rPr lang="en-US" altLang="ko-KR" sz="1600" dirty="0"/>
+              <a:t>, </a:t>
+            </a:r>
+            <a:r>
+              <a:rPr lang="ko-KR" altLang="en-US" sz="1600" dirty="0"/>
+              <a:t>대규모 설비 및 안전 점검이 집중적으로 이루어진다</a:t>
+            </a:r>
+            <a:r>
+              <a:rPr lang="en-US" altLang="ko-KR" sz="1600" dirty="0"/>
+              <a:t>.</a:t>
+            </a:r>
+          </a:p>
+          <a:p>
+            <a:pPr marL="835025" lvl="1" indent="-285750">
+              <a:lnSpc>
+                <a:spcPct val="150000"/>
+              </a:lnSpc>
+              <a:buFont typeface="Wingdings" panose="05000000000000000000" pitchFamily="2" charset="2"/>
+              <a:buChar char="ü"/>
+            </a:pPr>
+            <a:r>
+              <a:rPr lang="ko-KR" altLang="en-US" sz="1600" dirty="0"/>
+              <a:t>이러한 계획 정비는 전력 수요가 낮은 기간에 맞추어 실시되어 공급 안정성에도 영향을 주지 않도록 조율된다</a:t>
+            </a:r>
+            <a:r>
+              <a:rPr lang="en-US" altLang="ko-KR" sz="1600" dirty="0"/>
+              <a:t>.</a:t>
+            </a:r>
+          </a:p>
+          <a:p>
+            <a:pPr marL="835025" lvl="1" indent="-285750">
+              <a:lnSpc>
+                <a:spcPct val="150000"/>
+              </a:lnSpc>
+              <a:buFont typeface="Wingdings" panose="05000000000000000000" pitchFamily="2" charset="2"/>
+              <a:buChar char="ü"/>
+            </a:pPr>
+            <a:endParaRPr lang="en-US" altLang="ko-KR" sz="1600" dirty="0"/>
+          </a:p>
+          <a:p>
+            <a:pPr marL="377825" indent="-285750">
+              <a:lnSpc>
+                <a:spcPct val="150000"/>
+              </a:lnSpc>
+              <a:buFont typeface="Arial" panose="020B0604020202020204" pitchFamily="34" charset="0"/>
+              <a:buChar char="•"/>
+            </a:pPr>
+            <a:r>
+              <a:rPr lang="ko-KR" altLang="en-US" sz="1600" dirty="0"/>
+              <a:t>운영 후 단계에서는 원자로의 수명이 종료함에 따라 </a:t>
+            </a:r>
+            <a:r>
+              <a:rPr lang="ko-KR" altLang="en-US" sz="1600" dirty="0" err="1"/>
+              <a:t>폐로가</a:t>
+            </a:r>
+            <a:r>
+              <a:rPr lang="en-US" altLang="ko-KR" sz="1600" dirty="0"/>
+              <a:t> </a:t>
+            </a:r>
+            <a:r>
+              <a:rPr lang="ko-KR" altLang="en-US" sz="1600" dirty="0"/>
+              <a:t>수행된다</a:t>
+            </a:r>
+            <a:r>
+              <a:rPr lang="en-US" altLang="ko-KR" sz="1600" dirty="0"/>
+              <a:t>.</a:t>
+            </a:r>
+          </a:p>
+          <a:p>
+            <a:pPr marL="835025" lvl="1" indent="-285750">
+              <a:lnSpc>
+                <a:spcPct val="150000"/>
+              </a:lnSpc>
+              <a:buFont typeface="Wingdings" panose="05000000000000000000" pitchFamily="2" charset="2"/>
+              <a:buChar char="ü"/>
+            </a:pPr>
+            <a:r>
+              <a:rPr lang="ko-KR" altLang="en-US" sz="1600" dirty="0"/>
+              <a:t>원자로 정지</a:t>
+            </a:r>
+            <a:r>
+              <a:rPr lang="en-US" altLang="ko-KR" sz="1600" dirty="0"/>
+              <a:t>, </a:t>
+            </a:r>
+            <a:r>
+              <a:rPr lang="ko-KR" altLang="en-US" sz="1600" dirty="0" err="1"/>
+              <a:t>사용후</a:t>
+            </a:r>
+            <a:r>
+              <a:rPr lang="ko-KR" altLang="en-US" sz="1600" dirty="0"/>
+              <a:t> 핵연료의 인출 및 안전 저장</a:t>
+            </a:r>
+            <a:r>
+              <a:rPr lang="en-US" altLang="ko-KR" sz="1600" dirty="0"/>
+              <a:t>, </a:t>
+            </a:r>
+            <a:r>
+              <a:rPr lang="ko-KR" altLang="en-US" sz="1600" dirty="0"/>
+              <a:t>방사능에 오염된 장비와 구조물의 해체 부지 복원을 포함하며 수십 년에 걸쳐 단계적으로 이루어진다</a:t>
+            </a:r>
+            <a:r>
+              <a:rPr lang="en-US" altLang="ko-KR" sz="1600" dirty="0"/>
+              <a:t>.</a:t>
+            </a:r>
+          </a:p>
+        </p:txBody>
+      </p:sp>
+    </p:spTree>
+    <p:extLst>
+      <p:ext uri="{BB962C8B-B14F-4D97-AF65-F5344CB8AC3E}">
+        <p14:creationId xmlns:p14="http://schemas.microsoft.com/office/powerpoint/2010/main" val="2246769110"/>
+      </p:ext>
+    </p:extLst>
+  </p:cSld>
+  <p:clrMapOvr>
+    <a:masterClrMapping/>
+  </p:clrMapOvr>
+</p:sld>
+</file>
+
+<file path=ppt/slides/slide27.xml><?xml version="1.0" encoding="utf-8"?>
+<p:sld xmlns:a="http://schemas.openxmlformats.org/drawingml/2006/main" xmlns:r="http://schemas.openxmlformats.org/officeDocument/2006/relationships" xmlns:p="http://schemas.openxmlformats.org/presentationml/2006/main">
+  <p:cSld>
+    <p:spTree>
+      <p:nvGrpSpPr>
+        <p:cNvPr id="1" name="">
+          <a:extLst>
+            <a:ext uri="{FF2B5EF4-FFF2-40B4-BE49-F238E27FC236}">
               <a16:creationId xmlns:a16="http://schemas.microsoft.com/office/drawing/2014/main" id="{297BF916-B823-BCC3-BF4F-A186E97AE5F7}"/>
             </a:ext>
           </a:extLst>
@@ -11235,7 +13844,7 @@
           <a:p>
             <a:fld id="{109C872D-39A9-4065-8BF3-6A613116E2A1}" type="slidenum">
               <a:rPr lang="ko-KR" altLang="en-US" smtClean="0"/>
-              <a:t>20</a:t>
+              <a:t>27</a:t>
             </a:fld>
             <a:endParaRPr lang="ko-KR" altLang="en-US"/>
           </a:p>
@@ -11295,7 +13904,7 @@
 </p:sld>
 </file>
 
-<file path=ppt/slides/slide21.xml><?xml version="1.0" encoding="utf-8"?>
+<file path=ppt/slides/slide28.xml><?xml version="1.0" encoding="utf-8"?>
 <p:sld xmlns:a="http://schemas.openxmlformats.org/drawingml/2006/main" xmlns:r="http://schemas.openxmlformats.org/officeDocument/2006/relationships" xmlns:p="http://schemas.openxmlformats.org/presentationml/2006/main">
   <p:cSld>
     <p:spTree>
@@ -11303,7 +13912,7 @@
         <p:cNvPr id="1" name="">
           <a:extLst>
             <a:ext uri="{FF2B5EF4-FFF2-40B4-BE49-F238E27FC236}">
-              <a16:creationId xmlns:a16="http://schemas.microsoft.com/office/drawing/2014/main" id="{B472A9F9-7BBF-C3C8-B1CF-563E948F3E23}"/>
+              <a16:creationId xmlns:a16="http://schemas.microsoft.com/office/drawing/2014/main" id="{19FF5EB0-E0AE-08F0-F661-C7E5C7ECFF1E}"/>
             </a:ext>
           </a:extLst>
         </p:cNvPr>
@@ -11318,49 +13927,40 @@
           <a:chExt cx="0" cy="0"/>
         </a:xfrm>
       </p:grpSpPr>
-      <p:pic>
-        <p:nvPicPr>
-          <p:cNvPr id="6" name="그림 5" descr="텍스트, 로고, 원, 폰트이(가) 표시된 사진&#10;&#10;AI 생성 콘텐츠는 정확하지 않을 수 있습니다.">
+      <p:sp>
+        <p:nvSpPr>
+          <p:cNvPr id="2" name="제목 1">
             <a:extLst>
               <a:ext uri="{FF2B5EF4-FFF2-40B4-BE49-F238E27FC236}">
-                <a16:creationId xmlns:a16="http://schemas.microsoft.com/office/drawing/2014/main" id="{8868B656-2B11-E488-385C-0CC9D5510595}"/>
+                <a16:creationId xmlns:a16="http://schemas.microsoft.com/office/drawing/2014/main" id="{CC0CF82B-9F3D-E247-0400-EA7307A5C93A}"/>
               </a:ext>
             </a:extLst>
           </p:cNvPr>
-          <p:cNvPicPr>
-            <a:picLocks noChangeAspect="1"/>
-          </p:cNvPicPr>
-          <p:nvPr/>
-        </p:nvPicPr>
-        <p:blipFill>
-          <a:blip r:embed="rId2">
-            <a:alphaModFix amt="20000"/>
-            <a:extLst>
-              <a:ext uri="{28A0092B-C50C-407E-A947-70E740481C1C}">
-                <a14:useLocalDpi xmlns:a14="http://schemas.microsoft.com/office/drawing/2010/main" val="0"/>
-              </a:ext>
-            </a:extLst>
-          </a:blip>
-          <a:stretch>
-            <a:fillRect/>
-          </a:stretch>
-        </p:blipFill>
-        <p:spPr>
-          <a:xfrm>
-            <a:off x="4012070" y="1673061"/>
-            <a:ext cx="4167861" cy="4167861"/>
-          </a:xfrm>
-          <a:prstGeom prst="rect">
-            <a:avLst/>
-          </a:prstGeom>
-        </p:spPr>
-      </p:pic>
+          <p:cNvSpPr>
+            <a:spLocks noGrp="1"/>
+          </p:cNvSpPr>
+          <p:nvPr>
+            <p:ph type="title"/>
+          </p:nvPr>
+        </p:nvSpPr>
+        <p:spPr/>
+        <p:txBody>
+          <a:bodyPr/>
+          <a:lstStyle/>
+          <a:p>
+            <a:r>
+              <a:rPr lang="ko-KR" altLang="en-US" dirty="0"/>
+              <a:t>원자력 발전의 비용 구조</a:t>
+            </a:r>
+          </a:p>
+        </p:txBody>
+      </p:sp>
       <p:sp>
         <p:nvSpPr>
           <p:cNvPr id="4" name="슬라이드 번호 개체 틀 3">
             <a:extLst>
               <a:ext uri="{FF2B5EF4-FFF2-40B4-BE49-F238E27FC236}">
-                <a16:creationId xmlns:a16="http://schemas.microsoft.com/office/drawing/2014/main" id="{6B363120-2945-5444-EB75-F301FA3BC836}"/>
+                <a16:creationId xmlns:a16="http://schemas.microsoft.com/office/drawing/2014/main" id="{3DF21193-7F82-A286-B4E5-C685103D9FD1}"/>
               </a:ext>
             </a:extLst>
           </p:cNvPr>
@@ -11378,7 +13978,7 @@
           <a:p>
             <a:fld id="{109C872D-39A9-4065-8BF3-6A613116E2A1}" type="slidenum">
               <a:rPr lang="ko-KR" altLang="en-US" smtClean="0"/>
-              <a:t>21</a:t>
+              <a:t>28</a:t>
             </a:fld>
             <a:endParaRPr lang="ko-KR" altLang="en-US"/>
           </a:p>
@@ -11386,49 +13986,396 @@
       </p:sp>
       <p:sp>
         <p:nvSpPr>
-          <p:cNvPr id="7" name="제목 1">
+          <p:cNvPr id="3" name="TextBox 2">
             <a:extLst>
               <a:ext uri="{FF2B5EF4-FFF2-40B4-BE49-F238E27FC236}">
-                <a16:creationId xmlns:a16="http://schemas.microsoft.com/office/drawing/2014/main" id="{B218A4A4-DE9E-FD83-5958-D2D791653475}"/>
+                <a16:creationId xmlns:a16="http://schemas.microsoft.com/office/drawing/2014/main" id="{D4DD5963-5B30-29A1-D1D0-C588416B5436}"/>
               </a:ext>
             </a:extLst>
           </p:cNvPr>
-          <p:cNvSpPr>
-            <a:spLocks noGrp="1"/>
-          </p:cNvSpPr>
-          <p:nvPr>
-            <p:ph type="title"/>
-          </p:nvPr>
+          <p:cNvSpPr txBox="1"/>
+          <p:nvPr/>
         </p:nvSpPr>
         <p:spPr>
           <a:xfrm>
-            <a:off x="831850" y="3765550"/>
-            <a:ext cx="11150600" cy="652818"/>
+            <a:off x="288790" y="958844"/>
+            <a:ext cx="11118453" cy="5584670"/>
           </a:xfrm>
-          <a:effectLst>
-            <a:reflection blurRad="50800" stA="45000" endPos="44000" dir="5400000" sy="-100000" algn="bl" rotWithShape="0"/>
-          </a:effectLst>
+          <a:prstGeom prst="rect">
+            <a:avLst/>
+          </a:prstGeom>
+          <a:noFill/>
         </p:spPr>
         <p:txBody>
-          <a:bodyPr anchor="b"/>
+          <a:bodyPr wrap="square" rtlCol="0" anchor="t">
+            <a:spAutoFit/>
+          </a:bodyPr>
           <a:lstStyle/>
           <a:p>
-            <a:r>
-              <a:rPr lang="en-US" altLang="ko-KR" sz="4000" b="1" i="0" spc="150" dirty="0"/>
-              <a:t>Section 6. </a:t>
-            </a:r>
-            <a:r>
-              <a:rPr lang="ko-KR" altLang="en-US" sz="4000" b="1" i="0" spc="150" dirty="0"/>
-              <a:t>원자력 산업의 경쟁구조</a:t>
-            </a:r>
-            <a:endParaRPr lang="ko-KR" altLang="en-US" sz="3600" i="0" spc="150" dirty="0"/>
+            <a:pPr marL="377825" indent="-285750">
+              <a:lnSpc>
+                <a:spcPct val="150000"/>
+              </a:lnSpc>
+              <a:buFont typeface="Arial" panose="020B0604020202020204" pitchFamily="34" charset="0"/>
+              <a:buChar char="•"/>
+            </a:pPr>
+            <a:r>
+              <a:rPr lang="ko-KR" altLang="en-US" sz="1600" dirty="0"/>
+              <a:t>원자력 발전소의 비용구조는 매우 복합적이고</a:t>
+            </a:r>
+            <a:r>
+              <a:rPr lang="en-US" altLang="ko-KR" sz="1600" dirty="0"/>
+              <a:t>, </a:t>
+            </a:r>
+            <a:r>
+              <a:rPr lang="ko-KR" altLang="en-US" sz="1600" dirty="0"/>
+              <a:t>각 비용 요소는 전력 생산의 전체 경제성을 결정하는 핵심 요인이다</a:t>
+            </a:r>
+            <a:r>
+              <a:rPr lang="en-US" altLang="ko-KR" sz="1600" dirty="0"/>
+              <a:t>.</a:t>
+            </a:r>
+          </a:p>
+          <a:p>
+            <a:pPr marL="835025" lvl="1" indent="-285750">
+              <a:lnSpc>
+                <a:spcPct val="150000"/>
+              </a:lnSpc>
+              <a:buFont typeface="Wingdings" panose="05000000000000000000" pitchFamily="2" charset="2"/>
+              <a:buChar char="ü"/>
+            </a:pPr>
+            <a:r>
+              <a:rPr lang="ko-KR" altLang="en-US" sz="1600" dirty="0"/>
+              <a:t>발전비용은 자본비용</a:t>
+            </a:r>
+            <a:r>
+              <a:rPr lang="en-US" altLang="ko-KR" sz="1600" dirty="0"/>
+              <a:t>, </a:t>
+            </a:r>
+            <a:r>
+              <a:rPr lang="ko-KR" altLang="en-US" sz="1600" dirty="0"/>
+              <a:t>유지보수비용</a:t>
+            </a:r>
+            <a:r>
+              <a:rPr lang="en-US" altLang="ko-KR" sz="1600" dirty="0"/>
+              <a:t>, </a:t>
+            </a:r>
+            <a:r>
+              <a:rPr lang="ko-KR" altLang="en-US" sz="1600" dirty="0"/>
+              <a:t>연료비용</a:t>
+            </a:r>
+            <a:r>
+              <a:rPr lang="en-US" altLang="ko-KR" sz="1600" dirty="0"/>
+              <a:t>, </a:t>
+            </a:r>
+            <a:r>
+              <a:rPr lang="ko-KR" altLang="en-US" sz="1600" dirty="0"/>
+              <a:t>폐쇄비용으로 구분된다</a:t>
+            </a:r>
+            <a:r>
+              <a:rPr lang="en-US" altLang="ko-KR" sz="1600" dirty="0"/>
+              <a:t>.</a:t>
+            </a:r>
+          </a:p>
+          <a:p>
+            <a:pPr marL="835025" lvl="1" indent="-285750">
+              <a:lnSpc>
+                <a:spcPct val="150000"/>
+              </a:lnSpc>
+              <a:buFont typeface="Wingdings" panose="05000000000000000000" pitchFamily="2" charset="2"/>
+              <a:buChar char="ü"/>
+            </a:pPr>
+            <a:endParaRPr lang="en-US" altLang="ko-KR" sz="1600" dirty="0"/>
+          </a:p>
+          <a:p>
+            <a:pPr marL="377825" indent="-285750">
+              <a:lnSpc>
+                <a:spcPct val="150000"/>
+              </a:lnSpc>
+              <a:buFont typeface="Arial" panose="020B0604020202020204" pitchFamily="34" charset="0"/>
+              <a:buChar char="•"/>
+            </a:pPr>
+            <a:r>
+              <a:rPr lang="ko-KR" altLang="en-US" sz="1600" dirty="0"/>
+              <a:t>자본비용은 전체 비용 중 가장 큰 비중을 차지한다</a:t>
+            </a:r>
+            <a:r>
+              <a:rPr lang="en-US" altLang="ko-KR" sz="1600" dirty="0"/>
+              <a:t>.</a:t>
+            </a:r>
+          </a:p>
+          <a:p>
+            <a:pPr marL="835025" lvl="1" indent="-285750">
+              <a:lnSpc>
+                <a:spcPct val="150000"/>
+              </a:lnSpc>
+              <a:buFont typeface="Wingdings" panose="05000000000000000000" pitchFamily="2" charset="2"/>
+              <a:buChar char="ü"/>
+            </a:pPr>
+            <a:r>
+              <a:rPr lang="ko-KR" altLang="en-US" sz="1600" dirty="0"/>
+              <a:t>원자로 설계</a:t>
+            </a:r>
+            <a:r>
+              <a:rPr lang="en-US" altLang="ko-KR" sz="1600" dirty="0"/>
+              <a:t>, </a:t>
+            </a:r>
+            <a:r>
+              <a:rPr lang="ko-KR" altLang="en-US" sz="1600" dirty="0"/>
+              <a:t>부지 선정과 준비</a:t>
+            </a:r>
+            <a:r>
+              <a:rPr lang="en-US" altLang="ko-KR" sz="1600" dirty="0"/>
+              <a:t>, </a:t>
+            </a:r>
+            <a:r>
+              <a:rPr lang="ko-KR" altLang="en-US" sz="1600" dirty="0"/>
+              <a:t>인허가 획득</a:t>
+            </a:r>
+            <a:r>
+              <a:rPr lang="en-US" altLang="ko-KR" sz="1600" dirty="0"/>
+              <a:t>, </a:t>
+            </a:r>
+            <a:r>
+              <a:rPr lang="ko-KR" altLang="en-US" sz="1600" dirty="0"/>
+              <a:t>기자재 설치</a:t>
+            </a:r>
+            <a:r>
+              <a:rPr lang="en-US" altLang="ko-KR" sz="1600" dirty="0"/>
+              <a:t>, </a:t>
+            </a:r>
+            <a:r>
+              <a:rPr lang="ko-KR" altLang="en-US" sz="1600" dirty="0"/>
+              <a:t>건설</a:t>
+            </a:r>
+            <a:r>
+              <a:rPr lang="en-US" altLang="ko-KR" sz="1600" dirty="0"/>
+              <a:t>, </a:t>
+            </a:r>
+            <a:r>
+              <a:rPr lang="ko-KR" altLang="en-US" sz="1600" dirty="0"/>
+              <a:t>시운전과 관련된 일체 비용을 포함한다</a:t>
+            </a:r>
+            <a:r>
+              <a:rPr lang="en-US" altLang="ko-KR" sz="1600" dirty="0"/>
+              <a:t>.</a:t>
+            </a:r>
+          </a:p>
+          <a:p>
+            <a:pPr marL="835025" lvl="1" indent="-285750">
+              <a:lnSpc>
+                <a:spcPct val="150000"/>
+              </a:lnSpc>
+              <a:buFont typeface="Wingdings" panose="05000000000000000000" pitchFamily="2" charset="2"/>
+              <a:buChar char="ü"/>
+            </a:pPr>
+            <a:r>
+              <a:rPr lang="ko-KR" altLang="en-US" sz="1600" dirty="0"/>
+              <a:t>원자력 발전소는 높은 수준의 안전성과 규제요건을 충족해야 하므로 건설기간이 평균 </a:t>
+            </a:r>
+            <a:r>
+              <a:rPr lang="en-US" altLang="ko-KR" sz="1600" dirty="0"/>
+              <a:t>8~12</a:t>
+            </a:r>
+            <a:r>
+              <a:rPr lang="ko-KR" altLang="en-US" sz="1600" dirty="0"/>
+              <a:t>년에 이르며</a:t>
+            </a:r>
+            <a:r>
+              <a:rPr lang="en-US" altLang="ko-KR" sz="1600" dirty="0"/>
+              <a:t>, </a:t>
+            </a:r>
+            <a:r>
+              <a:rPr lang="ko-KR" altLang="en-US" sz="1600" dirty="0"/>
+              <a:t>이로 인한 금융비용 또한 크게 발생한다</a:t>
+            </a:r>
+            <a:r>
+              <a:rPr lang="en-US" altLang="ko-KR" sz="1600" dirty="0"/>
+              <a:t>.</a:t>
+            </a:r>
+          </a:p>
+          <a:p>
+            <a:pPr marL="835025" lvl="1" indent="-285750">
+              <a:lnSpc>
+                <a:spcPct val="150000"/>
+              </a:lnSpc>
+              <a:buFont typeface="Wingdings" panose="05000000000000000000" pitchFamily="2" charset="2"/>
+              <a:buChar char="ü"/>
+            </a:pPr>
+            <a:r>
+              <a:rPr lang="ko-KR" altLang="en-US" sz="1600" dirty="0"/>
+              <a:t>현대식 대형 경수로의 자본비용은 설치용량 당 석탄이나 천연가스 발전소보다 </a:t>
+            </a:r>
+            <a:r>
+              <a:rPr lang="en-US" altLang="ko-KR" sz="1600" dirty="0"/>
+              <a:t>2</a:t>
+            </a:r>
+            <a:r>
+              <a:rPr lang="ko-KR" altLang="en-US" sz="1600" dirty="0"/>
+              <a:t>배에서 </a:t>
+            </a:r>
+            <a:r>
+              <a:rPr lang="en-US" altLang="ko-KR" sz="1600" dirty="0"/>
+              <a:t>3</a:t>
+            </a:r>
+            <a:r>
+              <a:rPr lang="ko-KR" altLang="en-US" sz="1600" dirty="0"/>
+              <a:t>배 이상 높은 수준이다</a:t>
+            </a:r>
+            <a:r>
+              <a:rPr lang="en-US" altLang="ko-KR" sz="1600" dirty="0"/>
+              <a:t>.</a:t>
+            </a:r>
+          </a:p>
+          <a:p>
+            <a:pPr marL="835025" lvl="1" indent="-285750">
+              <a:lnSpc>
+                <a:spcPct val="150000"/>
+              </a:lnSpc>
+              <a:buFont typeface="Wingdings" panose="05000000000000000000" pitchFamily="2" charset="2"/>
+              <a:buChar char="ü"/>
+            </a:pPr>
+            <a:r>
+              <a:rPr lang="ko-KR" altLang="en-US" sz="1600" dirty="0"/>
+              <a:t>이러한 높은 초기 투자비용은 원자력 발전소의 전체 운영 수명에 걸쳐 점진적으로 회수된다</a:t>
+            </a:r>
+            <a:r>
+              <a:rPr lang="en-US" altLang="ko-KR" sz="1600" dirty="0"/>
+              <a:t>.</a:t>
+            </a:r>
+          </a:p>
+          <a:p>
+            <a:pPr marL="835025" lvl="1" indent="-285750">
+              <a:lnSpc>
+                <a:spcPct val="150000"/>
+              </a:lnSpc>
+              <a:buFont typeface="Wingdings" panose="05000000000000000000" pitchFamily="2" charset="2"/>
+              <a:buChar char="ü"/>
+            </a:pPr>
+            <a:endParaRPr lang="en-US" altLang="ko-KR" sz="1600" dirty="0"/>
+          </a:p>
+          <a:p>
+            <a:pPr marL="377825" indent="-285750">
+              <a:lnSpc>
+                <a:spcPct val="150000"/>
+              </a:lnSpc>
+              <a:buFont typeface="Arial" panose="020B0604020202020204" pitchFamily="34" charset="0"/>
+              <a:buChar char="•"/>
+            </a:pPr>
+            <a:r>
+              <a:rPr lang="ko-KR" altLang="en-US" sz="1600" dirty="0"/>
+              <a:t>유지보수비용은 발전소의 수명 동안 지속적으로 발생하는 비용이다</a:t>
+            </a:r>
+            <a:r>
+              <a:rPr lang="en-US" altLang="ko-KR" sz="1600" dirty="0"/>
+              <a:t>.</a:t>
+            </a:r>
+          </a:p>
+          <a:p>
+            <a:pPr marL="835025" lvl="1" indent="-285750">
+              <a:lnSpc>
+                <a:spcPct val="150000"/>
+              </a:lnSpc>
+              <a:buFont typeface="Wingdings" panose="05000000000000000000" pitchFamily="2" charset="2"/>
+              <a:buChar char="ü"/>
+            </a:pPr>
+            <a:r>
+              <a:rPr lang="ko-KR" altLang="en-US" sz="1600" dirty="0"/>
+              <a:t>인력 운영</a:t>
+            </a:r>
+            <a:r>
+              <a:rPr lang="en-US" altLang="ko-KR" sz="1600" dirty="0"/>
+              <a:t>, </a:t>
+            </a:r>
+            <a:r>
+              <a:rPr lang="ko-KR" altLang="en-US" sz="1600" dirty="0"/>
+              <a:t>정기 점검</a:t>
+            </a:r>
+            <a:r>
+              <a:rPr lang="en-US" altLang="ko-KR" sz="1600" dirty="0"/>
+              <a:t>, </a:t>
+            </a:r>
+            <a:r>
+              <a:rPr lang="ko-KR" altLang="en-US" sz="1600" dirty="0"/>
+              <a:t>설비 교체</a:t>
+            </a:r>
+            <a:r>
+              <a:rPr lang="en-US" altLang="ko-KR" sz="1600" dirty="0"/>
+              <a:t>, </a:t>
+            </a:r>
+            <a:r>
+              <a:rPr lang="ko-KR" altLang="en-US" sz="1600" dirty="0"/>
+              <a:t>보안</a:t>
+            </a:r>
+            <a:r>
+              <a:rPr lang="en-US" altLang="ko-KR" sz="1600" dirty="0"/>
+              <a:t>, </a:t>
+            </a:r>
+            <a:r>
+              <a:rPr lang="ko-KR" altLang="en-US" sz="1600" dirty="0"/>
+              <a:t>보험</a:t>
+            </a:r>
+            <a:r>
+              <a:rPr lang="en-US" altLang="ko-KR" sz="1600" dirty="0"/>
+              <a:t>, </a:t>
+            </a:r>
+            <a:r>
+              <a:rPr lang="ko-KR" altLang="en-US" sz="1600" dirty="0"/>
+              <a:t>규제 대응 등에 따른 지출을 포함한다</a:t>
+            </a:r>
+            <a:r>
+              <a:rPr lang="en-US" altLang="ko-KR" sz="1600" dirty="0"/>
+              <a:t>.</a:t>
+            </a:r>
+          </a:p>
+          <a:p>
+            <a:pPr marL="835025" lvl="1" indent="-285750">
+              <a:lnSpc>
+                <a:spcPct val="150000"/>
+              </a:lnSpc>
+              <a:buFont typeface="Wingdings" panose="05000000000000000000" pitchFamily="2" charset="2"/>
+              <a:buChar char="ü"/>
+            </a:pPr>
+            <a:r>
+              <a:rPr lang="ko-KR" altLang="en-US" sz="1600" dirty="0"/>
+              <a:t>자본비용과 달리 운영비는 매년 비교적 안정적으로 예측 가능하다</a:t>
+            </a:r>
+            <a:r>
+              <a:rPr lang="en-US" altLang="ko-KR" sz="1600" dirty="0"/>
+              <a:t>.</a:t>
+            </a:r>
+          </a:p>
+          <a:p>
+            <a:pPr marL="835025" lvl="1" indent="-285750">
+              <a:lnSpc>
+                <a:spcPct val="150000"/>
+              </a:lnSpc>
+              <a:buFont typeface="Wingdings" panose="05000000000000000000" pitchFamily="2" charset="2"/>
+              <a:buChar char="ü"/>
+            </a:pPr>
+            <a:r>
+              <a:rPr lang="ko-KR" altLang="en-US" sz="1600" dirty="0"/>
+              <a:t>발전소의 안정적 운영을 위해 전문 인력과 엄격한 안전기준을 요구하기 때문에</a:t>
+            </a:r>
+            <a:r>
+              <a:rPr lang="en-US" altLang="ko-KR" sz="1600" dirty="0"/>
+              <a:t>, </a:t>
+            </a:r>
+            <a:r>
+              <a:rPr lang="ko-KR" altLang="en-US" sz="1600" dirty="0"/>
+              <a:t>이러한 비용은 일반적인 화석연료 발전소보다 높은 경향이 있다</a:t>
+            </a:r>
+            <a:r>
+              <a:rPr lang="en-US" altLang="ko-KR" sz="1600" dirty="0"/>
+              <a:t>.</a:t>
+            </a:r>
           </a:p>
         </p:txBody>
       </p:sp>
     </p:spTree>
     <p:extLst>
       <p:ext uri="{BB962C8B-B14F-4D97-AF65-F5344CB8AC3E}">
-        <p14:creationId xmlns:p14="http://schemas.microsoft.com/office/powerpoint/2010/main" val="1400908895"/>
+        <p14:creationId xmlns:p14="http://schemas.microsoft.com/office/powerpoint/2010/main" val="2442900985"/>
       </p:ext>
     </p:extLst>
   </p:cSld>
@@ -11438,7 +14385,7 @@
 </p:sld>
 </file>
 
-<file path=ppt/slides/slide22.xml><?xml version="1.0" encoding="utf-8"?>
+<file path=ppt/slides/slide29.xml><?xml version="1.0" encoding="utf-8"?>
 <p:sld xmlns:a="http://schemas.openxmlformats.org/drawingml/2006/main" xmlns:r="http://schemas.openxmlformats.org/officeDocument/2006/relationships" xmlns:p="http://schemas.openxmlformats.org/presentationml/2006/main">
   <p:cSld>
     <p:spTree>
@@ -11446,7 +14393,7 @@
         <p:cNvPr id="1" name="">
           <a:extLst>
             <a:ext uri="{FF2B5EF4-FFF2-40B4-BE49-F238E27FC236}">
-              <a16:creationId xmlns:a16="http://schemas.microsoft.com/office/drawing/2014/main" id="{5BA6E00D-775B-0F11-3C55-530EDC4649DE}"/>
+              <a16:creationId xmlns:a16="http://schemas.microsoft.com/office/drawing/2014/main" id="{93853568-EEE9-DB5E-0D9C-1408D2EAC758}"/>
             </a:ext>
           </a:extLst>
         </p:cNvPr>
@@ -11461,49 +14408,40 @@
           <a:chExt cx="0" cy="0"/>
         </a:xfrm>
       </p:grpSpPr>
-      <p:pic>
-        <p:nvPicPr>
-          <p:cNvPr id="6" name="그림 5" descr="텍스트, 로고, 원, 폰트이(가) 표시된 사진&#10;&#10;AI 생성 콘텐츠는 정확하지 않을 수 있습니다.">
+      <p:sp>
+        <p:nvSpPr>
+          <p:cNvPr id="2" name="제목 1">
             <a:extLst>
               <a:ext uri="{FF2B5EF4-FFF2-40B4-BE49-F238E27FC236}">
-                <a16:creationId xmlns:a16="http://schemas.microsoft.com/office/drawing/2014/main" id="{7DC98B59-499E-B772-96DF-E256D18D39CA}"/>
+                <a16:creationId xmlns:a16="http://schemas.microsoft.com/office/drawing/2014/main" id="{D9C2A959-80B5-6E47-C5B8-E402C31DF52A}"/>
               </a:ext>
             </a:extLst>
           </p:cNvPr>
-          <p:cNvPicPr>
-            <a:picLocks noChangeAspect="1"/>
-          </p:cNvPicPr>
-          <p:nvPr/>
-        </p:nvPicPr>
-        <p:blipFill>
-          <a:blip r:embed="rId2">
-            <a:alphaModFix amt="20000"/>
-            <a:extLst>
-              <a:ext uri="{28A0092B-C50C-407E-A947-70E740481C1C}">
-                <a14:useLocalDpi xmlns:a14="http://schemas.microsoft.com/office/drawing/2010/main" val="0"/>
-              </a:ext>
-            </a:extLst>
-          </a:blip>
-          <a:stretch>
-            <a:fillRect/>
-          </a:stretch>
-        </p:blipFill>
-        <p:spPr>
-          <a:xfrm>
-            <a:off x="4012070" y="1673061"/>
-            <a:ext cx="4167861" cy="4167861"/>
-          </a:xfrm>
-          <a:prstGeom prst="rect">
-            <a:avLst/>
-          </a:prstGeom>
-        </p:spPr>
-      </p:pic>
+          <p:cNvSpPr>
+            <a:spLocks noGrp="1"/>
+          </p:cNvSpPr>
+          <p:nvPr>
+            <p:ph type="title"/>
+          </p:nvPr>
+        </p:nvSpPr>
+        <p:spPr/>
+        <p:txBody>
+          <a:bodyPr/>
+          <a:lstStyle/>
+          <a:p>
+            <a:r>
+              <a:rPr lang="ko-KR" altLang="en-US" dirty="0"/>
+              <a:t>원자력 발전의 비용 구조</a:t>
+            </a:r>
+          </a:p>
+        </p:txBody>
+      </p:sp>
       <p:sp>
         <p:nvSpPr>
           <p:cNvPr id="4" name="슬라이드 번호 개체 틀 3">
             <a:extLst>
               <a:ext uri="{FF2B5EF4-FFF2-40B4-BE49-F238E27FC236}">
-                <a16:creationId xmlns:a16="http://schemas.microsoft.com/office/drawing/2014/main" id="{E00D8038-5FD2-2DF9-3BF7-B442E350DA05}"/>
+                <a16:creationId xmlns:a16="http://schemas.microsoft.com/office/drawing/2014/main" id="{8B9C1B5C-D621-AD9F-6E2B-9B7A0053383F}"/>
               </a:ext>
             </a:extLst>
           </p:cNvPr>
@@ -11521,7 +14459,7 @@
           <a:p>
             <a:fld id="{109C872D-39A9-4065-8BF3-6A613116E2A1}" type="slidenum">
               <a:rPr lang="ko-KR" altLang="en-US" smtClean="0"/>
-              <a:t>22</a:t>
+              <a:t>29</a:t>
             </a:fld>
             <a:endParaRPr lang="ko-KR" altLang="en-US"/>
           </a:p>
@@ -11529,637 +14467,300 @@
       </p:sp>
       <p:sp>
         <p:nvSpPr>
-          <p:cNvPr id="7" name="제목 1">
+          <p:cNvPr id="3" name="TextBox 2">
             <a:extLst>
               <a:ext uri="{FF2B5EF4-FFF2-40B4-BE49-F238E27FC236}">
-                <a16:creationId xmlns:a16="http://schemas.microsoft.com/office/drawing/2014/main" id="{26215163-A070-ECA0-C85F-AC08302BA574}"/>
+                <a16:creationId xmlns:a16="http://schemas.microsoft.com/office/drawing/2014/main" id="{98AA9E01-C3D3-743D-24AB-E61CA3AF21A2}"/>
               </a:ext>
             </a:extLst>
           </p:cNvPr>
-          <p:cNvSpPr>
-            <a:spLocks noGrp="1"/>
-          </p:cNvSpPr>
-          <p:nvPr>
-            <p:ph type="title"/>
-          </p:nvPr>
+          <p:cNvSpPr txBox="1"/>
+          <p:nvPr/>
         </p:nvSpPr>
         <p:spPr>
           <a:xfrm>
-            <a:off x="831850" y="3765550"/>
-            <a:ext cx="11150600" cy="652818"/>
+            <a:off x="288790" y="958844"/>
+            <a:ext cx="11118453" cy="4846007"/>
           </a:xfrm>
-          <a:effectLst>
-            <a:reflection blurRad="50800" stA="45000" endPos="44000" dir="5400000" sy="-100000" algn="bl" rotWithShape="0"/>
-          </a:effectLst>
+          <a:prstGeom prst="rect">
+            <a:avLst/>
+          </a:prstGeom>
+          <a:noFill/>
         </p:spPr>
         <p:txBody>
-          <a:bodyPr anchor="b"/>
+          <a:bodyPr wrap="square" rtlCol="0" anchor="t">
+            <a:spAutoFit/>
+          </a:bodyPr>
           <a:lstStyle/>
           <a:p>
-            <a:r>
-              <a:rPr lang="en-US" altLang="ko-KR" sz="4000" b="1" i="0" spc="150" dirty="0"/>
-              <a:t>Section 7. </a:t>
-            </a:r>
-            <a:r>
-              <a:rPr lang="ko-KR" altLang="en-US" sz="4000" b="1" i="0" spc="150" dirty="0"/>
-              <a:t>원자력 발전 </a:t>
-            </a:r>
-            <a:r>
-              <a:rPr lang="en-US" altLang="ko-KR" sz="4000" b="1" i="0" spc="150" dirty="0"/>
-              <a:t>(</a:t>
-            </a:r>
-            <a:r>
-              <a:rPr lang="ko-KR" altLang="en-US" sz="4000" b="1" i="0" spc="150" dirty="0"/>
-              <a:t>전력생산</a:t>
-            </a:r>
-            <a:r>
-              <a:rPr lang="en-US" altLang="ko-KR" sz="4000" b="1" i="0" spc="150" dirty="0"/>
-              <a:t>)</a:t>
-            </a:r>
-            <a:endParaRPr lang="ko-KR" altLang="en-US" sz="3600" i="0" spc="150" dirty="0"/>
+            <a:pPr marL="377825" indent="-285750">
+              <a:lnSpc>
+                <a:spcPct val="150000"/>
+              </a:lnSpc>
+              <a:buFont typeface="Arial" panose="020B0604020202020204" pitchFamily="34" charset="0"/>
+              <a:buChar char="•"/>
+            </a:pPr>
+            <a:r>
+              <a:rPr lang="ko-KR" altLang="en-US" sz="1600" dirty="0"/>
+              <a:t>연료비용은 우라늄 채굴</a:t>
+            </a:r>
+            <a:r>
+              <a:rPr lang="en-US" altLang="ko-KR" sz="1600" dirty="0"/>
+              <a:t>,</a:t>
+            </a:r>
+            <a:r>
+              <a:rPr lang="ko-KR" altLang="en-US" sz="1600" dirty="0"/>
+              <a:t> 정련</a:t>
+            </a:r>
+            <a:r>
+              <a:rPr lang="en-US" altLang="ko-KR" sz="1600" dirty="0"/>
+              <a:t>, </a:t>
+            </a:r>
+            <a:r>
+              <a:rPr lang="ko-KR" altLang="en-US" sz="1600" dirty="0"/>
+              <a:t>변환</a:t>
+            </a:r>
+            <a:r>
+              <a:rPr lang="en-US" altLang="ko-KR" sz="1600" dirty="0"/>
+              <a:t>, </a:t>
+            </a:r>
+            <a:r>
+              <a:rPr lang="ko-KR" altLang="en-US" sz="1600" dirty="0"/>
+              <a:t>농축하여 연료 집합체로 가공하는 과정에서 발생한다</a:t>
+            </a:r>
+            <a:r>
+              <a:rPr lang="en-US" altLang="ko-KR" sz="1600" dirty="0"/>
+              <a:t>.</a:t>
+            </a:r>
+          </a:p>
+          <a:p>
+            <a:pPr marL="835025" lvl="1" indent="-285750">
+              <a:lnSpc>
+                <a:spcPct val="150000"/>
+              </a:lnSpc>
+              <a:buFont typeface="Wingdings" panose="05000000000000000000" pitchFamily="2" charset="2"/>
+              <a:buChar char="ü"/>
+            </a:pPr>
+            <a:r>
+              <a:rPr lang="ko-KR" altLang="en-US" sz="1600" dirty="0"/>
+              <a:t>우라늄 가격은 국제시장에서 일정한 변동성을 보이지만</a:t>
+            </a:r>
+            <a:r>
+              <a:rPr lang="en-US" altLang="ko-KR" sz="1600" dirty="0"/>
+              <a:t>, </a:t>
+            </a:r>
+            <a:r>
+              <a:rPr lang="ko-KR" altLang="en-US" sz="1600" dirty="0"/>
+              <a:t>원자력 발전의 특성상 연료비가 전체 발전단가에 미치는 영향은 석탄이나 천연가스보다 작다</a:t>
+            </a:r>
+            <a:r>
+              <a:rPr lang="en-US" altLang="ko-KR" sz="1600" dirty="0"/>
+              <a:t>.</a:t>
+            </a:r>
+          </a:p>
+          <a:p>
+            <a:pPr marL="1292225" lvl="2" indent="-285750">
+              <a:lnSpc>
+                <a:spcPct val="150000"/>
+              </a:lnSpc>
+              <a:buFont typeface="Wingdings" panose="05000000000000000000" pitchFamily="2" charset="2"/>
+              <a:buChar char="Ø"/>
+            </a:pPr>
+            <a:r>
+              <a:rPr lang="ko-KR" altLang="en-US" sz="1600" dirty="0"/>
+              <a:t>연료 교체 주기가 일반적으로 </a:t>
+            </a:r>
+            <a:r>
+              <a:rPr lang="en-US" altLang="ko-KR" sz="1600" dirty="0"/>
+              <a:t>18~24</a:t>
+            </a:r>
+            <a:r>
+              <a:rPr lang="ko-KR" altLang="en-US" sz="1600" dirty="0"/>
+              <a:t>개월로 길고</a:t>
+            </a:r>
+            <a:r>
+              <a:rPr lang="en-US" altLang="ko-KR" sz="1600" dirty="0"/>
+              <a:t>, </a:t>
+            </a:r>
+            <a:r>
+              <a:rPr lang="ko-KR" altLang="en-US" sz="1600" dirty="0"/>
+              <a:t>단위 전력 생산에 필요한 연료량이 적기 때문이다</a:t>
+            </a:r>
+            <a:r>
+              <a:rPr lang="en-US" altLang="ko-KR" sz="1600" dirty="0"/>
+              <a:t>.</a:t>
+            </a:r>
+          </a:p>
+          <a:p>
+            <a:pPr marL="835025" lvl="1" indent="-285750">
+              <a:lnSpc>
+                <a:spcPct val="150000"/>
+              </a:lnSpc>
+              <a:buFont typeface="Wingdings" panose="05000000000000000000" pitchFamily="2" charset="2"/>
+              <a:buChar char="ü"/>
+            </a:pPr>
+            <a:r>
+              <a:rPr lang="ko-KR" altLang="en-US" sz="1600" dirty="0" err="1"/>
+              <a:t>사용후연료의</a:t>
+            </a:r>
+            <a:r>
+              <a:rPr lang="ko-KR" altLang="en-US" sz="1600" dirty="0"/>
+              <a:t> 저장</a:t>
+            </a:r>
+            <a:r>
+              <a:rPr lang="en-US" altLang="ko-KR" sz="1600" dirty="0"/>
+              <a:t>, </a:t>
+            </a:r>
+            <a:r>
+              <a:rPr lang="ko-KR" altLang="en-US" sz="1600" dirty="0"/>
+              <a:t>운송</a:t>
+            </a:r>
+            <a:r>
+              <a:rPr lang="en-US" altLang="ko-KR" sz="1600" dirty="0"/>
+              <a:t>, </a:t>
+            </a:r>
+            <a:r>
+              <a:rPr lang="ko-KR" altLang="en-US" sz="1600" dirty="0"/>
+              <a:t>폐기 등 후속 관리비용도 전체 연료비용의 일부를 구성하고</a:t>
+            </a:r>
+            <a:r>
+              <a:rPr lang="en-US" altLang="ko-KR" sz="1600" dirty="0"/>
+              <a:t>, </a:t>
+            </a:r>
+            <a:r>
+              <a:rPr lang="ko-KR" altLang="en-US" sz="1600" dirty="0"/>
+              <a:t>방사성 물질의 특수한 처리 필요성으로 인해 별도의 안정성과 비용 부담을 요구한다</a:t>
+            </a:r>
+            <a:r>
+              <a:rPr lang="en-US" altLang="ko-KR" sz="1600" dirty="0"/>
+              <a:t>.</a:t>
+            </a:r>
+          </a:p>
+          <a:p>
+            <a:pPr marL="835025" lvl="1" indent="-285750">
+              <a:lnSpc>
+                <a:spcPct val="150000"/>
+              </a:lnSpc>
+              <a:buFont typeface="Wingdings" panose="05000000000000000000" pitchFamily="2" charset="2"/>
+              <a:buChar char="ü"/>
+            </a:pPr>
+            <a:endParaRPr lang="en-US" altLang="ko-KR" sz="1600" dirty="0"/>
+          </a:p>
+          <a:p>
+            <a:pPr marL="377825" indent="-285750">
+              <a:lnSpc>
+                <a:spcPct val="150000"/>
+              </a:lnSpc>
+              <a:buFont typeface="Arial" panose="020B0604020202020204" pitchFamily="34" charset="0"/>
+              <a:buChar char="•"/>
+            </a:pPr>
+            <a:r>
+              <a:rPr lang="ko-KR" altLang="en-US" sz="1600" dirty="0"/>
+              <a:t>폐쇄비용은 원자력 발전소의 운영이 종료된 이후 발생하는 해체 및 사후관리 비용을 의미한다</a:t>
+            </a:r>
+            <a:r>
+              <a:rPr lang="en-US" altLang="ko-KR" sz="1600" dirty="0"/>
+              <a:t>.</a:t>
+            </a:r>
+          </a:p>
+          <a:p>
+            <a:pPr marL="835025" lvl="1" indent="-285750">
+              <a:lnSpc>
+                <a:spcPct val="150000"/>
+              </a:lnSpc>
+              <a:buFont typeface="Wingdings" panose="05000000000000000000" pitchFamily="2" charset="2"/>
+              <a:buChar char="ü"/>
+            </a:pPr>
+            <a:r>
+              <a:rPr lang="ko-KR" altLang="en-US" sz="1600" dirty="0"/>
+              <a:t>방사성 물질의 제거와 처분</a:t>
+            </a:r>
+            <a:r>
+              <a:rPr lang="en-US" altLang="ko-KR" sz="1600" dirty="0"/>
+              <a:t>, </a:t>
+            </a:r>
+            <a:r>
+              <a:rPr lang="ko-KR" altLang="en-US" sz="1600" dirty="0"/>
+              <a:t>발전소 부지의 오염 제거</a:t>
+            </a:r>
+            <a:r>
+              <a:rPr lang="en-US" altLang="ko-KR" sz="1600" dirty="0"/>
+              <a:t>, </a:t>
+            </a:r>
+            <a:r>
+              <a:rPr lang="ko-KR" altLang="en-US" sz="1600" dirty="0"/>
+              <a:t>폐기물의 저장 및 처리를 포함한다</a:t>
+            </a:r>
+            <a:r>
+              <a:rPr lang="en-US" altLang="ko-KR" sz="1600" dirty="0"/>
+              <a:t>.</a:t>
+            </a:r>
+          </a:p>
+          <a:p>
+            <a:pPr marL="892175" lvl="1" indent="-342900">
+              <a:lnSpc>
+                <a:spcPct val="150000"/>
+              </a:lnSpc>
+              <a:buFont typeface="Wingdings" panose="05000000000000000000" pitchFamily="2" charset="2"/>
+              <a:buChar char="ü"/>
+            </a:pPr>
+            <a:r>
+              <a:rPr lang="ko-KR" altLang="en-US" sz="1600" dirty="0"/>
+              <a:t>폐쇄과정은 기술적으로 매우 복잡하고 수십 년에 걸쳐 이루어지므로 비용이 상당하다</a:t>
+            </a:r>
+            <a:r>
+              <a:rPr lang="en-US" altLang="ko-KR" sz="1600" dirty="0"/>
+              <a:t>.</a:t>
+            </a:r>
+          </a:p>
+          <a:p>
+            <a:pPr marL="1349375" lvl="2" indent="-342900">
+              <a:lnSpc>
+                <a:spcPct val="150000"/>
+              </a:lnSpc>
+              <a:buFont typeface="Wingdings" panose="05000000000000000000" pitchFamily="2" charset="2"/>
+              <a:buChar char="Ø"/>
+            </a:pPr>
+            <a:r>
+              <a:rPr lang="ko-KR" altLang="en-US" sz="1600" dirty="0"/>
+              <a:t>폐쇄비용은 초기 자본비용의 약 </a:t>
+            </a:r>
+            <a:r>
+              <a:rPr lang="en-US" altLang="ko-KR" sz="1600" dirty="0"/>
+              <a:t>10~15% </a:t>
+            </a:r>
+            <a:r>
+              <a:rPr lang="ko-KR" altLang="en-US" sz="1600" dirty="0"/>
+              <a:t>수준으로 추정된다</a:t>
+            </a:r>
+            <a:r>
+              <a:rPr lang="en-US" altLang="ko-KR" sz="1600" dirty="0"/>
+              <a:t>.</a:t>
+            </a:r>
+          </a:p>
+          <a:p>
+            <a:pPr marL="892175" lvl="1" indent="-342900">
+              <a:lnSpc>
+                <a:spcPct val="150000"/>
+              </a:lnSpc>
+              <a:buFont typeface="Wingdings" panose="05000000000000000000" pitchFamily="2" charset="2"/>
+              <a:buChar char="ü"/>
+            </a:pPr>
+            <a:r>
+              <a:rPr lang="ko-KR" altLang="en-US" sz="1600" dirty="0"/>
+              <a:t>많은 국가는 이러한 비용을 사전에 확보하고자 발전소가 운영되는 동안 별도의 기금을 적립하는 법적 제도를 마련하고 있다</a:t>
+            </a:r>
+            <a:r>
+              <a:rPr lang="en-US" altLang="ko-KR" sz="1600" dirty="0"/>
+              <a:t>.</a:t>
+            </a:r>
           </a:p>
         </p:txBody>
       </p:sp>
     </p:spTree>
     <p:extLst>
       <p:ext uri="{BB962C8B-B14F-4D97-AF65-F5344CB8AC3E}">
-        <p14:creationId xmlns:p14="http://schemas.microsoft.com/office/powerpoint/2010/main" val="2910631005"/>
-      </p:ext>
-    </p:extLst>
-  </p:cSld>
-  <p:clrMapOvr>
-    <a:masterClrMapping/>
-  </p:clrMapOvr>
-</p:sld>
-</file>
-
-<file path=ppt/slides/slide23.xml><?xml version="1.0" encoding="utf-8"?>
-<p:sld xmlns:a="http://schemas.openxmlformats.org/drawingml/2006/main" xmlns:r="http://schemas.openxmlformats.org/officeDocument/2006/relationships" xmlns:p="http://schemas.openxmlformats.org/presentationml/2006/main">
-  <p:cSld>
-    <p:spTree>
-      <p:nvGrpSpPr>
-        <p:cNvPr id="1" name="">
-          <a:extLst>
-            <a:ext uri="{FF2B5EF4-FFF2-40B4-BE49-F238E27FC236}">
-              <a16:creationId xmlns:a16="http://schemas.microsoft.com/office/drawing/2014/main" id="{1301FFA8-0285-6BC7-89E6-7AEABF1EA891}"/>
-            </a:ext>
-          </a:extLst>
-        </p:cNvPr>
-        <p:cNvGrpSpPr/>
-        <p:nvPr/>
-      </p:nvGrpSpPr>
-      <p:grpSpPr>
-        <a:xfrm>
-          <a:off x="0" y="0"/>
-          <a:ext cx="0" cy="0"/>
-          <a:chOff x="0" y="0"/>
-          <a:chExt cx="0" cy="0"/>
-        </a:xfrm>
-      </p:grpSpPr>
-      <p:pic>
-        <p:nvPicPr>
-          <p:cNvPr id="6" name="그림 5" descr="텍스트, 로고, 원, 폰트이(가) 표시된 사진&#10;&#10;AI 생성 콘텐츠는 정확하지 않을 수 있습니다.">
-            <a:extLst>
-              <a:ext uri="{FF2B5EF4-FFF2-40B4-BE49-F238E27FC236}">
-                <a16:creationId xmlns:a16="http://schemas.microsoft.com/office/drawing/2014/main" id="{3B1722F1-B86F-FA7C-EC2B-E1FF5845D74A}"/>
-              </a:ext>
-            </a:extLst>
-          </p:cNvPr>
-          <p:cNvPicPr>
-            <a:picLocks noChangeAspect="1"/>
-          </p:cNvPicPr>
-          <p:nvPr/>
-        </p:nvPicPr>
-        <p:blipFill>
-          <a:blip r:embed="rId2">
-            <a:alphaModFix amt="20000"/>
-            <a:extLst>
-              <a:ext uri="{28A0092B-C50C-407E-A947-70E740481C1C}">
-                <a14:useLocalDpi xmlns:a14="http://schemas.microsoft.com/office/drawing/2010/main" val="0"/>
-              </a:ext>
-            </a:extLst>
-          </a:blip>
-          <a:stretch>
-            <a:fillRect/>
-          </a:stretch>
-        </p:blipFill>
-        <p:spPr>
-          <a:xfrm>
-            <a:off x="4012070" y="1673061"/>
-            <a:ext cx="4167861" cy="4167861"/>
-          </a:xfrm>
-          <a:prstGeom prst="rect">
-            <a:avLst/>
-          </a:prstGeom>
-        </p:spPr>
-      </p:pic>
-      <p:sp>
-        <p:nvSpPr>
-          <p:cNvPr id="4" name="슬라이드 번호 개체 틀 3">
-            <a:extLst>
-              <a:ext uri="{FF2B5EF4-FFF2-40B4-BE49-F238E27FC236}">
-                <a16:creationId xmlns:a16="http://schemas.microsoft.com/office/drawing/2014/main" id="{0EBCBED2-506E-28C2-8531-29CAC4992DB4}"/>
-              </a:ext>
-            </a:extLst>
-          </p:cNvPr>
-          <p:cNvSpPr>
-            <a:spLocks noGrp="1"/>
-          </p:cNvSpPr>
-          <p:nvPr>
-            <p:ph type="sldNum" sz="quarter" idx="12"/>
-          </p:nvPr>
-        </p:nvSpPr>
-        <p:spPr/>
-        <p:txBody>
-          <a:bodyPr/>
-          <a:lstStyle/>
-          <a:p>
-            <a:fld id="{109C872D-39A9-4065-8BF3-6A613116E2A1}" type="slidenum">
-              <a:rPr lang="ko-KR" altLang="en-US" smtClean="0"/>
-              <a:t>23</a:t>
-            </a:fld>
-            <a:endParaRPr lang="ko-KR" altLang="en-US"/>
-          </a:p>
-        </p:txBody>
-      </p:sp>
-      <p:sp>
-        <p:nvSpPr>
-          <p:cNvPr id="7" name="제목 1">
-            <a:extLst>
-              <a:ext uri="{FF2B5EF4-FFF2-40B4-BE49-F238E27FC236}">
-                <a16:creationId xmlns:a16="http://schemas.microsoft.com/office/drawing/2014/main" id="{8849E738-E699-EDAC-1856-3167C36F5CDB}"/>
-              </a:ext>
-            </a:extLst>
-          </p:cNvPr>
-          <p:cNvSpPr>
-            <a:spLocks noGrp="1"/>
-          </p:cNvSpPr>
-          <p:nvPr>
-            <p:ph type="title"/>
-          </p:nvPr>
-        </p:nvSpPr>
-        <p:spPr>
-          <a:xfrm>
-            <a:off x="831850" y="3765550"/>
-            <a:ext cx="11150600" cy="652818"/>
-          </a:xfrm>
-          <a:effectLst>
-            <a:reflection blurRad="50800" stA="45000" endPos="44000" dir="5400000" sy="-100000" algn="bl" rotWithShape="0"/>
-          </a:effectLst>
-        </p:spPr>
-        <p:txBody>
-          <a:bodyPr anchor="b"/>
-          <a:lstStyle/>
-          <a:p>
-            <a:r>
-              <a:rPr lang="en-US" altLang="ko-KR" sz="4000" b="1" i="0" spc="150" dirty="0"/>
-              <a:t>Section 8. </a:t>
-            </a:r>
-            <a:r>
-              <a:rPr lang="ko-KR" altLang="en-US" sz="4000" b="1" i="0" spc="150" dirty="0"/>
-              <a:t>원자력의 미래</a:t>
-            </a:r>
-            <a:endParaRPr lang="ko-KR" altLang="en-US" sz="3600" i="0" spc="150" dirty="0"/>
-          </a:p>
-        </p:txBody>
-      </p:sp>
-    </p:spTree>
-    <p:extLst>
-      <p:ext uri="{BB962C8B-B14F-4D97-AF65-F5344CB8AC3E}">
-        <p14:creationId xmlns:p14="http://schemas.microsoft.com/office/powerpoint/2010/main" val="3950787581"/>
-      </p:ext>
-    </p:extLst>
-  </p:cSld>
-  <p:clrMapOvr>
-    <a:masterClrMapping/>
-  </p:clrMapOvr>
-</p:sld>
-</file>
-
-<file path=ppt/slides/slide24.xml><?xml version="1.0" encoding="utf-8"?>
-<p:sld xmlns:a="http://schemas.openxmlformats.org/drawingml/2006/main" xmlns:r="http://schemas.openxmlformats.org/officeDocument/2006/relationships" xmlns:p="http://schemas.openxmlformats.org/presentationml/2006/main">
-  <p:cSld>
-    <p:spTree>
-      <p:nvGrpSpPr>
-        <p:cNvPr id="1" name="">
-          <a:extLst>
-            <a:ext uri="{FF2B5EF4-FFF2-40B4-BE49-F238E27FC236}">
-              <a16:creationId xmlns:a16="http://schemas.microsoft.com/office/drawing/2014/main" id="{25B0A312-6E61-EA12-FA9E-05F90F904755}"/>
-            </a:ext>
-          </a:extLst>
-        </p:cNvPr>
-        <p:cNvGrpSpPr/>
-        <p:nvPr/>
-      </p:nvGrpSpPr>
-      <p:grpSpPr>
-        <a:xfrm>
-          <a:off x="0" y="0"/>
-          <a:ext cx="0" cy="0"/>
-          <a:chOff x="0" y="0"/>
-          <a:chExt cx="0" cy="0"/>
-        </a:xfrm>
-      </p:grpSpPr>
-      <p:pic>
-        <p:nvPicPr>
-          <p:cNvPr id="6" name="그림 5" descr="텍스트, 로고, 원, 폰트이(가) 표시된 사진&#10;&#10;AI 생성 콘텐츠는 정확하지 않을 수 있습니다.">
-            <a:extLst>
-              <a:ext uri="{FF2B5EF4-FFF2-40B4-BE49-F238E27FC236}">
-                <a16:creationId xmlns:a16="http://schemas.microsoft.com/office/drawing/2014/main" id="{6D4F7032-AE86-C757-2F08-D6FE53572459}"/>
-              </a:ext>
-            </a:extLst>
-          </p:cNvPr>
-          <p:cNvPicPr>
-            <a:picLocks noChangeAspect="1"/>
-          </p:cNvPicPr>
-          <p:nvPr/>
-        </p:nvPicPr>
-        <p:blipFill>
-          <a:blip r:embed="rId2">
-            <a:alphaModFix amt="20000"/>
-            <a:extLst>
-              <a:ext uri="{28A0092B-C50C-407E-A947-70E740481C1C}">
-                <a14:useLocalDpi xmlns:a14="http://schemas.microsoft.com/office/drawing/2010/main" val="0"/>
-              </a:ext>
-            </a:extLst>
-          </a:blip>
-          <a:stretch>
-            <a:fillRect/>
-          </a:stretch>
-        </p:blipFill>
-        <p:spPr>
-          <a:xfrm>
-            <a:off x="4012070" y="1673061"/>
-            <a:ext cx="4167861" cy="4167861"/>
-          </a:xfrm>
-          <a:prstGeom prst="rect">
-            <a:avLst/>
-          </a:prstGeom>
-        </p:spPr>
-      </p:pic>
-      <p:sp>
-        <p:nvSpPr>
-          <p:cNvPr id="4" name="슬라이드 번호 개체 틀 3">
-            <a:extLst>
-              <a:ext uri="{FF2B5EF4-FFF2-40B4-BE49-F238E27FC236}">
-                <a16:creationId xmlns:a16="http://schemas.microsoft.com/office/drawing/2014/main" id="{2437DA62-1EF3-92DE-C66C-CAD286405FFD}"/>
-              </a:ext>
-            </a:extLst>
-          </p:cNvPr>
-          <p:cNvSpPr>
-            <a:spLocks noGrp="1"/>
-          </p:cNvSpPr>
-          <p:nvPr>
-            <p:ph type="sldNum" sz="quarter" idx="12"/>
-          </p:nvPr>
-        </p:nvSpPr>
-        <p:spPr/>
-        <p:txBody>
-          <a:bodyPr/>
-          <a:lstStyle/>
-          <a:p>
-            <a:fld id="{109C872D-39A9-4065-8BF3-6A613116E2A1}" type="slidenum">
-              <a:rPr lang="ko-KR" altLang="en-US" smtClean="0"/>
-              <a:t>24</a:t>
-            </a:fld>
-            <a:endParaRPr lang="ko-KR" altLang="en-US"/>
-          </a:p>
-        </p:txBody>
-      </p:sp>
-      <p:sp>
-        <p:nvSpPr>
-          <p:cNvPr id="7" name="제목 1">
-            <a:extLst>
-              <a:ext uri="{FF2B5EF4-FFF2-40B4-BE49-F238E27FC236}">
-                <a16:creationId xmlns:a16="http://schemas.microsoft.com/office/drawing/2014/main" id="{661C3653-E745-8894-9B1A-1F4A509C94B2}"/>
-              </a:ext>
-            </a:extLst>
-          </p:cNvPr>
-          <p:cNvSpPr>
-            <a:spLocks noGrp="1"/>
-          </p:cNvSpPr>
-          <p:nvPr>
-            <p:ph type="title"/>
-          </p:nvPr>
-        </p:nvSpPr>
-        <p:spPr>
-          <a:xfrm>
-            <a:off x="831850" y="3765550"/>
-            <a:ext cx="11150600" cy="652818"/>
-          </a:xfrm>
-          <a:effectLst>
-            <a:reflection blurRad="50800" stA="45000" endPos="44000" dir="5400000" sy="-100000" algn="bl" rotWithShape="0"/>
-          </a:effectLst>
-        </p:spPr>
-        <p:txBody>
-          <a:bodyPr anchor="b"/>
-          <a:lstStyle/>
-          <a:p>
-            <a:r>
-              <a:rPr lang="en-US" altLang="ko-KR" sz="4000" b="1" i="0" spc="150" dirty="0"/>
-              <a:t>Section 9. </a:t>
-            </a:r>
-            <a:r>
-              <a:rPr lang="ko-KR" altLang="en-US" sz="4000" b="1" i="0" spc="150" dirty="0"/>
-              <a:t>에너지 전환과 원자력에너지</a:t>
-            </a:r>
-            <a:endParaRPr lang="ko-KR" altLang="en-US" sz="3600" i="0" spc="150" dirty="0"/>
-          </a:p>
-        </p:txBody>
-      </p:sp>
-    </p:spTree>
-    <p:extLst>
-      <p:ext uri="{BB962C8B-B14F-4D97-AF65-F5344CB8AC3E}">
-        <p14:creationId xmlns:p14="http://schemas.microsoft.com/office/powerpoint/2010/main" val="2672362044"/>
-      </p:ext>
-    </p:extLst>
-  </p:cSld>
-  <p:clrMapOvr>
-    <a:masterClrMapping/>
-  </p:clrMapOvr>
-</p:sld>
-</file>
-
-<file path=ppt/slides/slide25.xml><?xml version="1.0" encoding="utf-8"?>
-<p:sld xmlns:a="http://schemas.openxmlformats.org/drawingml/2006/main" xmlns:r="http://schemas.openxmlformats.org/officeDocument/2006/relationships" xmlns:p="http://schemas.openxmlformats.org/presentationml/2006/main">
-  <p:cSld>
-    <p:spTree>
-      <p:nvGrpSpPr>
-        <p:cNvPr id="1" name="">
-          <a:extLst>
-            <a:ext uri="{FF2B5EF4-FFF2-40B4-BE49-F238E27FC236}">
-              <a16:creationId xmlns:a16="http://schemas.microsoft.com/office/drawing/2014/main" id="{870B78F4-EF2F-3A3C-FC71-E2ECA8C9EC54}"/>
-            </a:ext>
-          </a:extLst>
-        </p:cNvPr>
-        <p:cNvGrpSpPr/>
-        <p:nvPr/>
-      </p:nvGrpSpPr>
-      <p:grpSpPr>
-        <a:xfrm>
-          <a:off x="0" y="0"/>
-          <a:ext cx="0" cy="0"/>
-          <a:chOff x="0" y="0"/>
-          <a:chExt cx="0" cy="0"/>
-        </a:xfrm>
-      </p:grpSpPr>
-      <p:pic>
-        <p:nvPicPr>
-          <p:cNvPr id="6" name="그림 5" descr="텍스트, 로고, 원, 폰트이(가) 표시된 사진&#10;&#10;AI 생성 콘텐츠는 정확하지 않을 수 있습니다.">
-            <a:extLst>
-              <a:ext uri="{FF2B5EF4-FFF2-40B4-BE49-F238E27FC236}">
-                <a16:creationId xmlns:a16="http://schemas.microsoft.com/office/drawing/2014/main" id="{FE221901-C69A-31AB-3499-23B88F63206E}"/>
-              </a:ext>
-            </a:extLst>
-          </p:cNvPr>
-          <p:cNvPicPr>
-            <a:picLocks noChangeAspect="1"/>
-          </p:cNvPicPr>
-          <p:nvPr/>
-        </p:nvPicPr>
-        <p:blipFill>
-          <a:blip r:embed="rId2">
-            <a:alphaModFix amt="20000"/>
-            <a:extLst>
-              <a:ext uri="{28A0092B-C50C-407E-A947-70E740481C1C}">
-                <a14:useLocalDpi xmlns:a14="http://schemas.microsoft.com/office/drawing/2010/main" val="0"/>
-              </a:ext>
-            </a:extLst>
-          </a:blip>
-          <a:stretch>
-            <a:fillRect/>
-          </a:stretch>
-        </p:blipFill>
-        <p:spPr>
-          <a:xfrm>
-            <a:off x="4012070" y="1673061"/>
-            <a:ext cx="4167861" cy="4167861"/>
-          </a:xfrm>
-          <a:prstGeom prst="rect">
-            <a:avLst/>
-          </a:prstGeom>
-        </p:spPr>
-      </p:pic>
-      <p:sp>
-        <p:nvSpPr>
-          <p:cNvPr id="4" name="슬라이드 번호 개체 틀 3">
-            <a:extLst>
-              <a:ext uri="{FF2B5EF4-FFF2-40B4-BE49-F238E27FC236}">
-                <a16:creationId xmlns:a16="http://schemas.microsoft.com/office/drawing/2014/main" id="{351D5D2A-2645-89E2-6514-E7C50A917F43}"/>
-              </a:ext>
-            </a:extLst>
-          </p:cNvPr>
-          <p:cNvSpPr>
-            <a:spLocks noGrp="1"/>
-          </p:cNvSpPr>
-          <p:nvPr>
-            <p:ph type="sldNum" sz="quarter" idx="12"/>
-          </p:nvPr>
-        </p:nvSpPr>
-        <p:spPr/>
-        <p:txBody>
-          <a:bodyPr/>
-          <a:lstStyle/>
-          <a:p>
-            <a:fld id="{109C872D-39A9-4065-8BF3-6A613116E2A1}" type="slidenum">
-              <a:rPr lang="ko-KR" altLang="en-US" smtClean="0"/>
-              <a:t>25</a:t>
-            </a:fld>
-            <a:endParaRPr lang="ko-KR" altLang="en-US"/>
-          </a:p>
-        </p:txBody>
-      </p:sp>
-      <p:sp>
-        <p:nvSpPr>
-          <p:cNvPr id="7" name="제목 1">
-            <a:extLst>
-              <a:ext uri="{FF2B5EF4-FFF2-40B4-BE49-F238E27FC236}">
-                <a16:creationId xmlns:a16="http://schemas.microsoft.com/office/drawing/2014/main" id="{A879F139-7E79-E9A6-8460-10AA4133D0AF}"/>
-              </a:ext>
-            </a:extLst>
-          </p:cNvPr>
-          <p:cNvSpPr>
-            <a:spLocks noGrp="1"/>
-          </p:cNvSpPr>
-          <p:nvPr>
-            <p:ph type="title"/>
-          </p:nvPr>
-        </p:nvSpPr>
-        <p:spPr>
-          <a:xfrm>
-            <a:off x="831850" y="3765550"/>
-            <a:ext cx="11150600" cy="652818"/>
-          </a:xfrm>
-          <a:effectLst>
-            <a:reflection blurRad="50800" stA="45000" endPos="44000" dir="5400000" sy="-100000" algn="bl" rotWithShape="0"/>
-          </a:effectLst>
-        </p:spPr>
-        <p:txBody>
-          <a:bodyPr anchor="b"/>
-          <a:lstStyle/>
-          <a:p>
-            <a:r>
-              <a:rPr lang="en-US" altLang="ko-KR" sz="4000" b="1" i="0" spc="150" dirty="0"/>
-              <a:t>Section 10. </a:t>
-            </a:r>
-            <a:r>
-              <a:rPr lang="ko-KR" altLang="en-US" sz="4000" b="1" i="0" spc="150" dirty="0"/>
-              <a:t>원자력의 미래전략</a:t>
-            </a:r>
-            <a:endParaRPr lang="ko-KR" altLang="en-US" sz="3600" i="0" spc="150" dirty="0"/>
-          </a:p>
-        </p:txBody>
-      </p:sp>
-    </p:spTree>
-    <p:extLst>
-      <p:ext uri="{BB962C8B-B14F-4D97-AF65-F5344CB8AC3E}">
-        <p14:creationId xmlns:p14="http://schemas.microsoft.com/office/powerpoint/2010/main" val="1753895778"/>
-      </p:ext>
-    </p:extLst>
-  </p:cSld>
-  <p:clrMapOvr>
-    <a:masterClrMapping/>
-  </p:clrMapOvr>
-</p:sld>
-</file>
-
-<file path=ppt/slides/slide26.xml><?xml version="1.0" encoding="utf-8"?>
-<p:sld xmlns:a="http://schemas.openxmlformats.org/drawingml/2006/main" xmlns:r="http://schemas.openxmlformats.org/officeDocument/2006/relationships" xmlns:p="http://schemas.openxmlformats.org/presentationml/2006/main">
-  <p:cSld>
-    <p:spTree>
-      <p:nvGrpSpPr>
-        <p:cNvPr id="1" name="">
-          <a:extLst>
-            <a:ext uri="{FF2B5EF4-FFF2-40B4-BE49-F238E27FC236}">
-              <a16:creationId xmlns:a16="http://schemas.microsoft.com/office/drawing/2014/main" id="{2221EDDE-B308-8FA7-8116-DAD482D863C8}"/>
-            </a:ext>
-          </a:extLst>
-        </p:cNvPr>
-        <p:cNvGrpSpPr/>
-        <p:nvPr/>
-      </p:nvGrpSpPr>
-      <p:grpSpPr>
-        <a:xfrm>
-          <a:off x="0" y="0"/>
-          <a:ext cx="0" cy="0"/>
-          <a:chOff x="0" y="0"/>
-          <a:chExt cx="0" cy="0"/>
-        </a:xfrm>
-      </p:grpSpPr>
-      <p:pic>
-        <p:nvPicPr>
-          <p:cNvPr id="3" name="그림 2" descr="텍스트, 로고, 원, 폰트이(가) 표시된 사진&#10;&#10;AI 생성 콘텐츠는 정확하지 않을 수 있습니다.">
-            <a:extLst>
-              <a:ext uri="{FF2B5EF4-FFF2-40B4-BE49-F238E27FC236}">
-                <a16:creationId xmlns:a16="http://schemas.microsoft.com/office/drawing/2014/main" id="{396FF0BD-25A1-7840-4B63-B2ECDF7CFA54}"/>
-              </a:ext>
-            </a:extLst>
-          </p:cNvPr>
-          <p:cNvPicPr>
-            <a:picLocks noChangeAspect="1"/>
-          </p:cNvPicPr>
-          <p:nvPr/>
-        </p:nvPicPr>
-        <p:blipFill>
-          <a:blip r:embed="rId2">
-            <a:alphaModFix amt="20000"/>
-            <a:extLst>
-              <a:ext uri="{28A0092B-C50C-407E-A947-70E740481C1C}">
-                <a14:useLocalDpi xmlns:a14="http://schemas.microsoft.com/office/drawing/2010/main" val="0"/>
-              </a:ext>
-            </a:extLst>
-          </a:blip>
-          <a:stretch>
-            <a:fillRect/>
-          </a:stretch>
-        </p:blipFill>
-        <p:spPr>
-          <a:xfrm>
-            <a:off x="4012070" y="1673061"/>
-            <a:ext cx="4167861" cy="4167861"/>
-          </a:xfrm>
-          <a:prstGeom prst="rect">
-            <a:avLst/>
-          </a:prstGeom>
-        </p:spPr>
-      </p:pic>
-      <p:sp>
-        <p:nvSpPr>
-          <p:cNvPr id="2" name="제목 1">
-            <a:extLst>
-              <a:ext uri="{FF2B5EF4-FFF2-40B4-BE49-F238E27FC236}">
-                <a16:creationId xmlns:a16="http://schemas.microsoft.com/office/drawing/2014/main" id="{CA03F291-495C-4A31-DF0A-8F9CC97672B8}"/>
-              </a:ext>
-            </a:extLst>
-          </p:cNvPr>
-          <p:cNvSpPr>
-            <a:spLocks noGrp="1"/>
-          </p:cNvSpPr>
-          <p:nvPr>
-            <p:ph type="title"/>
-          </p:nvPr>
-        </p:nvSpPr>
-        <p:spPr>
-          <a:xfrm>
-            <a:off x="831850" y="1709739"/>
-            <a:ext cx="10515600" cy="2134292"/>
-          </a:xfrm>
-          <a:effectLst>
-            <a:reflection blurRad="50800" stA="45000" endPos="44000" dir="5400000" sy="-100000" algn="bl" rotWithShape="0"/>
-          </a:effectLst>
-        </p:spPr>
-        <p:txBody>
-          <a:bodyPr/>
-          <a:lstStyle/>
-          <a:p>
-            <a:r>
-              <a:rPr lang="en-US" altLang="ko-KR" b="1" i="0" spc="150">
-                <a:solidFill>
-                  <a:schemeClr val="accent2"/>
-                </a:solidFill>
-              </a:rPr>
-              <a:t>T</a:t>
-            </a:r>
-            <a:r>
-              <a:rPr lang="en-US" altLang="ko-KR" sz="5400" i="0" spc="100"/>
-              <a:t>hank you</a:t>
-            </a:r>
-            <a:endParaRPr lang="ko-KR" altLang="en-US" sz="5400" i="0" spc="100"/>
-          </a:p>
-        </p:txBody>
-      </p:sp>
-      <p:sp>
-        <p:nvSpPr>
-          <p:cNvPr id="4" name="슬라이드 번호 개체 틀 3">
-            <a:extLst>
-              <a:ext uri="{FF2B5EF4-FFF2-40B4-BE49-F238E27FC236}">
-                <a16:creationId xmlns:a16="http://schemas.microsoft.com/office/drawing/2014/main" id="{6EFC0B50-C677-27B7-56F6-14F7BF9A70A9}"/>
-              </a:ext>
-            </a:extLst>
-          </p:cNvPr>
-          <p:cNvSpPr>
-            <a:spLocks noGrp="1"/>
-          </p:cNvSpPr>
-          <p:nvPr>
-            <p:ph type="sldNum" sz="quarter" idx="12"/>
-          </p:nvPr>
-        </p:nvSpPr>
-        <p:spPr/>
-        <p:txBody>
-          <a:bodyPr/>
-          <a:lstStyle/>
-          <a:p>
-            <a:fld id="{109C872D-39A9-4065-8BF3-6A613116E2A1}" type="slidenum">
-              <a:rPr lang="ko-KR" altLang="en-US" smtClean="0"/>
-              <a:t>26</a:t>
-            </a:fld>
-            <a:endParaRPr lang="ko-KR" altLang="en-US"/>
-          </a:p>
-        </p:txBody>
-      </p:sp>
-    </p:spTree>
-    <p:extLst>
-      <p:ext uri="{BB962C8B-B14F-4D97-AF65-F5344CB8AC3E}">
-        <p14:creationId xmlns:p14="http://schemas.microsoft.com/office/powerpoint/2010/main" val="103939182"/>
+        <p14:creationId xmlns:p14="http://schemas.microsoft.com/office/powerpoint/2010/main" val="2126359467"/>
       </p:ext>
     </p:extLst>
   </p:cSld>
@@ -12303,6 +14904,1417 @@
     <p:extLst>
       <p:ext uri="{BB962C8B-B14F-4D97-AF65-F5344CB8AC3E}">
         <p14:creationId xmlns:p14="http://schemas.microsoft.com/office/powerpoint/2010/main" val="2957073077"/>
+      </p:ext>
+    </p:extLst>
+  </p:cSld>
+  <p:clrMapOvr>
+    <a:masterClrMapping/>
+  </p:clrMapOvr>
+</p:sld>
+</file>
+
+<file path=ppt/slides/slide30.xml><?xml version="1.0" encoding="utf-8"?>
+<p:sld xmlns:a="http://schemas.openxmlformats.org/drawingml/2006/main" xmlns:r="http://schemas.openxmlformats.org/officeDocument/2006/relationships" xmlns:p="http://schemas.openxmlformats.org/presentationml/2006/main">
+  <p:cSld>
+    <p:spTree>
+      <p:nvGrpSpPr>
+        <p:cNvPr id="1" name="">
+          <a:extLst>
+            <a:ext uri="{FF2B5EF4-FFF2-40B4-BE49-F238E27FC236}">
+              <a16:creationId xmlns:a16="http://schemas.microsoft.com/office/drawing/2014/main" id="{CA42FE39-3D80-666C-B15C-BE8816B78889}"/>
+            </a:ext>
+          </a:extLst>
+        </p:cNvPr>
+        <p:cNvGrpSpPr/>
+        <p:nvPr/>
+      </p:nvGrpSpPr>
+      <p:grpSpPr>
+        <a:xfrm>
+          <a:off x="0" y="0"/>
+          <a:ext cx="0" cy="0"/>
+          <a:chOff x="0" y="0"/>
+          <a:chExt cx="0" cy="0"/>
+        </a:xfrm>
+      </p:grpSpPr>
+      <p:sp>
+        <p:nvSpPr>
+          <p:cNvPr id="2" name="제목 1">
+            <a:extLst>
+              <a:ext uri="{FF2B5EF4-FFF2-40B4-BE49-F238E27FC236}">
+                <a16:creationId xmlns:a16="http://schemas.microsoft.com/office/drawing/2014/main" id="{BC54CDC0-39E4-9DC0-AB42-07A2E1414B36}"/>
+              </a:ext>
+            </a:extLst>
+          </p:cNvPr>
+          <p:cNvSpPr>
+            <a:spLocks noGrp="1"/>
+          </p:cNvSpPr>
+          <p:nvPr>
+            <p:ph type="title"/>
+          </p:nvPr>
+        </p:nvSpPr>
+        <p:spPr/>
+        <p:txBody>
+          <a:bodyPr/>
+          <a:lstStyle/>
+          <a:p>
+            <a:r>
+              <a:rPr lang="ko-KR" altLang="en-US" dirty="0"/>
+              <a:t>원자력 발전의 비용 구조</a:t>
+            </a:r>
+          </a:p>
+        </p:txBody>
+      </p:sp>
+      <p:sp>
+        <p:nvSpPr>
+          <p:cNvPr id="4" name="슬라이드 번호 개체 틀 3">
+            <a:extLst>
+              <a:ext uri="{FF2B5EF4-FFF2-40B4-BE49-F238E27FC236}">
+                <a16:creationId xmlns:a16="http://schemas.microsoft.com/office/drawing/2014/main" id="{39B9B4AE-51DF-B1F9-7F16-DC931F6D5BB3}"/>
+              </a:ext>
+            </a:extLst>
+          </p:cNvPr>
+          <p:cNvSpPr>
+            <a:spLocks noGrp="1"/>
+          </p:cNvSpPr>
+          <p:nvPr>
+            <p:ph type="sldNum" sz="quarter" idx="12"/>
+          </p:nvPr>
+        </p:nvSpPr>
+        <p:spPr/>
+        <p:txBody>
+          <a:bodyPr/>
+          <a:lstStyle/>
+          <a:p>
+            <a:fld id="{109C872D-39A9-4065-8BF3-6A613116E2A1}" type="slidenum">
+              <a:rPr lang="ko-KR" altLang="en-US" smtClean="0"/>
+              <a:t>30</a:t>
+            </a:fld>
+            <a:endParaRPr lang="ko-KR" altLang="en-US"/>
+          </a:p>
+        </p:txBody>
+      </p:sp>
+      <p:sp>
+        <p:nvSpPr>
+          <p:cNvPr id="3" name="TextBox 2">
+            <a:extLst>
+              <a:ext uri="{FF2B5EF4-FFF2-40B4-BE49-F238E27FC236}">
+                <a16:creationId xmlns:a16="http://schemas.microsoft.com/office/drawing/2014/main" id="{0FE232BE-7C5B-C65D-8D1D-90AF56F97596}"/>
+              </a:ext>
+            </a:extLst>
+          </p:cNvPr>
+          <p:cNvSpPr txBox="1"/>
+          <p:nvPr/>
+        </p:nvSpPr>
+        <p:spPr>
+          <a:xfrm>
+            <a:off x="288790" y="958844"/>
+            <a:ext cx="11118453" cy="5584670"/>
+          </a:xfrm>
+          <a:prstGeom prst="rect">
+            <a:avLst/>
+          </a:prstGeom>
+          <a:noFill/>
+        </p:spPr>
+        <p:txBody>
+          <a:bodyPr wrap="square" rtlCol="0" anchor="t">
+            <a:spAutoFit/>
+          </a:bodyPr>
+          <a:lstStyle/>
+          <a:p>
+            <a:pPr marL="377825" indent="-285750">
+              <a:lnSpc>
+                <a:spcPct val="150000"/>
+              </a:lnSpc>
+              <a:buFont typeface="Arial" panose="020B0604020202020204" pitchFamily="34" charset="0"/>
+              <a:buChar char="•"/>
+            </a:pPr>
+            <a:r>
+              <a:rPr lang="ko-KR" altLang="en-US" sz="1600" dirty="0"/>
+              <a:t>원자력 발전의 중요한 장점 중 하나는 발전 과정에서 이산화탄소 배출이 거의 없기 때문에</a:t>
+            </a:r>
+            <a:r>
+              <a:rPr lang="en-US" altLang="ko-KR" sz="1600" dirty="0"/>
+              <a:t>, </a:t>
+            </a:r>
+            <a:r>
+              <a:rPr lang="ko-KR" altLang="en-US" sz="1600" dirty="0"/>
+              <a:t>탄소중립 목표 달성에 기여할 수 있다</a:t>
+            </a:r>
+            <a:r>
+              <a:rPr lang="en-US" altLang="ko-KR" sz="1600" dirty="0"/>
+              <a:t>.</a:t>
+            </a:r>
+          </a:p>
+          <a:p>
+            <a:pPr marL="377825" indent="-285750">
+              <a:lnSpc>
+                <a:spcPct val="150000"/>
+              </a:lnSpc>
+              <a:buFont typeface="Arial" panose="020B0604020202020204" pitchFamily="34" charset="0"/>
+              <a:buChar char="•"/>
+            </a:pPr>
+            <a:r>
+              <a:rPr lang="ko-KR" altLang="en-US" sz="1600" dirty="0"/>
+              <a:t>그러나 원자력 발전은 방사성 폐기물의 장기적인 관리 문제와 원전 사고의 잠재적 위험이라는 중대한 외부비용을 동반한다</a:t>
+            </a:r>
+            <a:r>
+              <a:rPr lang="en-US" altLang="ko-KR" sz="1600" dirty="0"/>
+              <a:t>.</a:t>
+            </a:r>
+          </a:p>
+          <a:p>
+            <a:pPr marL="835025" lvl="1" indent="-285750">
+              <a:lnSpc>
+                <a:spcPct val="150000"/>
+              </a:lnSpc>
+              <a:buFont typeface="Wingdings" panose="05000000000000000000" pitchFamily="2" charset="2"/>
+              <a:buChar char="ü"/>
+            </a:pPr>
+            <a:r>
+              <a:rPr lang="ko-KR" altLang="en-US" sz="1600" dirty="0"/>
+              <a:t>후쿠시마</a:t>
+            </a:r>
+            <a:r>
+              <a:rPr lang="en-US" altLang="ko-KR" sz="1600" dirty="0"/>
+              <a:t>, </a:t>
+            </a:r>
+            <a:r>
+              <a:rPr lang="ko-KR" altLang="en-US" sz="1600" dirty="0"/>
+              <a:t>체르노빌 사례에서 보듯이</a:t>
+            </a:r>
+            <a:r>
+              <a:rPr lang="en-US" altLang="ko-KR" sz="1600" dirty="0"/>
+              <a:t>, </a:t>
+            </a:r>
+            <a:r>
+              <a:rPr lang="ko-KR" altLang="en-US" sz="1600" dirty="0"/>
+              <a:t>사고 발생시 사회</a:t>
+            </a:r>
+            <a:r>
+              <a:rPr lang="en-US" altLang="ko-KR" sz="1600" dirty="0"/>
+              <a:t>·</a:t>
+            </a:r>
+            <a:r>
+              <a:rPr lang="ko-KR" altLang="en-US" sz="1600" dirty="0"/>
+              <a:t>환경</a:t>
+            </a:r>
+            <a:r>
+              <a:rPr lang="en-US" altLang="ko-KR" sz="1600" dirty="0"/>
+              <a:t>·</a:t>
+            </a:r>
+            <a:r>
+              <a:rPr lang="ko-KR" altLang="en-US" sz="1600" dirty="0"/>
+              <a:t>경제적 피해는 수십 년 이상 장기화 될 수 있다</a:t>
+            </a:r>
+            <a:r>
+              <a:rPr lang="en-US" altLang="ko-KR" sz="1600" dirty="0"/>
+              <a:t>.</a:t>
+            </a:r>
+          </a:p>
+          <a:p>
+            <a:pPr marL="377825" indent="-285750">
+              <a:lnSpc>
+                <a:spcPct val="150000"/>
+              </a:lnSpc>
+              <a:buFont typeface="Arial" panose="020B0604020202020204" pitchFamily="34" charset="0"/>
+              <a:buChar char="•"/>
+            </a:pPr>
+            <a:r>
+              <a:rPr lang="ko-KR" altLang="en-US" sz="1600" dirty="0"/>
+              <a:t>이와 유사하게 태양광</a:t>
+            </a:r>
+            <a:r>
+              <a:rPr lang="en-US" altLang="ko-KR" sz="1600" dirty="0"/>
+              <a:t>·</a:t>
+            </a:r>
+            <a:r>
+              <a:rPr lang="ko-KR" altLang="en-US" sz="1600" dirty="0"/>
+              <a:t>풍력 같은 재생에너지원도 전력 생산 과정에서 탄소 배출이 매우 낮고</a:t>
+            </a:r>
+            <a:r>
+              <a:rPr lang="en-US" altLang="ko-KR" sz="1600" dirty="0"/>
+              <a:t>, </a:t>
+            </a:r>
+            <a:r>
+              <a:rPr lang="ko-KR" altLang="en-US" sz="1600" dirty="0"/>
+              <a:t>장기적인 유해 폐기물을 거의 발생시키지 않는다는 점에서 환경적으로 우수한 에너지원으로 평가된다</a:t>
+            </a:r>
+            <a:r>
+              <a:rPr lang="en-US" altLang="ko-KR" sz="1600" dirty="0"/>
+              <a:t>.</a:t>
+            </a:r>
+          </a:p>
+          <a:p>
+            <a:pPr marL="835025" lvl="1" indent="-285750">
+              <a:lnSpc>
+                <a:spcPct val="150000"/>
+              </a:lnSpc>
+              <a:buFont typeface="Wingdings" panose="05000000000000000000" pitchFamily="2" charset="2"/>
+              <a:buChar char="ü"/>
+            </a:pPr>
+            <a:r>
+              <a:rPr lang="ko-KR" altLang="en-US" sz="1600" dirty="0"/>
+              <a:t>그러나 이들 에너지원은 일사량이나 풍속 등 자연 조건에 따라 출력이 변동되는 </a:t>
+            </a:r>
+            <a:r>
+              <a:rPr lang="ko-KR" altLang="en-US" sz="1600" dirty="0" err="1"/>
+              <a:t>간헐성</a:t>
+            </a:r>
+            <a:r>
+              <a:rPr lang="ko-KR" altLang="en-US" sz="1600" dirty="0"/>
+              <a:t> 문제를 안고 있으며</a:t>
+            </a:r>
+            <a:r>
+              <a:rPr lang="en-US" altLang="ko-KR" sz="1600" dirty="0"/>
+              <a:t>, </a:t>
+            </a:r>
+            <a:r>
+              <a:rPr lang="ko-KR" altLang="en-US" sz="1600" dirty="0"/>
+              <a:t>이를 보완하기 위한 에너지 저장 시스템과 계통 안정화를 위한 투자 필요성이 존재한다</a:t>
+            </a:r>
+            <a:r>
+              <a:rPr lang="en-US" altLang="ko-KR" sz="1600" dirty="0"/>
+              <a:t>.</a:t>
+            </a:r>
+          </a:p>
+          <a:p>
+            <a:pPr marL="835025" lvl="1" indent="-285750">
+              <a:lnSpc>
+                <a:spcPct val="150000"/>
+              </a:lnSpc>
+              <a:buFont typeface="Wingdings" panose="05000000000000000000" pitchFamily="2" charset="2"/>
+              <a:buChar char="ü"/>
+            </a:pPr>
+            <a:endParaRPr lang="en-US" altLang="ko-KR" sz="1600" dirty="0"/>
+          </a:p>
+          <a:p>
+            <a:pPr marL="377825" indent="-285750">
+              <a:lnSpc>
+                <a:spcPct val="150000"/>
+              </a:lnSpc>
+              <a:buFont typeface="Arial" panose="020B0604020202020204" pitchFamily="34" charset="0"/>
+              <a:buChar char="•"/>
+            </a:pPr>
+            <a:r>
+              <a:rPr lang="ko-KR" altLang="en-US" sz="1600" dirty="0"/>
+              <a:t>에너지원 간 경제성을 비교하기 위한 지표로는 균등화 발전비용 </a:t>
+            </a:r>
+            <a:r>
+              <a:rPr lang="en-US" altLang="ko-KR" sz="1600" dirty="0"/>
+              <a:t>(Levelized Cost Of Electricity, LCOE)</a:t>
+            </a:r>
+            <a:r>
+              <a:rPr lang="ko-KR" altLang="en-US" sz="1600" dirty="0"/>
+              <a:t>이 사용된다</a:t>
+            </a:r>
+            <a:r>
+              <a:rPr lang="en-US" altLang="ko-KR" sz="1600" dirty="0"/>
+              <a:t>.</a:t>
+            </a:r>
+          </a:p>
+          <a:p>
+            <a:pPr marL="835025" lvl="1" indent="-285750">
+              <a:lnSpc>
+                <a:spcPct val="150000"/>
+              </a:lnSpc>
+              <a:buFont typeface="Wingdings" panose="05000000000000000000" pitchFamily="2" charset="2"/>
+              <a:buChar char="ü"/>
+            </a:pPr>
+            <a:r>
+              <a:rPr lang="en-US" altLang="ko-KR" sz="1600" dirty="0"/>
+              <a:t>LCOE</a:t>
+            </a:r>
+            <a:r>
+              <a:rPr lang="ko-KR" altLang="en-US" sz="1600" dirty="0"/>
+              <a:t>는 에너지원이 생산하는 전력 </a:t>
+            </a:r>
+            <a:r>
+              <a:rPr lang="en-US" altLang="ko-KR" sz="1600" dirty="0"/>
+              <a:t>1MWh</a:t>
+            </a:r>
+            <a:r>
+              <a:rPr lang="ko-KR" altLang="en-US" sz="1600" dirty="0"/>
+              <a:t> 당 평균비용을 의미한다</a:t>
+            </a:r>
+            <a:r>
+              <a:rPr lang="en-US" altLang="ko-KR" sz="1600" dirty="0"/>
+              <a:t>.</a:t>
+            </a:r>
+          </a:p>
+          <a:p>
+            <a:pPr marL="1292225" lvl="2" indent="-285750">
+              <a:lnSpc>
+                <a:spcPct val="150000"/>
+              </a:lnSpc>
+              <a:buFont typeface="Wingdings" panose="05000000000000000000" pitchFamily="2" charset="2"/>
+              <a:buChar char="Ø"/>
+            </a:pPr>
+            <a:r>
+              <a:rPr lang="ko-KR" altLang="en-US" sz="1600" dirty="0"/>
+              <a:t>건설비</a:t>
+            </a:r>
+            <a:r>
+              <a:rPr lang="en-US" altLang="ko-KR" sz="1600" dirty="0"/>
+              <a:t>, </a:t>
+            </a:r>
+            <a:r>
+              <a:rPr lang="ko-KR" altLang="en-US" sz="1600" dirty="0"/>
+              <a:t>연료비</a:t>
+            </a:r>
+            <a:r>
+              <a:rPr lang="en-US" altLang="ko-KR" sz="1600" dirty="0"/>
+              <a:t>, </a:t>
+            </a:r>
+            <a:r>
+              <a:rPr lang="ko-KR" altLang="en-US" sz="1600" dirty="0"/>
+              <a:t>유지보수비</a:t>
+            </a:r>
+            <a:r>
+              <a:rPr lang="en-US" altLang="ko-KR" sz="1600" dirty="0"/>
+              <a:t>, </a:t>
+            </a:r>
+            <a:r>
+              <a:rPr lang="ko-KR" altLang="en-US" sz="1600" dirty="0"/>
+              <a:t>금융비 등을 모두 반영한 후 발전설비의 수명 기간 동안 할인된 전력 생산량으로 나누어 계산한다</a:t>
+            </a:r>
+            <a:r>
+              <a:rPr lang="en-US" altLang="ko-KR" sz="1600" dirty="0"/>
+              <a:t>.</a:t>
+            </a:r>
+          </a:p>
+          <a:p>
+            <a:pPr marL="835025" lvl="1" indent="-285750">
+              <a:lnSpc>
+                <a:spcPct val="150000"/>
+              </a:lnSpc>
+              <a:buFont typeface="Wingdings" panose="05000000000000000000" pitchFamily="2" charset="2"/>
+              <a:buChar char="ü"/>
+            </a:pPr>
+            <a:r>
+              <a:rPr lang="ko-KR" altLang="en-US" sz="1600" dirty="0"/>
+              <a:t>단일 수치로 다양한 발전 기술의 경제성을 비교할 수 있도록 해 주는 지표이다</a:t>
+            </a:r>
+            <a:r>
+              <a:rPr lang="en-US" altLang="ko-KR" sz="1600" dirty="0"/>
+              <a:t>.</a:t>
+            </a:r>
+          </a:p>
+        </p:txBody>
+      </p:sp>
+    </p:spTree>
+    <p:extLst>
+      <p:ext uri="{BB962C8B-B14F-4D97-AF65-F5344CB8AC3E}">
+        <p14:creationId xmlns:p14="http://schemas.microsoft.com/office/powerpoint/2010/main" val="2383914071"/>
+      </p:ext>
+    </p:extLst>
+  </p:cSld>
+  <p:clrMapOvr>
+    <a:masterClrMapping/>
+  </p:clrMapOvr>
+</p:sld>
+</file>
+
+<file path=ppt/slides/slide31.xml><?xml version="1.0" encoding="utf-8"?>
+<p:sld xmlns:a="http://schemas.openxmlformats.org/drawingml/2006/main" xmlns:r="http://schemas.openxmlformats.org/officeDocument/2006/relationships" xmlns:p="http://schemas.openxmlformats.org/presentationml/2006/main">
+  <p:cSld>
+    <p:spTree>
+      <p:nvGrpSpPr>
+        <p:cNvPr id="1" name="">
+          <a:extLst>
+            <a:ext uri="{FF2B5EF4-FFF2-40B4-BE49-F238E27FC236}">
+              <a16:creationId xmlns:a16="http://schemas.microsoft.com/office/drawing/2014/main" id="{8F924BAA-5048-E982-88E2-EE7B99B3976C}"/>
+            </a:ext>
+          </a:extLst>
+        </p:cNvPr>
+        <p:cNvGrpSpPr/>
+        <p:nvPr/>
+      </p:nvGrpSpPr>
+      <p:grpSpPr>
+        <a:xfrm>
+          <a:off x="0" y="0"/>
+          <a:ext cx="0" cy="0"/>
+          <a:chOff x="0" y="0"/>
+          <a:chExt cx="0" cy="0"/>
+        </a:xfrm>
+      </p:grpSpPr>
+      <p:sp>
+        <p:nvSpPr>
+          <p:cNvPr id="2" name="제목 1">
+            <a:extLst>
+              <a:ext uri="{FF2B5EF4-FFF2-40B4-BE49-F238E27FC236}">
+                <a16:creationId xmlns:a16="http://schemas.microsoft.com/office/drawing/2014/main" id="{034D0951-B4DB-28EB-B0F8-B596F152173C}"/>
+              </a:ext>
+            </a:extLst>
+          </p:cNvPr>
+          <p:cNvSpPr>
+            <a:spLocks noGrp="1"/>
+          </p:cNvSpPr>
+          <p:nvPr>
+            <p:ph type="title"/>
+          </p:nvPr>
+        </p:nvSpPr>
+        <p:spPr/>
+        <p:txBody>
+          <a:bodyPr/>
+          <a:lstStyle/>
+          <a:p>
+            <a:r>
+              <a:rPr lang="ko-KR" altLang="en-US" dirty="0"/>
+              <a:t>원자력 발전의 장기적인 경제적 영향</a:t>
+            </a:r>
+          </a:p>
+        </p:txBody>
+      </p:sp>
+      <p:sp>
+        <p:nvSpPr>
+          <p:cNvPr id="4" name="슬라이드 번호 개체 틀 3">
+            <a:extLst>
+              <a:ext uri="{FF2B5EF4-FFF2-40B4-BE49-F238E27FC236}">
+                <a16:creationId xmlns:a16="http://schemas.microsoft.com/office/drawing/2014/main" id="{B4C524BB-39A0-17F5-5F83-C1F377CFC9CC}"/>
+              </a:ext>
+            </a:extLst>
+          </p:cNvPr>
+          <p:cNvSpPr>
+            <a:spLocks noGrp="1"/>
+          </p:cNvSpPr>
+          <p:nvPr>
+            <p:ph type="sldNum" sz="quarter" idx="12"/>
+          </p:nvPr>
+        </p:nvSpPr>
+        <p:spPr/>
+        <p:txBody>
+          <a:bodyPr/>
+          <a:lstStyle/>
+          <a:p>
+            <a:fld id="{109C872D-39A9-4065-8BF3-6A613116E2A1}" type="slidenum">
+              <a:rPr lang="ko-KR" altLang="en-US" smtClean="0"/>
+              <a:t>31</a:t>
+            </a:fld>
+            <a:endParaRPr lang="ko-KR" altLang="en-US"/>
+          </a:p>
+        </p:txBody>
+      </p:sp>
+      <p:sp>
+        <p:nvSpPr>
+          <p:cNvPr id="3" name="TextBox 2">
+            <a:extLst>
+              <a:ext uri="{FF2B5EF4-FFF2-40B4-BE49-F238E27FC236}">
+                <a16:creationId xmlns:a16="http://schemas.microsoft.com/office/drawing/2014/main" id="{0FBF979A-09F6-3261-7EA5-CF8EB23A3BDE}"/>
+              </a:ext>
+            </a:extLst>
+          </p:cNvPr>
+          <p:cNvSpPr txBox="1"/>
+          <p:nvPr/>
+        </p:nvSpPr>
+        <p:spPr>
+          <a:xfrm>
+            <a:off x="288790" y="958844"/>
+            <a:ext cx="11118453" cy="414024"/>
+          </a:xfrm>
+          <a:prstGeom prst="rect">
+            <a:avLst/>
+          </a:prstGeom>
+          <a:noFill/>
+        </p:spPr>
+        <p:txBody>
+          <a:bodyPr wrap="square" rtlCol="0" anchor="t">
+            <a:spAutoFit/>
+          </a:bodyPr>
+          <a:lstStyle/>
+          <a:p>
+            <a:pPr marL="377825" indent="-285750">
+              <a:lnSpc>
+                <a:spcPct val="150000"/>
+              </a:lnSpc>
+              <a:buFont typeface="Arial" panose="020B0604020202020204" pitchFamily="34" charset="0"/>
+              <a:buChar char="•"/>
+            </a:pPr>
+            <a:r>
+              <a:rPr lang="ko-KR" altLang="en-US" sz="1600"/>
+              <a:t>ㅇㄴㅇㅇㅇ</a:t>
+            </a:r>
+            <a:endParaRPr lang="en-US" altLang="ko-KR" sz="1600" dirty="0"/>
+          </a:p>
+        </p:txBody>
+      </p:sp>
+    </p:spTree>
+    <p:extLst>
+      <p:ext uri="{BB962C8B-B14F-4D97-AF65-F5344CB8AC3E}">
+        <p14:creationId xmlns:p14="http://schemas.microsoft.com/office/powerpoint/2010/main" val="1662382425"/>
+      </p:ext>
+    </p:extLst>
+  </p:cSld>
+  <p:clrMapOvr>
+    <a:masterClrMapping/>
+  </p:clrMapOvr>
+</p:sld>
+</file>
+
+<file path=ppt/slides/slide32.xml><?xml version="1.0" encoding="utf-8"?>
+<p:sld xmlns:a="http://schemas.openxmlformats.org/drawingml/2006/main" xmlns:r="http://schemas.openxmlformats.org/officeDocument/2006/relationships" xmlns:p="http://schemas.openxmlformats.org/presentationml/2006/main">
+  <p:cSld>
+    <p:spTree>
+      <p:nvGrpSpPr>
+        <p:cNvPr id="1" name="">
+          <a:extLst>
+            <a:ext uri="{FF2B5EF4-FFF2-40B4-BE49-F238E27FC236}">
+              <a16:creationId xmlns:a16="http://schemas.microsoft.com/office/drawing/2014/main" id="{B472A9F9-7BBF-C3C8-B1CF-563E948F3E23}"/>
+            </a:ext>
+          </a:extLst>
+        </p:cNvPr>
+        <p:cNvGrpSpPr/>
+        <p:nvPr/>
+      </p:nvGrpSpPr>
+      <p:grpSpPr>
+        <a:xfrm>
+          <a:off x="0" y="0"/>
+          <a:ext cx="0" cy="0"/>
+          <a:chOff x="0" y="0"/>
+          <a:chExt cx="0" cy="0"/>
+        </a:xfrm>
+      </p:grpSpPr>
+      <p:pic>
+        <p:nvPicPr>
+          <p:cNvPr id="6" name="그림 5" descr="텍스트, 로고, 원, 폰트이(가) 표시된 사진&#10;&#10;AI 생성 콘텐츠는 정확하지 않을 수 있습니다.">
+            <a:extLst>
+              <a:ext uri="{FF2B5EF4-FFF2-40B4-BE49-F238E27FC236}">
+                <a16:creationId xmlns:a16="http://schemas.microsoft.com/office/drawing/2014/main" id="{8868B656-2B11-E488-385C-0CC9D5510595}"/>
+              </a:ext>
+            </a:extLst>
+          </p:cNvPr>
+          <p:cNvPicPr>
+            <a:picLocks noChangeAspect="1"/>
+          </p:cNvPicPr>
+          <p:nvPr/>
+        </p:nvPicPr>
+        <p:blipFill>
+          <a:blip r:embed="rId2">
+            <a:alphaModFix amt="20000"/>
+            <a:extLst>
+              <a:ext uri="{28A0092B-C50C-407E-A947-70E740481C1C}">
+                <a14:useLocalDpi xmlns:a14="http://schemas.microsoft.com/office/drawing/2010/main" val="0"/>
+              </a:ext>
+            </a:extLst>
+          </a:blip>
+          <a:stretch>
+            <a:fillRect/>
+          </a:stretch>
+        </p:blipFill>
+        <p:spPr>
+          <a:xfrm>
+            <a:off x="4012070" y="1673061"/>
+            <a:ext cx="4167861" cy="4167861"/>
+          </a:xfrm>
+          <a:prstGeom prst="rect">
+            <a:avLst/>
+          </a:prstGeom>
+        </p:spPr>
+      </p:pic>
+      <p:sp>
+        <p:nvSpPr>
+          <p:cNvPr id="4" name="슬라이드 번호 개체 틀 3">
+            <a:extLst>
+              <a:ext uri="{FF2B5EF4-FFF2-40B4-BE49-F238E27FC236}">
+                <a16:creationId xmlns:a16="http://schemas.microsoft.com/office/drawing/2014/main" id="{6B363120-2945-5444-EB75-F301FA3BC836}"/>
+              </a:ext>
+            </a:extLst>
+          </p:cNvPr>
+          <p:cNvSpPr>
+            <a:spLocks noGrp="1"/>
+          </p:cNvSpPr>
+          <p:nvPr>
+            <p:ph type="sldNum" sz="quarter" idx="12"/>
+          </p:nvPr>
+        </p:nvSpPr>
+        <p:spPr/>
+        <p:txBody>
+          <a:bodyPr/>
+          <a:lstStyle/>
+          <a:p>
+            <a:fld id="{109C872D-39A9-4065-8BF3-6A613116E2A1}" type="slidenum">
+              <a:rPr lang="ko-KR" altLang="en-US" smtClean="0"/>
+              <a:t>32</a:t>
+            </a:fld>
+            <a:endParaRPr lang="ko-KR" altLang="en-US"/>
+          </a:p>
+        </p:txBody>
+      </p:sp>
+      <p:sp>
+        <p:nvSpPr>
+          <p:cNvPr id="7" name="제목 1">
+            <a:extLst>
+              <a:ext uri="{FF2B5EF4-FFF2-40B4-BE49-F238E27FC236}">
+                <a16:creationId xmlns:a16="http://schemas.microsoft.com/office/drawing/2014/main" id="{B218A4A4-DE9E-FD83-5958-D2D791653475}"/>
+              </a:ext>
+            </a:extLst>
+          </p:cNvPr>
+          <p:cNvSpPr>
+            <a:spLocks noGrp="1"/>
+          </p:cNvSpPr>
+          <p:nvPr>
+            <p:ph type="title"/>
+          </p:nvPr>
+        </p:nvSpPr>
+        <p:spPr>
+          <a:xfrm>
+            <a:off x="831850" y="3765550"/>
+            <a:ext cx="11150600" cy="652818"/>
+          </a:xfrm>
+          <a:effectLst>
+            <a:reflection blurRad="50800" stA="45000" endPos="44000" dir="5400000" sy="-100000" algn="bl" rotWithShape="0"/>
+          </a:effectLst>
+        </p:spPr>
+        <p:txBody>
+          <a:bodyPr anchor="b"/>
+          <a:lstStyle/>
+          <a:p>
+            <a:r>
+              <a:rPr lang="en-US" altLang="ko-KR" sz="4000" b="1" i="0" spc="150" dirty="0"/>
+              <a:t>Section 6. </a:t>
+            </a:r>
+            <a:r>
+              <a:rPr lang="ko-KR" altLang="en-US" sz="4000" b="1" i="0" spc="150" dirty="0"/>
+              <a:t>원자력 산업의 경쟁구조</a:t>
+            </a:r>
+            <a:endParaRPr lang="ko-KR" altLang="en-US" sz="3600" i="0" spc="150" dirty="0"/>
+          </a:p>
+        </p:txBody>
+      </p:sp>
+    </p:spTree>
+    <p:extLst>
+      <p:ext uri="{BB962C8B-B14F-4D97-AF65-F5344CB8AC3E}">
+        <p14:creationId xmlns:p14="http://schemas.microsoft.com/office/powerpoint/2010/main" val="1400908895"/>
+      </p:ext>
+    </p:extLst>
+  </p:cSld>
+  <p:clrMapOvr>
+    <a:masterClrMapping/>
+  </p:clrMapOvr>
+</p:sld>
+</file>
+
+<file path=ppt/slides/slide33.xml><?xml version="1.0" encoding="utf-8"?>
+<p:sld xmlns:a="http://schemas.openxmlformats.org/drawingml/2006/main" xmlns:r="http://schemas.openxmlformats.org/officeDocument/2006/relationships" xmlns:p="http://schemas.openxmlformats.org/presentationml/2006/main">
+  <p:cSld>
+    <p:spTree>
+      <p:nvGrpSpPr>
+        <p:cNvPr id="1" name="">
+          <a:extLst>
+            <a:ext uri="{FF2B5EF4-FFF2-40B4-BE49-F238E27FC236}">
+              <a16:creationId xmlns:a16="http://schemas.microsoft.com/office/drawing/2014/main" id="{5BA6E00D-775B-0F11-3C55-530EDC4649DE}"/>
+            </a:ext>
+          </a:extLst>
+        </p:cNvPr>
+        <p:cNvGrpSpPr/>
+        <p:nvPr/>
+      </p:nvGrpSpPr>
+      <p:grpSpPr>
+        <a:xfrm>
+          <a:off x="0" y="0"/>
+          <a:ext cx="0" cy="0"/>
+          <a:chOff x="0" y="0"/>
+          <a:chExt cx="0" cy="0"/>
+        </a:xfrm>
+      </p:grpSpPr>
+      <p:pic>
+        <p:nvPicPr>
+          <p:cNvPr id="6" name="그림 5" descr="텍스트, 로고, 원, 폰트이(가) 표시된 사진&#10;&#10;AI 생성 콘텐츠는 정확하지 않을 수 있습니다.">
+            <a:extLst>
+              <a:ext uri="{FF2B5EF4-FFF2-40B4-BE49-F238E27FC236}">
+                <a16:creationId xmlns:a16="http://schemas.microsoft.com/office/drawing/2014/main" id="{7DC98B59-499E-B772-96DF-E256D18D39CA}"/>
+              </a:ext>
+            </a:extLst>
+          </p:cNvPr>
+          <p:cNvPicPr>
+            <a:picLocks noChangeAspect="1"/>
+          </p:cNvPicPr>
+          <p:nvPr/>
+        </p:nvPicPr>
+        <p:blipFill>
+          <a:blip r:embed="rId2">
+            <a:alphaModFix amt="20000"/>
+            <a:extLst>
+              <a:ext uri="{28A0092B-C50C-407E-A947-70E740481C1C}">
+                <a14:useLocalDpi xmlns:a14="http://schemas.microsoft.com/office/drawing/2010/main" val="0"/>
+              </a:ext>
+            </a:extLst>
+          </a:blip>
+          <a:stretch>
+            <a:fillRect/>
+          </a:stretch>
+        </p:blipFill>
+        <p:spPr>
+          <a:xfrm>
+            <a:off x="4012070" y="1673061"/>
+            <a:ext cx="4167861" cy="4167861"/>
+          </a:xfrm>
+          <a:prstGeom prst="rect">
+            <a:avLst/>
+          </a:prstGeom>
+        </p:spPr>
+      </p:pic>
+      <p:sp>
+        <p:nvSpPr>
+          <p:cNvPr id="4" name="슬라이드 번호 개체 틀 3">
+            <a:extLst>
+              <a:ext uri="{FF2B5EF4-FFF2-40B4-BE49-F238E27FC236}">
+                <a16:creationId xmlns:a16="http://schemas.microsoft.com/office/drawing/2014/main" id="{E00D8038-5FD2-2DF9-3BF7-B442E350DA05}"/>
+              </a:ext>
+            </a:extLst>
+          </p:cNvPr>
+          <p:cNvSpPr>
+            <a:spLocks noGrp="1"/>
+          </p:cNvSpPr>
+          <p:nvPr>
+            <p:ph type="sldNum" sz="quarter" idx="12"/>
+          </p:nvPr>
+        </p:nvSpPr>
+        <p:spPr/>
+        <p:txBody>
+          <a:bodyPr/>
+          <a:lstStyle/>
+          <a:p>
+            <a:fld id="{109C872D-39A9-4065-8BF3-6A613116E2A1}" type="slidenum">
+              <a:rPr lang="ko-KR" altLang="en-US" smtClean="0"/>
+              <a:t>33</a:t>
+            </a:fld>
+            <a:endParaRPr lang="ko-KR" altLang="en-US"/>
+          </a:p>
+        </p:txBody>
+      </p:sp>
+      <p:sp>
+        <p:nvSpPr>
+          <p:cNvPr id="7" name="제목 1">
+            <a:extLst>
+              <a:ext uri="{FF2B5EF4-FFF2-40B4-BE49-F238E27FC236}">
+                <a16:creationId xmlns:a16="http://schemas.microsoft.com/office/drawing/2014/main" id="{26215163-A070-ECA0-C85F-AC08302BA574}"/>
+              </a:ext>
+            </a:extLst>
+          </p:cNvPr>
+          <p:cNvSpPr>
+            <a:spLocks noGrp="1"/>
+          </p:cNvSpPr>
+          <p:nvPr>
+            <p:ph type="title"/>
+          </p:nvPr>
+        </p:nvSpPr>
+        <p:spPr>
+          <a:xfrm>
+            <a:off x="831850" y="3765550"/>
+            <a:ext cx="11150600" cy="652818"/>
+          </a:xfrm>
+          <a:effectLst>
+            <a:reflection blurRad="50800" stA="45000" endPos="44000" dir="5400000" sy="-100000" algn="bl" rotWithShape="0"/>
+          </a:effectLst>
+        </p:spPr>
+        <p:txBody>
+          <a:bodyPr anchor="b"/>
+          <a:lstStyle/>
+          <a:p>
+            <a:r>
+              <a:rPr lang="en-US" altLang="ko-KR" sz="4000" b="1" i="0" spc="150" dirty="0"/>
+              <a:t>Section 7. </a:t>
+            </a:r>
+            <a:r>
+              <a:rPr lang="ko-KR" altLang="en-US" sz="4000" b="1" i="0" spc="150" dirty="0"/>
+              <a:t>원자력 발전 </a:t>
+            </a:r>
+            <a:r>
+              <a:rPr lang="en-US" altLang="ko-KR" sz="4000" b="1" i="0" spc="150" dirty="0"/>
+              <a:t>(</a:t>
+            </a:r>
+            <a:r>
+              <a:rPr lang="ko-KR" altLang="en-US" sz="4000" b="1" i="0" spc="150" dirty="0"/>
+              <a:t>전력생산</a:t>
+            </a:r>
+            <a:r>
+              <a:rPr lang="en-US" altLang="ko-KR" sz="4000" b="1" i="0" spc="150" dirty="0"/>
+              <a:t>)</a:t>
+            </a:r>
+            <a:endParaRPr lang="ko-KR" altLang="en-US" sz="3600" i="0" spc="150" dirty="0"/>
+          </a:p>
+        </p:txBody>
+      </p:sp>
+    </p:spTree>
+    <p:extLst>
+      <p:ext uri="{BB962C8B-B14F-4D97-AF65-F5344CB8AC3E}">
+        <p14:creationId xmlns:p14="http://schemas.microsoft.com/office/powerpoint/2010/main" val="2910631005"/>
+      </p:ext>
+    </p:extLst>
+  </p:cSld>
+  <p:clrMapOvr>
+    <a:masterClrMapping/>
+  </p:clrMapOvr>
+</p:sld>
+</file>
+
+<file path=ppt/slides/slide34.xml><?xml version="1.0" encoding="utf-8"?>
+<p:sld xmlns:a="http://schemas.openxmlformats.org/drawingml/2006/main" xmlns:r="http://schemas.openxmlformats.org/officeDocument/2006/relationships" xmlns:p="http://schemas.openxmlformats.org/presentationml/2006/main">
+  <p:cSld>
+    <p:spTree>
+      <p:nvGrpSpPr>
+        <p:cNvPr id="1" name="">
+          <a:extLst>
+            <a:ext uri="{FF2B5EF4-FFF2-40B4-BE49-F238E27FC236}">
+              <a16:creationId xmlns:a16="http://schemas.microsoft.com/office/drawing/2014/main" id="{1301FFA8-0285-6BC7-89E6-7AEABF1EA891}"/>
+            </a:ext>
+          </a:extLst>
+        </p:cNvPr>
+        <p:cNvGrpSpPr/>
+        <p:nvPr/>
+      </p:nvGrpSpPr>
+      <p:grpSpPr>
+        <a:xfrm>
+          <a:off x="0" y="0"/>
+          <a:ext cx="0" cy="0"/>
+          <a:chOff x="0" y="0"/>
+          <a:chExt cx="0" cy="0"/>
+        </a:xfrm>
+      </p:grpSpPr>
+      <p:pic>
+        <p:nvPicPr>
+          <p:cNvPr id="6" name="그림 5" descr="텍스트, 로고, 원, 폰트이(가) 표시된 사진&#10;&#10;AI 생성 콘텐츠는 정확하지 않을 수 있습니다.">
+            <a:extLst>
+              <a:ext uri="{FF2B5EF4-FFF2-40B4-BE49-F238E27FC236}">
+                <a16:creationId xmlns:a16="http://schemas.microsoft.com/office/drawing/2014/main" id="{3B1722F1-B86F-FA7C-EC2B-E1FF5845D74A}"/>
+              </a:ext>
+            </a:extLst>
+          </p:cNvPr>
+          <p:cNvPicPr>
+            <a:picLocks noChangeAspect="1"/>
+          </p:cNvPicPr>
+          <p:nvPr/>
+        </p:nvPicPr>
+        <p:blipFill>
+          <a:blip r:embed="rId2">
+            <a:alphaModFix amt="20000"/>
+            <a:extLst>
+              <a:ext uri="{28A0092B-C50C-407E-A947-70E740481C1C}">
+                <a14:useLocalDpi xmlns:a14="http://schemas.microsoft.com/office/drawing/2010/main" val="0"/>
+              </a:ext>
+            </a:extLst>
+          </a:blip>
+          <a:stretch>
+            <a:fillRect/>
+          </a:stretch>
+        </p:blipFill>
+        <p:spPr>
+          <a:xfrm>
+            <a:off x="4012070" y="1673061"/>
+            <a:ext cx="4167861" cy="4167861"/>
+          </a:xfrm>
+          <a:prstGeom prst="rect">
+            <a:avLst/>
+          </a:prstGeom>
+        </p:spPr>
+      </p:pic>
+      <p:sp>
+        <p:nvSpPr>
+          <p:cNvPr id="4" name="슬라이드 번호 개체 틀 3">
+            <a:extLst>
+              <a:ext uri="{FF2B5EF4-FFF2-40B4-BE49-F238E27FC236}">
+                <a16:creationId xmlns:a16="http://schemas.microsoft.com/office/drawing/2014/main" id="{0EBCBED2-506E-28C2-8531-29CAC4992DB4}"/>
+              </a:ext>
+            </a:extLst>
+          </p:cNvPr>
+          <p:cNvSpPr>
+            <a:spLocks noGrp="1"/>
+          </p:cNvSpPr>
+          <p:nvPr>
+            <p:ph type="sldNum" sz="quarter" idx="12"/>
+          </p:nvPr>
+        </p:nvSpPr>
+        <p:spPr/>
+        <p:txBody>
+          <a:bodyPr/>
+          <a:lstStyle/>
+          <a:p>
+            <a:fld id="{109C872D-39A9-4065-8BF3-6A613116E2A1}" type="slidenum">
+              <a:rPr lang="ko-KR" altLang="en-US" smtClean="0"/>
+              <a:t>34</a:t>
+            </a:fld>
+            <a:endParaRPr lang="ko-KR" altLang="en-US"/>
+          </a:p>
+        </p:txBody>
+      </p:sp>
+      <p:sp>
+        <p:nvSpPr>
+          <p:cNvPr id="7" name="제목 1">
+            <a:extLst>
+              <a:ext uri="{FF2B5EF4-FFF2-40B4-BE49-F238E27FC236}">
+                <a16:creationId xmlns:a16="http://schemas.microsoft.com/office/drawing/2014/main" id="{8849E738-E699-EDAC-1856-3167C36F5CDB}"/>
+              </a:ext>
+            </a:extLst>
+          </p:cNvPr>
+          <p:cNvSpPr>
+            <a:spLocks noGrp="1"/>
+          </p:cNvSpPr>
+          <p:nvPr>
+            <p:ph type="title"/>
+          </p:nvPr>
+        </p:nvSpPr>
+        <p:spPr>
+          <a:xfrm>
+            <a:off x="831850" y="3765550"/>
+            <a:ext cx="11150600" cy="652818"/>
+          </a:xfrm>
+          <a:effectLst>
+            <a:reflection blurRad="50800" stA="45000" endPos="44000" dir="5400000" sy="-100000" algn="bl" rotWithShape="0"/>
+          </a:effectLst>
+        </p:spPr>
+        <p:txBody>
+          <a:bodyPr anchor="b"/>
+          <a:lstStyle/>
+          <a:p>
+            <a:r>
+              <a:rPr lang="en-US" altLang="ko-KR" sz="4000" b="1" i="0" spc="150" dirty="0"/>
+              <a:t>Section 8. </a:t>
+            </a:r>
+            <a:r>
+              <a:rPr lang="ko-KR" altLang="en-US" sz="4000" b="1" i="0" spc="150" dirty="0"/>
+              <a:t>원자력의 미래</a:t>
+            </a:r>
+            <a:endParaRPr lang="ko-KR" altLang="en-US" sz="3600" i="0" spc="150" dirty="0"/>
+          </a:p>
+        </p:txBody>
+      </p:sp>
+    </p:spTree>
+    <p:extLst>
+      <p:ext uri="{BB962C8B-B14F-4D97-AF65-F5344CB8AC3E}">
+        <p14:creationId xmlns:p14="http://schemas.microsoft.com/office/powerpoint/2010/main" val="3950787581"/>
+      </p:ext>
+    </p:extLst>
+  </p:cSld>
+  <p:clrMapOvr>
+    <a:masterClrMapping/>
+  </p:clrMapOvr>
+</p:sld>
+</file>
+
+<file path=ppt/slides/slide35.xml><?xml version="1.0" encoding="utf-8"?>
+<p:sld xmlns:a="http://schemas.openxmlformats.org/drawingml/2006/main" xmlns:r="http://schemas.openxmlformats.org/officeDocument/2006/relationships" xmlns:p="http://schemas.openxmlformats.org/presentationml/2006/main">
+  <p:cSld>
+    <p:spTree>
+      <p:nvGrpSpPr>
+        <p:cNvPr id="1" name="">
+          <a:extLst>
+            <a:ext uri="{FF2B5EF4-FFF2-40B4-BE49-F238E27FC236}">
+              <a16:creationId xmlns:a16="http://schemas.microsoft.com/office/drawing/2014/main" id="{25B0A312-6E61-EA12-FA9E-05F90F904755}"/>
+            </a:ext>
+          </a:extLst>
+        </p:cNvPr>
+        <p:cNvGrpSpPr/>
+        <p:nvPr/>
+      </p:nvGrpSpPr>
+      <p:grpSpPr>
+        <a:xfrm>
+          <a:off x="0" y="0"/>
+          <a:ext cx="0" cy="0"/>
+          <a:chOff x="0" y="0"/>
+          <a:chExt cx="0" cy="0"/>
+        </a:xfrm>
+      </p:grpSpPr>
+      <p:pic>
+        <p:nvPicPr>
+          <p:cNvPr id="6" name="그림 5" descr="텍스트, 로고, 원, 폰트이(가) 표시된 사진&#10;&#10;AI 생성 콘텐츠는 정확하지 않을 수 있습니다.">
+            <a:extLst>
+              <a:ext uri="{FF2B5EF4-FFF2-40B4-BE49-F238E27FC236}">
+                <a16:creationId xmlns:a16="http://schemas.microsoft.com/office/drawing/2014/main" id="{6D4F7032-AE86-C757-2F08-D6FE53572459}"/>
+              </a:ext>
+            </a:extLst>
+          </p:cNvPr>
+          <p:cNvPicPr>
+            <a:picLocks noChangeAspect="1"/>
+          </p:cNvPicPr>
+          <p:nvPr/>
+        </p:nvPicPr>
+        <p:blipFill>
+          <a:blip r:embed="rId2">
+            <a:alphaModFix amt="20000"/>
+            <a:extLst>
+              <a:ext uri="{28A0092B-C50C-407E-A947-70E740481C1C}">
+                <a14:useLocalDpi xmlns:a14="http://schemas.microsoft.com/office/drawing/2010/main" val="0"/>
+              </a:ext>
+            </a:extLst>
+          </a:blip>
+          <a:stretch>
+            <a:fillRect/>
+          </a:stretch>
+        </p:blipFill>
+        <p:spPr>
+          <a:xfrm>
+            <a:off x="4012070" y="1673061"/>
+            <a:ext cx="4167861" cy="4167861"/>
+          </a:xfrm>
+          <a:prstGeom prst="rect">
+            <a:avLst/>
+          </a:prstGeom>
+        </p:spPr>
+      </p:pic>
+      <p:sp>
+        <p:nvSpPr>
+          <p:cNvPr id="4" name="슬라이드 번호 개체 틀 3">
+            <a:extLst>
+              <a:ext uri="{FF2B5EF4-FFF2-40B4-BE49-F238E27FC236}">
+                <a16:creationId xmlns:a16="http://schemas.microsoft.com/office/drawing/2014/main" id="{2437DA62-1EF3-92DE-C66C-CAD286405FFD}"/>
+              </a:ext>
+            </a:extLst>
+          </p:cNvPr>
+          <p:cNvSpPr>
+            <a:spLocks noGrp="1"/>
+          </p:cNvSpPr>
+          <p:nvPr>
+            <p:ph type="sldNum" sz="quarter" idx="12"/>
+          </p:nvPr>
+        </p:nvSpPr>
+        <p:spPr/>
+        <p:txBody>
+          <a:bodyPr/>
+          <a:lstStyle/>
+          <a:p>
+            <a:fld id="{109C872D-39A9-4065-8BF3-6A613116E2A1}" type="slidenum">
+              <a:rPr lang="ko-KR" altLang="en-US" smtClean="0"/>
+              <a:t>35</a:t>
+            </a:fld>
+            <a:endParaRPr lang="ko-KR" altLang="en-US"/>
+          </a:p>
+        </p:txBody>
+      </p:sp>
+      <p:sp>
+        <p:nvSpPr>
+          <p:cNvPr id="7" name="제목 1">
+            <a:extLst>
+              <a:ext uri="{FF2B5EF4-FFF2-40B4-BE49-F238E27FC236}">
+                <a16:creationId xmlns:a16="http://schemas.microsoft.com/office/drawing/2014/main" id="{661C3653-E745-8894-9B1A-1F4A509C94B2}"/>
+              </a:ext>
+            </a:extLst>
+          </p:cNvPr>
+          <p:cNvSpPr>
+            <a:spLocks noGrp="1"/>
+          </p:cNvSpPr>
+          <p:nvPr>
+            <p:ph type="title"/>
+          </p:nvPr>
+        </p:nvSpPr>
+        <p:spPr>
+          <a:xfrm>
+            <a:off x="831850" y="3765550"/>
+            <a:ext cx="11150600" cy="652818"/>
+          </a:xfrm>
+          <a:effectLst>
+            <a:reflection blurRad="50800" stA="45000" endPos="44000" dir="5400000" sy="-100000" algn="bl" rotWithShape="0"/>
+          </a:effectLst>
+        </p:spPr>
+        <p:txBody>
+          <a:bodyPr anchor="b"/>
+          <a:lstStyle/>
+          <a:p>
+            <a:r>
+              <a:rPr lang="en-US" altLang="ko-KR" sz="4000" b="1" i="0" spc="150" dirty="0"/>
+              <a:t>Section 9. </a:t>
+            </a:r>
+            <a:r>
+              <a:rPr lang="ko-KR" altLang="en-US" sz="4000" b="1" i="0" spc="150" dirty="0"/>
+              <a:t>에너지 전환과 원자력에너지</a:t>
+            </a:r>
+            <a:endParaRPr lang="ko-KR" altLang="en-US" sz="3600" i="0" spc="150" dirty="0"/>
+          </a:p>
+        </p:txBody>
+      </p:sp>
+    </p:spTree>
+    <p:extLst>
+      <p:ext uri="{BB962C8B-B14F-4D97-AF65-F5344CB8AC3E}">
+        <p14:creationId xmlns:p14="http://schemas.microsoft.com/office/powerpoint/2010/main" val="2672362044"/>
+      </p:ext>
+    </p:extLst>
+  </p:cSld>
+  <p:clrMapOvr>
+    <a:masterClrMapping/>
+  </p:clrMapOvr>
+</p:sld>
+</file>
+
+<file path=ppt/slides/slide36.xml><?xml version="1.0" encoding="utf-8"?>
+<p:sld xmlns:a="http://schemas.openxmlformats.org/drawingml/2006/main" xmlns:r="http://schemas.openxmlformats.org/officeDocument/2006/relationships" xmlns:p="http://schemas.openxmlformats.org/presentationml/2006/main">
+  <p:cSld>
+    <p:spTree>
+      <p:nvGrpSpPr>
+        <p:cNvPr id="1" name="">
+          <a:extLst>
+            <a:ext uri="{FF2B5EF4-FFF2-40B4-BE49-F238E27FC236}">
+              <a16:creationId xmlns:a16="http://schemas.microsoft.com/office/drawing/2014/main" id="{870B78F4-EF2F-3A3C-FC71-E2ECA8C9EC54}"/>
+            </a:ext>
+          </a:extLst>
+        </p:cNvPr>
+        <p:cNvGrpSpPr/>
+        <p:nvPr/>
+      </p:nvGrpSpPr>
+      <p:grpSpPr>
+        <a:xfrm>
+          <a:off x="0" y="0"/>
+          <a:ext cx="0" cy="0"/>
+          <a:chOff x="0" y="0"/>
+          <a:chExt cx="0" cy="0"/>
+        </a:xfrm>
+      </p:grpSpPr>
+      <p:pic>
+        <p:nvPicPr>
+          <p:cNvPr id="6" name="그림 5" descr="텍스트, 로고, 원, 폰트이(가) 표시된 사진&#10;&#10;AI 생성 콘텐츠는 정확하지 않을 수 있습니다.">
+            <a:extLst>
+              <a:ext uri="{FF2B5EF4-FFF2-40B4-BE49-F238E27FC236}">
+                <a16:creationId xmlns:a16="http://schemas.microsoft.com/office/drawing/2014/main" id="{FE221901-C69A-31AB-3499-23B88F63206E}"/>
+              </a:ext>
+            </a:extLst>
+          </p:cNvPr>
+          <p:cNvPicPr>
+            <a:picLocks noChangeAspect="1"/>
+          </p:cNvPicPr>
+          <p:nvPr/>
+        </p:nvPicPr>
+        <p:blipFill>
+          <a:blip r:embed="rId2">
+            <a:alphaModFix amt="20000"/>
+            <a:extLst>
+              <a:ext uri="{28A0092B-C50C-407E-A947-70E740481C1C}">
+                <a14:useLocalDpi xmlns:a14="http://schemas.microsoft.com/office/drawing/2010/main" val="0"/>
+              </a:ext>
+            </a:extLst>
+          </a:blip>
+          <a:stretch>
+            <a:fillRect/>
+          </a:stretch>
+        </p:blipFill>
+        <p:spPr>
+          <a:xfrm>
+            <a:off x="4012070" y="1673061"/>
+            <a:ext cx="4167861" cy="4167861"/>
+          </a:xfrm>
+          <a:prstGeom prst="rect">
+            <a:avLst/>
+          </a:prstGeom>
+        </p:spPr>
+      </p:pic>
+      <p:sp>
+        <p:nvSpPr>
+          <p:cNvPr id="4" name="슬라이드 번호 개체 틀 3">
+            <a:extLst>
+              <a:ext uri="{FF2B5EF4-FFF2-40B4-BE49-F238E27FC236}">
+                <a16:creationId xmlns:a16="http://schemas.microsoft.com/office/drawing/2014/main" id="{351D5D2A-2645-89E2-6514-E7C50A917F43}"/>
+              </a:ext>
+            </a:extLst>
+          </p:cNvPr>
+          <p:cNvSpPr>
+            <a:spLocks noGrp="1"/>
+          </p:cNvSpPr>
+          <p:nvPr>
+            <p:ph type="sldNum" sz="quarter" idx="12"/>
+          </p:nvPr>
+        </p:nvSpPr>
+        <p:spPr/>
+        <p:txBody>
+          <a:bodyPr/>
+          <a:lstStyle/>
+          <a:p>
+            <a:fld id="{109C872D-39A9-4065-8BF3-6A613116E2A1}" type="slidenum">
+              <a:rPr lang="ko-KR" altLang="en-US" smtClean="0"/>
+              <a:t>36</a:t>
+            </a:fld>
+            <a:endParaRPr lang="ko-KR" altLang="en-US"/>
+          </a:p>
+        </p:txBody>
+      </p:sp>
+      <p:sp>
+        <p:nvSpPr>
+          <p:cNvPr id="7" name="제목 1">
+            <a:extLst>
+              <a:ext uri="{FF2B5EF4-FFF2-40B4-BE49-F238E27FC236}">
+                <a16:creationId xmlns:a16="http://schemas.microsoft.com/office/drawing/2014/main" id="{A879F139-7E79-E9A6-8460-10AA4133D0AF}"/>
+              </a:ext>
+            </a:extLst>
+          </p:cNvPr>
+          <p:cNvSpPr>
+            <a:spLocks noGrp="1"/>
+          </p:cNvSpPr>
+          <p:nvPr>
+            <p:ph type="title"/>
+          </p:nvPr>
+        </p:nvSpPr>
+        <p:spPr>
+          <a:xfrm>
+            <a:off x="831850" y="3765550"/>
+            <a:ext cx="11150600" cy="652818"/>
+          </a:xfrm>
+          <a:effectLst>
+            <a:reflection blurRad="50800" stA="45000" endPos="44000" dir="5400000" sy="-100000" algn="bl" rotWithShape="0"/>
+          </a:effectLst>
+        </p:spPr>
+        <p:txBody>
+          <a:bodyPr anchor="b"/>
+          <a:lstStyle/>
+          <a:p>
+            <a:r>
+              <a:rPr lang="en-US" altLang="ko-KR" sz="4000" b="1" i="0" spc="150" dirty="0"/>
+              <a:t>Section 10. </a:t>
+            </a:r>
+            <a:r>
+              <a:rPr lang="ko-KR" altLang="en-US" sz="4000" b="1" i="0" spc="150" dirty="0"/>
+              <a:t>원자력의 미래전략</a:t>
+            </a:r>
+            <a:endParaRPr lang="ko-KR" altLang="en-US" sz="3600" i="0" spc="150" dirty="0"/>
+          </a:p>
+        </p:txBody>
+      </p:sp>
+    </p:spTree>
+    <p:extLst>
+      <p:ext uri="{BB962C8B-B14F-4D97-AF65-F5344CB8AC3E}">
+        <p14:creationId xmlns:p14="http://schemas.microsoft.com/office/powerpoint/2010/main" val="1753895778"/>
+      </p:ext>
+    </p:extLst>
+  </p:cSld>
+  <p:clrMapOvr>
+    <a:masterClrMapping/>
+  </p:clrMapOvr>
+</p:sld>
+</file>
+
+<file path=ppt/slides/slide37.xml><?xml version="1.0" encoding="utf-8"?>
+<p:sld xmlns:a="http://schemas.openxmlformats.org/drawingml/2006/main" xmlns:r="http://schemas.openxmlformats.org/officeDocument/2006/relationships" xmlns:p="http://schemas.openxmlformats.org/presentationml/2006/main">
+  <p:cSld>
+    <p:spTree>
+      <p:nvGrpSpPr>
+        <p:cNvPr id="1" name="">
+          <a:extLst>
+            <a:ext uri="{FF2B5EF4-FFF2-40B4-BE49-F238E27FC236}">
+              <a16:creationId xmlns:a16="http://schemas.microsoft.com/office/drawing/2014/main" id="{2221EDDE-B308-8FA7-8116-DAD482D863C8}"/>
+            </a:ext>
+          </a:extLst>
+        </p:cNvPr>
+        <p:cNvGrpSpPr/>
+        <p:nvPr/>
+      </p:nvGrpSpPr>
+      <p:grpSpPr>
+        <a:xfrm>
+          <a:off x="0" y="0"/>
+          <a:ext cx="0" cy="0"/>
+          <a:chOff x="0" y="0"/>
+          <a:chExt cx="0" cy="0"/>
+        </a:xfrm>
+      </p:grpSpPr>
+      <p:pic>
+        <p:nvPicPr>
+          <p:cNvPr id="3" name="그림 2" descr="텍스트, 로고, 원, 폰트이(가) 표시된 사진&#10;&#10;AI 생성 콘텐츠는 정확하지 않을 수 있습니다.">
+            <a:extLst>
+              <a:ext uri="{FF2B5EF4-FFF2-40B4-BE49-F238E27FC236}">
+                <a16:creationId xmlns:a16="http://schemas.microsoft.com/office/drawing/2014/main" id="{396FF0BD-25A1-7840-4B63-B2ECDF7CFA54}"/>
+              </a:ext>
+            </a:extLst>
+          </p:cNvPr>
+          <p:cNvPicPr>
+            <a:picLocks noChangeAspect="1"/>
+          </p:cNvPicPr>
+          <p:nvPr/>
+        </p:nvPicPr>
+        <p:blipFill>
+          <a:blip r:embed="rId2">
+            <a:alphaModFix amt="20000"/>
+            <a:extLst>
+              <a:ext uri="{28A0092B-C50C-407E-A947-70E740481C1C}">
+                <a14:useLocalDpi xmlns:a14="http://schemas.microsoft.com/office/drawing/2010/main" val="0"/>
+              </a:ext>
+            </a:extLst>
+          </a:blip>
+          <a:stretch>
+            <a:fillRect/>
+          </a:stretch>
+        </p:blipFill>
+        <p:spPr>
+          <a:xfrm>
+            <a:off x="4012070" y="1673061"/>
+            <a:ext cx="4167861" cy="4167861"/>
+          </a:xfrm>
+          <a:prstGeom prst="rect">
+            <a:avLst/>
+          </a:prstGeom>
+        </p:spPr>
+      </p:pic>
+      <p:sp>
+        <p:nvSpPr>
+          <p:cNvPr id="2" name="제목 1">
+            <a:extLst>
+              <a:ext uri="{FF2B5EF4-FFF2-40B4-BE49-F238E27FC236}">
+                <a16:creationId xmlns:a16="http://schemas.microsoft.com/office/drawing/2014/main" id="{CA03F291-495C-4A31-DF0A-8F9CC97672B8}"/>
+              </a:ext>
+            </a:extLst>
+          </p:cNvPr>
+          <p:cNvSpPr>
+            <a:spLocks noGrp="1"/>
+          </p:cNvSpPr>
+          <p:nvPr>
+            <p:ph type="title"/>
+          </p:nvPr>
+        </p:nvSpPr>
+        <p:spPr>
+          <a:xfrm>
+            <a:off x="831850" y="1709739"/>
+            <a:ext cx="10515600" cy="2134292"/>
+          </a:xfrm>
+          <a:effectLst>
+            <a:reflection blurRad="50800" stA="45000" endPos="44000" dir="5400000" sy="-100000" algn="bl" rotWithShape="0"/>
+          </a:effectLst>
+        </p:spPr>
+        <p:txBody>
+          <a:bodyPr/>
+          <a:lstStyle/>
+          <a:p>
+            <a:r>
+              <a:rPr lang="en-US" altLang="ko-KR" b="1" i="0" spc="150">
+                <a:solidFill>
+                  <a:schemeClr val="accent2"/>
+                </a:solidFill>
+              </a:rPr>
+              <a:t>T</a:t>
+            </a:r>
+            <a:r>
+              <a:rPr lang="en-US" altLang="ko-KR" sz="5400" i="0" spc="100"/>
+              <a:t>hank you</a:t>
+            </a:r>
+            <a:endParaRPr lang="ko-KR" altLang="en-US" sz="5400" i="0" spc="100"/>
+          </a:p>
+        </p:txBody>
+      </p:sp>
+      <p:sp>
+        <p:nvSpPr>
+          <p:cNvPr id="4" name="슬라이드 번호 개체 틀 3">
+            <a:extLst>
+              <a:ext uri="{FF2B5EF4-FFF2-40B4-BE49-F238E27FC236}">
+                <a16:creationId xmlns:a16="http://schemas.microsoft.com/office/drawing/2014/main" id="{6EFC0B50-C677-27B7-56F6-14F7BF9A70A9}"/>
+              </a:ext>
+            </a:extLst>
+          </p:cNvPr>
+          <p:cNvSpPr>
+            <a:spLocks noGrp="1"/>
+          </p:cNvSpPr>
+          <p:nvPr>
+            <p:ph type="sldNum" sz="quarter" idx="12"/>
+          </p:nvPr>
+        </p:nvSpPr>
+        <p:spPr/>
+        <p:txBody>
+          <a:bodyPr/>
+          <a:lstStyle/>
+          <a:p>
+            <a:fld id="{109C872D-39A9-4065-8BF3-6A613116E2A1}" type="slidenum">
+              <a:rPr lang="ko-KR" altLang="en-US" smtClean="0"/>
+              <a:t>37</a:t>
+            </a:fld>
+            <a:endParaRPr lang="ko-KR" altLang="en-US"/>
+          </a:p>
+        </p:txBody>
+      </p:sp>
+    </p:spTree>
+    <p:extLst>
+      <p:ext uri="{BB962C8B-B14F-4D97-AF65-F5344CB8AC3E}">
+        <p14:creationId xmlns:p14="http://schemas.microsoft.com/office/powerpoint/2010/main" val="103939182"/>
       </p:ext>
     </p:extLst>
   </p:cSld>

--- a/에너지경제학/자원에너지경제학_Chapter_4 (원자력).pptx
+++ b/에너지경제학/자원에너지경제학_Chapter_4 (원자력).pptx
@@ -5,7 +5,7 @@
     <p:sldMasterId id="2147483648" r:id="rId1"/>
   </p:sldMasterIdLst>
   <p:notesMasterIdLst>
-    <p:notesMasterId r:id="rId39"/>
+    <p:notesMasterId r:id="rId42"/>
   </p:notesMasterIdLst>
   <p:sldIdLst>
     <p:sldId id="375" r:id="rId2"/>
@@ -39,12 +39,15 @@
     <p:sldId id="628" r:id="rId30"/>
     <p:sldId id="629" r:id="rId31"/>
     <p:sldId id="630" r:id="rId32"/>
-    <p:sldId id="603" r:id="rId33"/>
-    <p:sldId id="605" r:id="rId34"/>
-    <p:sldId id="604" r:id="rId35"/>
-    <p:sldId id="607" r:id="rId36"/>
-    <p:sldId id="606" r:id="rId37"/>
-    <p:sldId id="598" r:id="rId38"/>
+    <p:sldId id="631" r:id="rId33"/>
+    <p:sldId id="632" r:id="rId34"/>
+    <p:sldId id="603" r:id="rId35"/>
+    <p:sldId id="633" r:id="rId36"/>
+    <p:sldId id="605" r:id="rId37"/>
+    <p:sldId id="604" r:id="rId38"/>
+    <p:sldId id="607" r:id="rId39"/>
+    <p:sldId id="606" r:id="rId40"/>
+    <p:sldId id="598" r:id="rId41"/>
   </p:sldIdLst>
   <p:sldSz cx="12192000" cy="6858000"/>
   <p:notesSz cx="6858000" cy="9144000"/>
@@ -255,7 +258,7 @@
           <a:p>
             <a:fld id="{4A5E00EF-AEA4-43E2-9451-8F9C59A39471}" type="datetimeFigureOut">
               <a:rPr lang="ko-KR" altLang="en-US" smtClean="0"/>
-              <a:t>2026-06-19</a:t>
+              <a:t>2026-06-20</a:t>
             </a:fld>
             <a:endParaRPr lang="ko-KR" altLang="en-US"/>
           </a:p>
@@ -677,7 +680,7 @@
           <a:p>
             <a:fld id="{CD32C56F-BD27-4999-9E6D-D4EACE3DA9F4}" type="datetime1">
               <a:rPr lang="ko-KR" altLang="en-US" smtClean="0"/>
-              <a:t>2026-06-19</a:t>
+              <a:t>2026-06-20</a:t>
             </a:fld>
             <a:endParaRPr lang="ko-KR" altLang="en-US"/>
           </a:p>
@@ -891,7 +894,7 @@
           <a:p>
             <a:fld id="{8EF4A19C-72C8-45CA-8E3F-68A7FA345D6C}" type="datetime1">
               <a:rPr lang="ko-KR" altLang="en-US" smtClean="0"/>
-              <a:t>2026-06-19</a:t>
+              <a:t>2026-06-20</a:t>
             </a:fld>
             <a:endParaRPr lang="ko-KR" altLang="en-US"/>
           </a:p>
@@ -1115,7 +1118,7 @@
           <a:p>
             <a:fld id="{56A175B2-010B-4341-954C-5F8F5C70B124}" type="datetime1">
               <a:rPr lang="ko-KR" altLang="en-US" smtClean="0"/>
-              <a:t>2026-06-19</a:t>
+              <a:t>2026-06-20</a:t>
             </a:fld>
             <a:endParaRPr lang="ko-KR" altLang="en-US"/>
           </a:p>
@@ -1329,7 +1332,7 @@
           <a:p>
             <a:fld id="{16B83F9E-22C9-45CA-9E85-070F1D3EF530}" type="datetime1">
               <a:rPr lang="ko-KR" altLang="en-US" smtClean="0"/>
-              <a:t>2026-06-19</a:t>
+              <a:t>2026-06-20</a:t>
             </a:fld>
             <a:endParaRPr lang="ko-KR" altLang="en-US"/>
           </a:p>
@@ -1620,7 +1623,7 @@
           <a:p>
             <a:fld id="{03278F45-FB3C-4C4D-B89A-7BC3F5F229F6}" type="datetime1">
               <a:rPr lang="ko-KR" altLang="en-US" smtClean="0"/>
-              <a:t>2026-06-19</a:t>
+              <a:t>2026-06-20</a:t>
             </a:fld>
             <a:endParaRPr lang="ko-KR" altLang="en-US"/>
           </a:p>
@@ -2013,7 +2016,7 @@
           <a:p>
             <a:fld id="{38FDAC3C-35A6-415C-9F03-738A6AC328B1}" type="datetime1">
               <a:rPr lang="ko-KR" altLang="en-US" smtClean="0"/>
-              <a:t>2026-06-19</a:t>
+              <a:t>2026-06-20</a:t>
             </a:fld>
             <a:endParaRPr lang="ko-KR" altLang="en-US"/>
           </a:p>
@@ -3607,7 +3610,7 @@
           <a:p>
             <a:fld id="{507A0DF1-AEE6-4B0D-89D2-351E7B3EF65C}" type="datetime1">
               <a:rPr lang="ko-KR" altLang="en-US" smtClean="0"/>
-              <a:t>2026-06-19</a:t>
+              <a:t>2026-06-20</a:t>
             </a:fld>
             <a:endParaRPr lang="ko-KR" altLang="en-US"/>
           </a:p>
@@ -4035,7 +4038,7 @@
           <a:p>
             <a:fld id="{CA93B8C9-630F-4D57-944D-04FD37CECCD3}" type="datetime1">
               <a:rPr lang="ko-KR" altLang="en-US" smtClean="0"/>
-              <a:t>2026-06-19</a:t>
+              <a:t>2026-06-20</a:t>
             </a:fld>
             <a:endParaRPr lang="ko-KR" altLang="en-US"/>
           </a:p>
@@ -4192,7 +4195,7 @@
           <a:p>
             <a:fld id="{E986165A-AC43-4902-9541-874ECD310BA3}" type="datetime1">
               <a:rPr lang="ko-KR" altLang="en-US" smtClean="0"/>
-              <a:t>2026-06-19</a:t>
+              <a:t>2026-06-20</a:t>
             </a:fld>
             <a:endParaRPr lang="ko-KR" altLang="en-US"/>
           </a:p>
@@ -4519,7 +4522,7 @@
           <a:p>
             <a:fld id="{47E6EE6D-2B0E-43A9-87A2-7354CDB998F4}" type="datetime1">
               <a:rPr lang="ko-KR" altLang="en-US" smtClean="0"/>
-              <a:t>2026-06-19</a:t>
+              <a:t>2026-06-20</a:t>
             </a:fld>
             <a:endParaRPr lang="ko-KR" altLang="en-US"/>
           </a:p>
@@ -4823,7 +4826,7 @@
           <a:p>
             <a:fld id="{5CC5944E-0BC8-4FAA-9F94-6B4B05834E10}" type="datetime1">
               <a:rPr lang="ko-KR" altLang="en-US" smtClean="0"/>
-              <a:t>2026-06-19</a:t>
+              <a:t>2026-06-20</a:t>
             </a:fld>
             <a:endParaRPr lang="ko-KR" altLang="en-US"/>
           </a:p>
@@ -15409,7 +15412,7 @@
         <p:spPr>
           <a:xfrm>
             <a:off x="288790" y="958844"/>
-            <a:ext cx="11118453" cy="414024"/>
+            <a:ext cx="11118453" cy="4846007"/>
           </a:xfrm>
           <a:prstGeom prst="rect">
             <a:avLst/>
@@ -15430,10 +15433,296 @@
               <a:buChar char="•"/>
             </a:pPr>
             <a:r>
-              <a:rPr lang="ko-KR" altLang="en-US" sz="1600"/>
-              <a:t>ㅇㄴㅇㅇㅇ</a:t>
-            </a:r>
+              <a:rPr lang="ko-KR" altLang="en-US" sz="1600" dirty="0"/>
+              <a:t>원자력 발전의 장기적인 영향은 단순한 발전소 운영의 지속성 측면을 넘어</a:t>
+            </a:r>
+            <a:r>
+              <a:rPr lang="en-US" altLang="ko-KR" sz="1600" dirty="0"/>
+              <a:t>, </a:t>
+            </a:r>
+            <a:r>
+              <a:rPr lang="ko-KR" altLang="en-US" sz="1600" dirty="0"/>
+              <a:t>에너지 시스템</a:t>
+            </a:r>
+            <a:r>
+              <a:rPr lang="en-US" altLang="ko-KR" sz="1600" dirty="0"/>
+              <a:t>, </a:t>
+            </a:r>
+            <a:r>
+              <a:rPr lang="ko-KR" altLang="en-US" sz="1600" dirty="0"/>
+              <a:t>경제구조</a:t>
+            </a:r>
+            <a:r>
+              <a:rPr lang="en-US" altLang="ko-KR" sz="1600" dirty="0"/>
+              <a:t>, </a:t>
+            </a:r>
+            <a:r>
+              <a:rPr lang="ko-KR" altLang="en-US" sz="1600" dirty="0"/>
+              <a:t>환경 및 사회적 수용성에 이르는 다면적 이슈들을 포함한다</a:t>
+            </a:r>
+            <a:r>
+              <a:rPr lang="en-US" altLang="ko-KR" sz="1600" dirty="0"/>
+              <a:t>.</a:t>
+            </a:r>
+          </a:p>
+          <a:p>
+            <a:pPr marL="835025" lvl="1" indent="-285750">
+              <a:lnSpc>
+                <a:spcPct val="150000"/>
+              </a:lnSpc>
+              <a:buFont typeface="Wingdings" panose="05000000000000000000" pitchFamily="2" charset="2"/>
+              <a:buChar char="ü"/>
+            </a:pPr>
+            <a:r>
+              <a:rPr lang="ko-KR" altLang="en-US" sz="1600" dirty="0"/>
+              <a:t>에너지 가격 안정성</a:t>
+            </a:r>
+            <a:r>
+              <a:rPr lang="en-US" altLang="ko-KR" sz="1600" dirty="0"/>
+              <a:t>, </a:t>
+            </a:r>
+            <a:r>
+              <a:rPr lang="ko-KR" altLang="en-US" sz="1600" dirty="0"/>
+              <a:t>폐쇄 비용</a:t>
+            </a:r>
+            <a:r>
+              <a:rPr lang="en-US" altLang="ko-KR" sz="1600" dirty="0"/>
+              <a:t>, </a:t>
+            </a:r>
+            <a:r>
+              <a:rPr lang="ko-KR" altLang="en-US" sz="1600" dirty="0"/>
+              <a:t>에너지 안보</a:t>
+            </a:r>
+            <a:r>
+              <a:rPr lang="en-US" altLang="ko-KR" sz="1600" dirty="0"/>
+              <a:t>, </a:t>
+            </a:r>
+            <a:r>
+              <a:rPr lang="ko-KR" altLang="en-US" sz="1600" dirty="0"/>
+              <a:t>지역 및 국가 경제에 대한 효과</a:t>
+            </a:r>
+            <a:r>
+              <a:rPr lang="en-US" altLang="ko-KR" sz="1600" dirty="0"/>
+              <a:t>, </a:t>
+            </a:r>
+            <a:r>
+              <a:rPr lang="ko-KR" altLang="en-US" sz="1600" dirty="0"/>
+              <a:t>환경적</a:t>
+            </a:r>
+            <a:r>
+              <a:rPr lang="en-US" altLang="ko-KR" sz="1600" dirty="0"/>
+              <a:t>·</a:t>
+            </a:r>
+            <a:r>
+              <a:rPr lang="ko-KR" altLang="en-US" sz="1600" dirty="0"/>
+              <a:t>사회적 비용</a:t>
+            </a:r>
+            <a:r>
+              <a:rPr lang="en-US" altLang="ko-KR" sz="1600" dirty="0"/>
+              <a:t>, </a:t>
+            </a:r>
+            <a:r>
+              <a:rPr lang="ko-KR" altLang="en-US" sz="1600" dirty="0"/>
+              <a:t>그리고 장기 인프라 투자 측면에서 중요한 논의점을 제공한다</a:t>
+            </a:r>
+            <a:r>
+              <a:rPr lang="en-US" altLang="ko-KR" sz="1600" dirty="0"/>
+              <a:t>.</a:t>
+            </a:r>
+          </a:p>
+          <a:p>
+            <a:pPr marL="835025" lvl="1" indent="-285750">
+              <a:lnSpc>
+                <a:spcPct val="150000"/>
+              </a:lnSpc>
+              <a:buFont typeface="Wingdings" panose="05000000000000000000" pitchFamily="2" charset="2"/>
+              <a:buChar char="ü"/>
+            </a:pPr>
             <a:endParaRPr lang="en-US" altLang="ko-KR" sz="1600" dirty="0"/>
+          </a:p>
+          <a:p>
+            <a:pPr marL="377825" indent="-285750">
+              <a:lnSpc>
+                <a:spcPct val="150000"/>
+              </a:lnSpc>
+              <a:buFont typeface="Arial" panose="020B0604020202020204" pitchFamily="34" charset="0"/>
+              <a:buChar char="•"/>
+            </a:pPr>
+            <a:r>
+              <a:rPr lang="ko-KR" altLang="en-US" sz="1600" dirty="0"/>
+              <a:t>첫째</a:t>
+            </a:r>
+            <a:r>
+              <a:rPr lang="en-US" altLang="ko-KR" sz="1600" dirty="0"/>
+              <a:t>, </a:t>
+            </a:r>
+            <a:r>
+              <a:rPr lang="ko-KR" altLang="en-US" sz="1600" dirty="0"/>
+              <a:t>원자력 발전은 장기적인 에너지 가격의 안정성에 기여한다</a:t>
+            </a:r>
+            <a:r>
+              <a:rPr lang="en-US" altLang="ko-KR" sz="1600" dirty="0"/>
+              <a:t>. </a:t>
+            </a:r>
+          </a:p>
+          <a:p>
+            <a:pPr marL="835025" lvl="1" indent="-285750">
+              <a:lnSpc>
+                <a:spcPct val="150000"/>
+              </a:lnSpc>
+              <a:buFont typeface="Wingdings" panose="05000000000000000000" pitchFamily="2" charset="2"/>
+              <a:buChar char="ü"/>
+            </a:pPr>
+            <a:r>
+              <a:rPr lang="ko-KR" altLang="en-US" sz="1600" dirty="0"/>
+              <a:t>연료비용이 전체 발전 비용에서 차지하는 비중이 낮고</a:t>
+            </a:r>
+            <a:r>
+              <a:rPr lang="en-US" altLang="ko-KR" sz="1600" dirty="0"/>
+              <a:t>, </a:t>
+            </a:r>
+            <a:r>
+              <a:rPr lang="ko-KR" altLang="en-US" sz="1600" dirty="0"/>
+              <a:t>우라늄 가격이 화석연료 가격에 비해 안정적이다</a:t>
+            </a:r>
+            <a:r>
+              <a:rPr lang="en-US" altLang="ko-KR" sz="1600" dirty="0"/>
+              <a:t>.</a:t>
+            </a:r>
+          </a:p>
+          <a:p>
+            <a:pPr marL="835025" lvl="1" indent="-285750">
+              <a:lnSpc>
+                <a:spcPct val="150000"/>
+              </a:lnSpc>
+              <a:buFont typeface="Wingdings" panose="05000000000000000000" pitchFamily="2" charset="2"/>
+              <a:buChar char="ü"/>
+            </a:pPr>
+            <a:r>
+              <a:rPr lang="ko-KR" altLang="en-US" sz="1600" dirty="0"/>
+              <a:t>이러한 특성은 수십 </a:t>
+            </a:r>
+            <a:r>
+              <a:rPr lang="ko-KR" altLang="en-US" sz="1600" dirty="0" err="1"/>
+              <a:t>년간의</a:t>
+            </a:r>
+            <a:r>
+              <a:rPr lang="ko-KR" altLang="en-US" sz="1600" dirty="0"/>
+              <a:t> 운영 기간 동안 전력 공급 비용의 예측 가능성을 높이며</a:t>
+            </a:r>
+            <a:r>
+              <a:rPr lang="en-US" altLang="ko-KR" sz="1600" dirty="0"/>
+              <a:t>, </a:t>
+            </a:r>
+            <a:r>
+              <a:rPr lang="ko-KR" altLang="en-US" sz="1600" dirty="0"/>
+              <a:t>국제 연료시장 가격 급등락으로부터 일정 부분 독립적인 가격구조를 가능하게 한다</a:t>
+            </a:r>
+            <a:r>
+              <a:rPr lang="en-US" altLang="ko-KR" sz="1600" dirty="0"/>
+              <a:t>.</a:t>
+            </a:r>
+          </a:p>
+          <a:p>
+            <a:pPr marL="835025" lvl="1" indent="-285750">
+              <a:lnSpc>
+                <a:spcPct val="150000"/>
+              </a:lnSpc>
+              <a:buFont typeface="Wingdings" panose="05000000000000000000" pitchFamily="2" charset="2"/>
+              <a:buChar char="ü"/>
+            </a:pPr>
+            <a:endParaRPr lang="en-US" altLang="ko-KR" sz="1600" dirty="0"/>
+          </a:p>
+          <a:p>
+            <a:pPr marL="377825" indent="-285750">
+              <a:lnSpc>
+                <a:spcPct val="150000"/>
+              </a:lnSpc>
+              <a:buFont typeface="Arial" panose="020B0604020202020204" pitchFamily="34" charset="0"/>
+              <a:buChar char="•"/>
+            </a:pPr>
+            <a:r>
+              <a:rPr lang="ko-KR" altLang="en-US" sz="1600" dirty="0"/>
+              <a:t>둘째</a:t>
+            </a:r>
+            <a:r>
+              <a:rPr lang="en-US" altLang="ko-KR" sz="1600" dirty="0"/>
+              <a:t>, </a:t>
+            </a:r>
+            <a:r>
+              <a:rPr lang="ko-KR" altLang="en-US" sz="1600" dirty="0"/>
+              <a:t>원자력 발전소의 폐쇄는 장기적인 재정적 도전과제를 수반한다</a:t>
+            </a:r>
+            <a:r>
+              <a:rPr lang="en-US" altLang="ko-KR" sz="1600" dirty="0"/>
+              <a:t>.</a:t>
+            </a:r>
+          </a:p>
+          <a:p>
+            <a:pPr marL="835025" lvl="1" indent="-285750">
+              <a:lnSpc>
+                <a:spcPct val="150000"/>
+              </a:lnSpc>
+              <a:buFont typeface="Wingdings" panose="05000000000000000000" pitchFamily="2" charset="2"/>
+              <a:buChar char="ü"/>
+            </a:pPr>
+            <a:r>
+              <a:rPr lang="ko-KR" altLang="en-US" sz="1600" dirty="0"/>
+              <a:t>발전소 폐쇄는 운영 중단</a:t>
+            </a:r>
+            <a:r>
+              <a:rPr lang="en-US" altLang="ko-KR" sz="1600" dirty="0"/>
+              <a:t>, </a:t>
+            </a:r>
+            <a:r>
+              <a:rPr lang="ko-KR" altLang="en-US" sz="1600" dirty="0"/>
+              <a:t>원자로 해체</a:t>
+            </a:r>
+            <a:r>
+              <a:rPr lang="en-US" altLang="ko-KR" sz="1600" dirty="0"/>
+              <a:t>, </a:t>
+            </a:r>
+            <a:r>
+              <a:rPr lang="ko-KR" altLang="en-US" sz="1600" dirty="0"/>
+              <a:t>방사성 물질 처리 및 폐기 등 기술적 복잡성과 고비용 구조를 지닌다</a:t>
+            </a:r>
+            <a:r>
+              <a:rPr lang="en-US" altLang="ko-KR" sz="1600" dirty="0"/>
+              <a:t>.</a:t>
+            </a:r>
+          </a:p>
+          <a:p>
+            <a:pPr marL="835025" lvl="1" indent="-285750">
+              <a:lnSpc>
+                <a:spcPct val="150000"/>
+              </a:lnSpc>
+              <a:buFont typeface="Wingdings" panose="05000000000000000000" pitchFamily="2" charset="2"/>
+              <a:buChar char="ü"/>
+            </a:pPr>
+            <a:r>
+              <a:rPr lang="ko-KR" altLang="en-US" sz="1600" dirty="0"/>
+              <a:t>초기자본의 </a:t>
+            </a:r>
+            <a:r>
+              <a:rPr lang="en-US" altLang="ko-KR" sz="1600" dirty="0"/>
+              <a:t>10~15%</a:t>
+            </a:r>
+            <a:r>
+              <a:rPr lang="ko-KR" altLang="en-US" sz="1600" dirty="0"/>
+              <a:t>에 해당하는 지출이 필요하고</a:t>
+            </a:r>
+            <a:r>
+              <a:rPr lang="en-US" altLang="ko-KR" sz="1600" dirty="0"/>
+              <a:t>, </a:t>
+            </a:r>
+            <a:r>
+              <a:rPr lang="ko-KR" altLang="en-US" sz="1600" dirty="0"/>
+              <a:t>별도의 기금 마련이 요구된다</a:t>
+            </a:r>
+            <a:r>
+              <a:rPr lang="en-US" altLang="ko-KR" sz="1600" dirty="0"/>
+              <a:t>.</a:t>
+            </a:r>
           </a:p>
         </p:txBody>
       </p:sp>
@@ -15451,6 +15740,674 @@
 </file>
 
 <file path=ppt/slides/slide32.xml><?xml version="1.0" encoding="utf-8"?>
+<p:sld xmlns:a="http://schemas.openxmlformats.org/drawingml/2006/main" xmlns:r="http://schemas.openxmlformats.org/officeDocument/2006/relationships" xmlns:p="http://schemas.openxmlformats.org/presentationml/2006/main">
+  <p:cSld>
+    <p:spTree>
+      <p:nvGrpSpPr>
+        <p:cNvPr id="1" name="">
+          <a:extLst>
+            <a:ext uri="{FF2B5EF4-FFF2-40B4-BE49-F238E27FC236}">
+              <a16:creationId xmlns:a16="http://schemas.microsoft.com/office/drawing/2014/main" id="{F27745AE-6205-9B22-E9F7-4C77D1104154}"/>
+            </a:ext>
+          </a:extLst>
+        </p:cNvPr>
+        <p:cNvGrpSpPr/>
+        <p:nvPr/>
+      </p:nvGrpSpPr>
+      <p:grpSpPr>
+        <a:xfrm>
+          <a:off x="0" y="0"/>
+          <a:ext cx="0" cy="0"/>
+          <a:chOff x="0" y="0"/>
+          <a:chExt cx="0" cy="0"/>
+        </a:xfrm>
+      </p:grpSpPr>
+      <p:sp>
+        <p:nvSpPr>
+          <p:cNvPr id="2" name="제목 1">
+            <a:extLst>
+              <a:ext uri="{FF2B5EF4-FFF2-40B4-BE49-F238E27FC236}">
+                <a16:creationId xmlns:a16="http://schemas.microsoft.com/office/drawing/2014/main" id="{1DF3D2BB-7DF2-9470-4968-1540FD5BEF17}"/>
+              </a:ext>
+            </a:extLst>
+          </p:cNvPr>
+          <p:cNvSpPr>
+            <a:spLocks noGrp="1"/>
+          </p:cNvSpPr>
+          <p:nvPr>
+            <p:ph type="title"/>
+          </p:nvPr>
+        </p:nvSpPr>
+        <p:spPr/>
+        <p:txBody>
+          <a:bodyPr/>
+          <a:lstStyle/>
+          <a:p>
+            <a:r>
+              <a:rPr lang="ko-KR" altLang="en-US" dirty="0"/>
+              <a:t>원자력 발전의 장기적인 경제적 영향</a:t>
+            </a:r>
+          </a:p>
+        </p:txBody>
+      </p:sp>
+      <p:sp>
+        <p:nvSpPr>
+          <p:cNvPr id="4" name="슬라이드 번호 개체 틀 3">
+            <a:extLst>
+              <a:ext uri="{FF2B5EF4-FFF2-40B4-BE49-F238E27FC236}">
+                <a16:creationId xmlns:a16="http://schemas.microsoft.com/office/drawing/2014/main" id="{78BFF85A-06C2-2BCA-E93C-AF967D792F31}"/>
+              </a:ext>
+            </a:extLst>
+          </p:cNvPr>
+          <p:cNvSpPr>
+            <a:spLocks noGrp="1"/>
+          </p:cNvSpPr>
+          <p:nvPr>
+            <p:ph type="sldNum" sz="quarter" idx="12"/>
+          </p:nvPr>
+        </p:nvSpPr>
+        <p:spPr/>
+        <p:txBody>
+          <a:bodyPr/>
+          <a:lstStyle/>
+          <a:p>
+            <a:fld id="{109C872D-39A9-4065-8BF3-6A613116E2A1}" type="slidenum">
+              <a:rPr lang="ko-KR" altLang="en-US" smtClean="0"/>
+              <a:t>32</a:t>
+            </a:fld>
+            <a:endParaRPr lang="ko-KR" altLang="en-US"/>
+          </a:p>
+        </p:txBody>
+      </p:sp>
+      <p:sp>
+        <p:nvSpPr>
+          <p:cNvPr id="3" name="TextBox 2">
+            <a:extLst>
+              <a:ext uri="{FF2B5EF4-FFF2-40B4-BE49-F238E27FC236}">
+                <a16:creationId xmlns:a16="http://schemas.microsoft.com/office/drawing/2014/main" id="{3B3CC7D4-F372-C032-0CC7-DFC24F09AB7E}"/>
+              </a:ext>
+            </a:extLst>
+          </p:cNvPr>
+          <p:cNvSpPr txBox="1"/>
+          <p:nvPr/>
+        </p:nvSpPr>
+        <p:spPr>
+          <a:xfrm>
+            <a:off x="288790" y="958844"/>
+            <a:ext cx="11118453" cy="4476675"/>
+          </a:xfrm>
+          <a:prstGeom prst="rect">
+            <a:avLst/>
+          </a:prstGeom>
+          <a:noFill/>
+        </p:spPr>
+        <p:txBody>
+          <a:bodyPr wrap="square" rtlCol="0" anchor="t">
+            <a:spAutoFit/>
+          </a:bodyPr>
+          <a:lstStyle/>
+          <a:p>
+            <a:pPr marL="377825" indent="-285750">
+              <a:lnSpc>
+                <a:spcPct val="150000"/>
+              </a:lnSpc>
+              <a:buFont typeface="Arial" panose="020B0604020202020204" pitchFamily="34" charset="0"/>
+              <a:buChar char="•"/>
+            </a:pPr>
+            <a:r>
+              <a:rPr lang="ko-KR" altLang="en-US" sz="1600" dirty="0"/>
+              <a:t>셋째</a:t>
+            </a:r>
+            <a:r>
+              <a:rPr lang="en-US" altLang="ko-KR" sz="1600" dirty="0"/>
+              <a:t>, </a:t>
+            </a:r>
+            <a:r>
+              <a:rPr lang="ko-KR" altLang="en-US" sz="1600" dirty="0"/>
+              <a:t>원자력 발전은 국가의 에너지 안보 강화에 기여한다</a:t>
+            </a:r>
+            <a:r>
+              <a:rPr lang="en-US" altLang="ko-KR" sz="1600" dirty="0"/>
+              <a:t>. </a:t>
+            </a:r>
+          </a:p>
+          <a:p>
+            <a:pPr marL="835025" lvl="1" indent="-285750">
+              <a:lnSpc>
+                <a:spcPct val="150000"/>
+              </a:lnSpc>
+              <a:buFont typeface="Wingdings" panose="05000000000000000000" pitchFamily="2" charset="2"/>
+              <a:buChar char="ü"/>
+            </a:pPr>
+            <a:r>
+              <a:rPr lang="ko-KR" altLang="en-US" sz="1600" dirty="0"/>
+              <a:t>수입 화석연료에 대한 의존도를 낮추고</a:t>
+            </a:r>
+            <a:r>
+              <a:rPr lang="en-US" altLang="ko-KR" sz="1600" dirty="0"/>
+              <a:t>, </a:t>
+            </a:r>
+            <a:r>
+              <a:rPr lang="ko-KR" altLang="en-US" sz="1600" dirty="0"/>
+              <a:t>안정적이고 예측 가능한 기저부하 전원을 제공한다</a:t>
+            </a:r>
+            <a:r>
+              <a:rPr lang="en-US" altLang="ko-KR" sz="1600" dirty="0"/>
+              <a:t>.</a:t>
+            </a:r>
+          </a:p>
+          <a:p>
+            <a:pPr marL="835025" lvl="1" indent="-285750">
+              <a:lnSpc>
+                <a:spcPct val="150000"/>
+              </a:lnSpc>
+              <a:buFont typeface="Wingdings" panose="05000000000000000000" pitchFamily="2" charset="2"/>
+              <a:buChar char="ü"/>
+            </a:pPr>
+            <a:r>
+              <a:rPr lang="ko-KR" altLang="en-US" sz="1600" dirty="0"/>
+              <a:t>국제 에너지 시장의 변동성에 대한 노출을 줄이고</a:t>
+            </a:r>
+            <a:r>
+              <a:rPr lang="en-US" altLang="ko-KR" sz="1600" dirty="0"/>
+              <a:t>, </a:t>
+            </a:r>
+            <a:r>
+              <a:rPr lang="ko-KR" altLang="en-US" sz="1600" dirty="0"/>
+              <a:t>자급적인 에너지 시스템을 구축할 수 있다</a:t>
+            </a:r>
+            <a:r>
+              <a:rPr lang="en-US" altLang="ko-KR" sz="1600" dirty="0"/>
+              <a:t>.</a:t>
+            </a:r>
+          </a:p>
+          <a:p>
+            <a:pPr marL="835025" lvl="1" indent="-285750">
+              <a:lnSpc>
+                <a:spcPct val="150000"/>
+              </a:lnSpc>
+              <a:buFont typeface="Wingdings" panose="05000000000000000000" pitchFamily="2" charset="2"/>
+              <a:buChar char="ü"/>
+            </a:pPr>
+            <a:r>
+              <a:rPr lang="ko-KR" altLang="en-US" sz="1600" dirty="0"/>
+              <a:t>에너지 자원이 제한적인 국가에게는 원자력이 에너지 믹스 다변화의 전략적 수단으로 작용할 수 있다</a:t>
+            </a:r>
+            <a:r>
+              <a:rPr lang="en-US" altLang="ko-KR" sz="1600" dirty="0"/>
+              <a:t>.</a:t>
+            </a:r>
+          </a:p>
+          <a:p>
+            <a:pPr marL="835025" lvl="1" indent="-285750">
+              <a:lnSpc>
+                <a:spcPct val="150000"/>
+              </a:lnSpc>
+              <a:buFont typeface="Wingdings" panose="05000000000000000000" pitchFamily="2" charset="2"/>
+              <a:buChar char="ü"/>
+            </a:pPr>
+            <a:endParaRPr lang="en-US" altLang="ko-KR" sz="1600" dirty="0"/>
+          </a:p>
+          <a:p>
+            <a:pPr marL="377825" indent="-285750">
+              <a:lnSpc>
+                <a:spcPct val="150000"/>
+              </a:lnSpc>
+              <a:buFont typeface="Arial" panose="020B0604020202020204" pitchFamily="34" charset="0"/>
+              <a:buChar char="•"/>
+            </a:pPr>
+            <a:r>
+              <a:rPr lang="ko-KR" altLang="en-US" sz="1600" dirty="0"/>
+              <a:t>넷째</a:t>
+            </a:r>
+            <a:r>
+              <a:rPr lang="en-US" altLang="ko-KR" sz="1600" dirty="0"/>
+              <a:t>, </a:t>
+            </a:r>
+            <a:r>
+              <a:rPr lang="ko-KR" altLang="en-US" sz="1600" dirty="0"/>
+              <a:t>원자력 발전소는 지역과 국가 경제에 장기적으로 긍정적인 영향을 미치는 대규모 인프라 프로젝트이다</a:t>
+            </a:r>
+            <a:r>
+              <a:rPr lang="en-US" altLang="ko-KR" sz="1600" dirty="0"/>
+              <a:t>.</a:t>
+            </a:r>
+          </a:p>
+          <a:p>
+            <a:pPr marL="835025" lvl="1" indent="-285750">
+              <a:lnSpc>
+                <a:spcPct val="150000"/>
+              </a:lnSpc>
+              <a:buFont typeface="Wingdings" panose="05000000000000000000" pitchFamily="2" charset="2"/>
+              <a:buChar char="ü"/>
+            </a:pPr>
+            <a:r>
+              <a:rPr lang="ko-KR" altLang="en-US" sz="1600" dirty="0"/>
+              <a:t>발전소 건설과 운영은 직접적인 고용을 창출하고</a:t>
+            </a:r>
+            <a:r>
+              <a:rPr lang="en-US" altLang="ko-KR" sz="1600" dirty="0"/>
+              <a:t>, </a:t>
+            </a:r>
+            <a:r>
+              <a:rPr lang="ko-KR" altLang="en-US" sz="1600" dirty="0"/>
+              <a:t>관련 지역에서 기술 기반 산업과 공급망을 촉진하는 효과를 유발한다</a:t>
+            </a:r>
+            <a:r>
+              <a:rPr lang="en-US" altLang="ko-KR" sz="1600" dirty="0"/>
+              <a:t>.</a:t>
+            </a:r>
+          </a:p>
+          <a:p>
+            <a:pPr marL="835025" lvl="1" indent="-285750">
+              <a:lnSpc>
+                <a:spcPct val="150000"/>
+              </a:lnSpc>
+              <a:buFont typeface="Wingdings" panose="05000000000000000000" pitchFamily="2" charset="2"/>
+              <a:buChar char="ü"/>
+            </a:pPr>
+            <a:r>
+              <a:rPr lang="ko-KR" altLang="en-US" sz="1600" dirty="0"/>
+              <a:t>원자력 발전소는 연간 이용률이 </a:t>
+            </a:r>
+            <a:r>
+              <a:rPr lang="en-US" altLang="ko-KR" sz="1600" dirty="0"/>
+              <a:t>80~90%</a:t>
+            </a:r>
+            <a:r>
+              <a:rPr lang="ko-KR" altLang="en-US" sz="1600" dirty="0"/>
+              <a:t>에 이르는 고정적 전력 공급을 제공하여 에너지 집약적 산업의 안정성과 성장 기반을 마련하는데 기여한다</a:t>
+            </a:r>
+            <a:r>
+              <a:rPr lang="en-US" altLang="ko-KR" sz="1600" dirty="0"/>
+              <a:t>.</a:t>
+            </a:r>
+          </a:p>
+          <a:p>
+            <a:pPr marL="835025" lvl="1" indent="-285750">
+              <a:lnSpc>
+                <a:spcPct val="150000"/>
+              </a:lnSpc>
+              <a:buFont typeface="Wingdings" panose="05000000000000000000" pitchFamily="2" charset="2"/>
+              <a:buChar char="ü"/>
+            </a:pPr>
+            <a:endParaRPr lang="en-US" altLang="ko-KR" sz="1600" dirty="0"/>
+          </a:p>
+          <a:p>
+            <a:pPr marL="835025" lvl="1" indent="-285750">
+              <a:lnSpc>
+                <a:spcPct val="150000"/>
+              </a:lnSpc>
+              <a:buFont typeface="Wingdings" panose="05000000000000000000" pitchFamily="2" charset="2"/>
+              <a:buChar char="ü"/>
+            </a:pPr>
+            <a:endParaRPr lang="en-US" altLang="ko-KR" sz="1600" dirty="0"/>
+          </a:p>
+        </p:txBody>
+      </p:sp>
+    </p:spTree>
+    <p:extLst>
+      <p:ext uri="{BB962C8B-B14F-4D97-AF65-F5344CB8AC3E}">
+        <p14:creationId xmlns:p14="http://schemas.microsoft.com/office/powerpoint/2010/main" val="2615032519"/>
+      </p:ext>
+    </p:extLst>
+  </p:cSld>
+  <p:clrMapOvr>
+    <a:masterClrMapping/>
+  </p:clrMapOvr>
+</p:sld>
+</file>
+
+<file path=ppt/slides/slide33.xml><?xml version="1.0" encoding="utf-8"?>
+<p:sld xmlns:a="http://schemas.openxmlformats.org/drawingml/2006/main" xmlns:r="http://schemas.openxmlformats.org/officeDocument/2006/relationships" xmlns:p="http://schemas.openxmlformats.org/presentationml/2006/main">
+  <p:cSld>
+    <p:spTree>
+      <p:nvGrpSpPr>
+        <p:cNvPr id="1" name="">
+          <a:extLst>
+            <a:ext uri="{FF2B5EF4-FFF2-40B4-BE49-F238E27FC236}">
+              <a16:creationId xmlns:a16="http://schemas.microsoft.com/office/drawing/2014/main" id="{057F9CE1-2F99-FD61-C0B6-0D645E240A00}"/>
+            </a:ext>
+          </a:extLst>
+        </p:cNvPr>
+        <p:cNvGrpSpPr/>
+        <p:nvPr/>
+      </p:nvGrpSpPr>
+      <p:grpSpPr>
+        <a:xfrm>
+          <a:off x="0" y="0"/>
+          <a:ext cx="0" cy="0"/>
+          <a:chOff x="0" y="0"/>
+          <a:chExt cx="0" cy="0"/>
+        </a:xfrm>
+      </p:grpSpPr>
+      <p:sp>
+        <p:nvSpPr>
+          <p:cNvPr id="2" name="제목 1">
+            <a:extLst>
+              <a:ext uri="{FF2B5EF4-FFF2-40B4-BE49-F238E27FC236}">
+                <a16:creationId xmlns:a16="http://schemas.microsoft.com/office/drawing/2014/main" id="{93DCAD09-C15A-71BE-6B3F-B90067FE1291}"/>
+              </a:ext>
+            </a:extLst>
+          </p:cNvPr>
+          <p:cNvSpPr>
+            <a:spLocks noGrp="1"/>
+          </p:cNvSpPr>
+          <p:nvPr>
+            <p:ph type="title"/>
+          </p:nvPr>
+        </p:nvSpPr>
+        <p:spPr/>
+        <p:txBody>
+          <a:bodyPr/>
+          <a:lstStyle/>
+          <a:p>
+            <a:r>
+              <a:rPr lang="ko-KR" altLang="en-US" dirty="0"/>
+              <a:t>원자력 발전의 장기적인 경제적 영향</a:t>
+            </a:r>
+          </a:p>
+        </p:txBody>
+      </p:sp>
+      <p:sp>
+        <p:nvSpPr>
+          <p:cNvPr id="4" name="슬라이드 번호 개체 틀 3">
+            <a:extLst>
+              <a:ext uri="{FF2B5EF4-FFF2-40B4-BE49-F238E27FC236}">
+                <a16:creationId xmlns:a16="http://schemas.microsoft.com/office/drawing/2014/main" id="{0B43699F-7B38-C451-47D4-27E0011C2ABD}"/>
+              </a:ext>
+            </a:extLst>
+          </p:cNvPr>
+          <p:cNvSpPr>
+            <a:spLocks noGrp="1"/>
+          </p:cNvSpPr>
+          <p:nvPr>
+            <p:ph type="sldNum" sz="quarter" idx="12"/>
+          </p:nvPr>
+        </p:nvSpPr>
+        <p:spPr/>
+        <p:txBody>
+          <a:bodyPr/>
+          <a:lstStyle/>
+          <a:p>
+            <a:fld id="{109C872D-39A9-4065-8BF3-6A613116E2A1}" type="slidenum">
+              <a:rPr lang="ko-KR" altLang="en-US" smtClean="0"/>
+              <a:t>33</a:t>
+            </a:fld>
+            <a:endParaRPr lang="ko-KR" altLang="en-US"/>
+          </a:p>
+        </p:txBody>
+      </p:sp>
+      <p:sp>
+        <p:nvSpPr>
+          <p:cNvPr id="3" name="TextBox 2">
+            <a:extLst>
+              <a:ext uri="{FF2B5EF4-FFF2-40B4-BE49-F238E27FC236}">
+                <a16:creationId xmlns:a16="http://schemas.microsoft.com/office/drawing/2014/main" id="{EE6D683C-35B8-1AD6-D715-D34630C8BB7D}"/>
+              </a:ext>
+            </a:extLst>
+          </p:cNvPr>
+          <p:cNvSpPr txBox="1"/>
+          <p:nvPr/>
+        </p:nvSpPr>
+        <p:spPr>
+          <a:xfrm>
+            <a:off x="288790" y="958844"/>
+            <a:ext cx="11118453" cy="4107343"/>
+          </a:xfrm>
+          <a:prstGeom prst="rect">
+            <a:avLst/>
+          </a:prstGeom>
+          <a:noFill/>
+        </p:spPr>
+        <p:txBody>
+          <a:bodyPr wrap="square" rtlCol="0" anchor="t">
+            <a:spAutoFit/>
+          </a:bodyPr>
+          <a:lstStyle/>
+          <a:p>
+            <a:pPr marL="377825" indent="-285750">
+              <a:lnSpc>
+                <a:spcPct val="150000"/>
+              </a:lnSpc>
+              <a:buFont typeface="Arial" panose="020B0604020202020204" pitchFamily="34" charset="0"/>
+              <a:buChar char="•"/>
+            </a:pPr>
+            <a:r>
+              <a:rPr lang="ko-KR" altLang="en-US" sz="1600" dirty="0"/>
+              <a:t>다섯째</a:t>
+            </a:r>
+            <a:r>
+              <a:rPr lang="en-US" altLang="ko-KR" sz="1600" dirty="0"/>
+              <a:t>, </a:t>
+            </a:r>
+            <a:r>
+              <a:rPr lang="ko-KR" altLang="en-US" sz="1600" dirty="0"/>
+              <a:t>이러한 경제적 이점에도 불구하고 원자력 발전은 장기적인 환경적 및 사회적 비용을 수반한다</a:t>
+            </a:r>
+            <a:r>
+              <a:rPr lang="en-US" altLang="ko-KR" sz="1600" dirty="0"/>
+              <a:t>.</a:t>
+            </a:r>
+          </a:p>
+          <a:p>
+            <a:pPr marL="835025" lvl="1" indent="-285750">
+              <a:lnSpc>
+                <a:spcPct val="150000"/>
+              </a:lnSpc>
+              <a:buFont typeface="Wingdings" panose="05000000000000000000" pitchFamily="2" charset="2"/>
+              <a:buChar char="ü"/>
+            </a:pPr>
+            <a:r>
+              <a:rPr lang="ko-KR" altLang="en-US" sz="1600" dirty="0"/>
+              <a:t>방사성 폐기물의 안전한 장기 처분 문제</a:t>
+            </a:r>
+            <a:r>
+              <a:rPr lang="en-US" altLang="ko-KR" sz="1600" dirty="0"/>
+              <a:t>, </a:t>
+            </a:r>
+            <a:r>
+              <a:rPr lang="ko-KR" altLang="en-US" sz="1600" dirty="0"/>
+              <a:t>원전 사고의 발생가능성은 낮지만 치명적인 위험</a:t>
+            </a:r>
+            <a:r>
+              <a:rPr lang="en-US" altLang="ko-KR" sz="1600" dirty="0"/>
+              <a:t>, </a:t>
+            </a:r>
+            <a:r>
+              <a:rPr lang="ko-KR" altLang="en-US" sz="1600" dirty="0"/>
+              <a:t>생태계이 미치는 영향</a:t>
+            </a:r>
+            <a:r>
+              <a:rPr lang="en-US" altLang="ko-KR" sz="1600" dirty="0"/>
+              <a:t> </a:t>
+            </a:r>
+            <a:r>
+              <a:rPr lang="ko-KR" altLang="en-US" sz="1600" dirty="0"/>
+              <a:t>등이 중요한 외부비용이다</a:t>
+            </a:r>
+            <a:r>
+              <a:rPr lang="en-US" altLang="ko-KR" sz="1600" dirty="0"/>
+              <a:t>.</a:t>
+            </a:r>
+          </a:p>
+          <a:p>
+            <a:pPr marL="835025" lvl="1" indent="-285750">
+              <a:lnSpc>
+                <a:spcPct val="150000"/>
+              </a:lnSpc>
+              <a:buFont typeface="Wingdings" panose="05000000000000000000" pitchFamily="2" charset="2"/>
+              <a:buChar char="ü"/>
+            </a:pPr>
+            <a:r>
+              <a:rPr lang="ko-KR" altLang="en-US" sz="1600" dirty="0"/>
+              <a:t>이로 인한 엄격한 규제를 받고</a:t>
+            </a:r>
+            <a:r>
+              <a:rPr lang="en-US" altLang="ko-KR" sz="1600" dirty="0"/>
+              <a:t>, </a:t>
+            </a:r>
+            <a:r>
+              <a:rPr lang="ko-KR" altLang="en-US" sz="1600" dirty="0"/>
+              <a:t>사회적 수용성 부족으로 추가 비용 발생 가능성도 존재한다</a:t>
+            </a:r>
+            <a:r>
+              <a:rPr lang="en-US" altLang="ko-KR" sz="1600" dirty="0"/>
+              <a:t>.</a:t>
+            </a:r>
+          </a:p>
+          <a:p>
+            <a:pPr marL="835025" lvl="1" indent="-285750">
+              <a:lnSpc>
+                <a:spcPct val="150000"/>
+              </a:lnSpc>
+              <a:buFont typeface="Wingdings" panose="05000000000000000000" pitchFamily="2" charset="2"/>
+              <a:buChar char="ü"/>
+            </a:pPr>
+            <a:r>
+              <a:rPr lang="ko-KR" altLang="en-US" sz="1600" dirty="0"/>
+              <a:t>사고 발생 시의 경제적 피해는 수십년 이상 지속될 수 있고</a:t>
+            </a:r>
+            <a:r>
+              <a:rPr lang="en-US" altLang="ko-KR" sz="1600" dirty="0"/>
+              <a:t>, </a:t>
+            </a:r>
+            <a:r>
+              <a:rPr lang="ko-KR" altLang="en-US" sz="1600" dirty="0"/>
+              <a:t>전통적인 비용</a:t>
+            </a:r>
+            <a:r>
+              <a:rPr lang="en-US" altLang="ko-KR" sz="1600" dirty="0"/>
+              <a:t>-</a:t>
+            </a:r>
+            <a:r>
+              <a:rPr lang="ko-KR" altLang="en-US" sz="1600" dirty="0"/>
+              <a:t>편익 분석을 넘어서는 잠재적 리스크가 된다</a:t>
+            </a:r>
+            <a:r>
+              <a:rPr lang="en-US" altLang="ko-KR" sz="1600" dirty="0"/>
+              <a:t>.</a:t>
+            </a:r>
+          </a:p>
+          <a:p>
+            <a:pPr marL="835025" lvl="1" indent="-285750">
+              <a:lnSpc>
+                <a:spcPct val="150000"/>
+              </a:lnSpc>
+              <a:buFont typeface="Wingdings" panose="05000000000000000000" pitchFamily="2" charset="2"/>
+              <a:buChar char="ü"/>
+            </a:pPr>
+            <a:endParaRPr lang="en-US" altLang="ko-KR" sz="1600" dirty="0"/>
+          </a:p>
+          <a:p>
+            <a:pPr marL="377825" indent="-285750">
+              <a:lnSpc>
+                <a:spcPct val="150000"/>
+              </a:lnSpc>
+              <a:buFont typeface="Arial" panose="020B0604020202020204" pitchFamily="34" charset="0"/>
+              <a:buChar char="•"/>
+            </a:pPr>
+            <a:r>
+              <a:rPr lang="ko-KR" altLang="en-US" sz="1600" dirty="0"/>
+              <a:t>마지막으로</a:t>
+            </a:r>
+            <a:r>
+              <a:rPr lang="en-US" altLang="ko-KR" sz="1600" dirty="0"/>
+              <a:t>, </a:t>
+            </a:r>
+            <a:r>
+              <a:rPr lang="ko-KR" altLang="en-US" sz="1600" dirty="0"/>
+              <a:t>원자력 발전소는 </a:t>
+            </a:r>
+            <a:r>
+              <a:rPr lang="en-US" altLang="ko-KR" sz="1600" dirty="0"/>
+              <a:t>40~60</a:t>
+            </a:r>
+            <a:r>
+              <a:rPr lang="ko-KR" altLang="en-US" sz="1600" dirty="0"/>
+              <a:t>년의 기본 운영 수명을 갖고 있으며</a:t>
+            </a:r>
+            <a:r>
+              <a:rPr lang="en-US" altLang="ko-KR" sz="1600" dirty="0"/>
+              <a:t>, </a:t>
+            </a:r>
+            <a:r>
+              <a:rPr lang="ko-KR" altLang="en-US" sz="1600" dirty="0"/>
+              <a:t>수명 연장을 통해 </a:t>
+            </a:r>
+            <a:r>
+              <a:rPr lang="en-US" altLang="ko-KR" sz="1600" dirty="0"/>
+              <a:t>80</a:t>
+            </a:r>
+            <a:r>
+              <a:rPr lang="ko-KR" altLang="en-US" sz="1600" dirty="0"/>
+              <a:t>년까지 가능하다</a:t>
+            </a:r>
+            <a:r>
+              <a:rPr lang="en-US" altLang="ko-KR" sz="1600" dirty="0"/>
+              <a:t>.</a:t>
+            </a:r>
+          </a:p>
+          <a:p>
+            <a:pPr marL="835025" lvl="1" indent="-285750">
+              <a:lnSpc>
+                <a:spcPct val="150000"/>
+              </a:lnSpc>
+              <a:buFont typeface="Wingdings" panose="05000000000000000000" pitchFamily="2" charset="2"/>
+              <a:buChar char="ü"/>
+            </a:pPr>
+            <a:r>
+              <a:rPr lang="ko-KR" altLang="en-US" sz="1600" dirty="0"/>
+              <a:t>이러한 장기 인프라 특성은 정부와 민간 투자자에게 안정적이고 예측 가능한 수익 구조를 제공할 수 있다</a:t>
+            </a:r>
+            <a:r>
+              <a:rPr lang="en-US" altLang="ko-KR" sz="1600" dirty="0"/>
+              <a:t>.</a:t>
+            </a:r>
+          </a:p>
+          <a:p>
+            <a:pPr marL="835025" lvl="1" indent="-285750">
+              <a:lnSpc>
+                <a:spcPct val="150000"/>
+              </a:lnSpc>
+              <a:buFont typeface="Wingdings" panose="05000000000000000000" pitchFamily="2" charset="2"/>
+              <a:buChar char="ü"/>
+            </a:pPr>
+            <a:r>
+              <a:rPr lang="ko-KR" altLang="en-US" sz="1600" dirty="0"/>
+              <a:t>지속가능한 전력 공급을 보장하는 신뢰할 수 있는 에너지 인프라로 간주된다</a:t>
+            </a:r>
+            <a:r>
+              <a:rPr lang="en-US" altLang="ko-KR" sz="1600" dirty="0"/>
+              <a:t>.</a:t>
+            </a:r>
+          </a:p>
+          <a:p>
+            <a:pPr marL="835025" lvl="1" indent="-285750">
+              <a:lnSpc>
+                <a:spcPct val="150000"/>
+              </a:lnSpc>
+              <a:buFont typeface="Wingdings" panose="05000000000000000000" pitchFamily="2" charset="2"/>
+              <a:buChar char="ü"/>
+            </a:pPr>
+            <a:endParaRPr lang="en-US" altLang="ko-KR" sz="1600" dirty="0"/>
+          </a:p>
+        </p:txBody>
+      </p:sp>
+    </p:spTree>
+    <p:extLst>
+      <p:ext uri="{BB962C8B-B14F-4D97-AF65-F5344CB8AC3E}">
+        <p14:creationId xmlns:p14="http://schemas.microsoft.com/office/powerpoint/2010/main" val="1180097710"/>
+      </p:ext>
+    </p:extLst>
+  </p:cSld>
+  <p:clrMapOvr>
+    <a:masterClrMapping/>
+  </p:clrMapOvr>
+</p:sld>
+</file>
+
+<file path=ppt/slides/slide34.xml><?xml version="1.0" encoding="utf-8"?>
 <p:sld xmlns:a="http://schemas.openxmlformats.org/drawingml/2006/main" xmlns:r="http://schemas.openxmlformats.org/officeDocument/2006/relationships" xmlns:p="http://schemas.openxmlformats.org/presentationml/2006/main">
   <p:cSld>
     <p:spTree>
@@ -15533,7 +16490,7 @@
           <a:p>
             <a:fld id="{109C872D-39A9-4065-8BF3-6A613116E2A1}" type="slidenum">
               <a:rPr lang="ko-KR" altLang="en-US" smtClean="0"/>
-              <a:t>32</a:t>
+              <a:t>34</a:t>
             </a:fld>
             <a:endParaRPr lang="ko-KR" altLang="en-US"/>
           </a:p>
@@ -15574,7 +16531,7 @@
             </a:r>
             <a:r>
               <a:rPr lang="ko-KR" altLang="en-US" sz="4000" b="1" i="0" spc="150" dirty="0"/>
-              <a:t>원자력 산업의 경쟁구조</a:t>
+              <a:t>원자력 산업 구조와 경쟁구조</a:t>
             </a:r>
             <a:endParaRPr lang="ko-KR" altLang="en-US" sz="3600" i="0" spc="150" dirty="0"/>
           </a:p>
@@ -15593,7 +16550,196 @@
 </p:sld>
 </file>
 
-<file path=ppt/slides/slide33.xml><?xml version="1.0" encoding="utf-8"?>
+<file path=ppt/slides/slide35.xml><?xml version="1.0" encoding="utf-8"?>
+<p:sld xmlns:a="http://schemas.openxmlformats.org/drawingml/2006/main" xmlns:r="http://schemas.openxmlformats.org/officeDocument/2006/relationships" xmlns:p="http://schemas.openxmlformats.org/presentationml/2006/main">
+  <p:cSld>
+    <p:spTree>
+      <p:nvGrpSpPr>
+        <p:cNvPr id="1" name="">
+          <a:extLst>
+            <a:ext uri="{FF2B5EF4-FFF2-40B4-BE49-F238E27FC236}">
+              <a16:creationId xmlns:a16="http://schemas.microsoft.com/office/drawing/2014/main" id="{BDF300E8-DF88-6560-F50A-BC3E100554AC}"/>
+            </a:ext>
+          </a:extLst>
+        </p:cNvPr>
+        <p:cNvGrpSpPr/>
+        <p:nvPr/>
+      </p:nvGrpSpPr>
+      <p:grpSpPr>
+        <a:xfrm>
+          <a:off x="0" y="0"/>
+          <a:ext cx="0" cy="0"/>
+          <a:chOff x="0" y="0"/>
+          <a:chExt cx="0" cy="0"/>
+        </a:xfrm>
+      </p:grpSpPr>
+      <p:sp>
+        <p:nvSpPr>
+          <p:cNvPr id="2" name="제목 1">
+            <a:extLst>
+              <a:ext uri="{FF2B5EF4-FFF2-40B4-BE49-F238E27FC236}">
+                <a16:creationId xmlns:a16="http://schemas.microsoft.com/office/drawing/2014/main" id="{000BC025-035A-2D6E-557F-EBBC829D968F}"/>
+              </a:ext>
+            </a:extLst>
+          </p:cNvPr>
+          <p:cNvSpPr>
+            <a:spLocks noGrp="1"/>
+          </p:cNvSpPr>
+          <p:nvPr>
+            <p:ph type="title"/>
+          </p:nvPr>
+        </p:nvSpPr>
+        <p:spPr/>
+        <p:txBody>
+          <a:bodyPr/>
+          <a:lstStyle/>
+          <a:p>
+            <a:r>
+              <a:rPr lang="ko-KR" altLang="en-US" dirty="0"/>
+              <a:t>원자력 산업의 구조</a:t>
+            </a:r>
+          </a:p>
+        </p:txBody>
+      </p:sp>
+      <p:sp>
+        <p:nvSpPr>
+          <p:cNvPr id="4" name="슬라이드 번호 개체 틀 3">
+            <a:extLst>
+              <a:ext uri="{FF2B5EF4-FFF2-40B4-BE49-F238E27FC236}">
+                <a16:creationId xmlns:a16="http://schemas.microsoft.com/office/drawing/2014/main" id="{928A1B1A-EECB-8208-246D-0B279BBD4BEC}"/>
+              </a:ext>
+            </a:extLst>
+          </p:cNvPr>
+          <p:cNvSpPr>
+            <a:spLocks noGrp="1"/>
+          </p:cNvSpPr>
+          <p:nvPr>
+            <p:ph type="sldNum" sz="quarter" idx="12"/>
+          </p:nvPr>
+        </p:nvSpPr>
+        <p:spPr/>
+        <p:txBody>
+          <a:bodyPr/>
+          <a:lstStyle/>
+          <a:p>
+            <a:fld id="{109C872D-39A9-4065-8BF3-6A613116E2A1}" type="slidenum">
+              <a:rPr lang="ko-KR" altLang="en-US" smtClean="0"/>
+              <a:t>35</a:t>
+            </a:fld>
+            <a:endParaRPr lang="ko-KR" altLang="en-US"/>
+          </a:p>
+        </p:txBody>
+      </p:sp>
+      <p:sp>
+        <p:nvSpPr>
+          <p:cNvPr id="3" name="TextBox 2">
+            <a:extLst>
+              <a:ext uri="{FF2B5EF4-FFF2-40B4-BE49-F238E27FC236}">
+                <a16:creationId xmlns:a16="http://schemas.microsoft.com/office/drawing/2014/main" id="{945A0363-7C17-2102-5E6F-EB775323943E}"/>
+              </a:ext>
+            </a:extLst>
+          </p:cNvPr>
+          <p:cNvSpPr txBox="1"/>
+          <p:nvPr/>
+        </p:nvSpPr>
+        <p:spPr>
+          <a:xfrm>
+            <a:off x="288790" y="958844"/>
+            <a:ext cx="11118453" cy="1152688"/>
+          </a:xfrm>
+          <a:prstGeom prst="rect">
+            <a:avLst/>
+          </a:prstGeom>
+          <a:noFill/>
+        </p:spPr>
+        <p:txBody>
+          <a:bodyPr wrap="square" rtlCol="0" anchor="t">
+            <a:spAutoFit/>
+          </a:bodyPr>
+          <a:lstStyle/>
+          <a:p>
+            <a:pPr marL="377825" indent="-285750">
+              <a:lnSpc>
+                <a:spcPct val="150000"/>
+              </a:lnSpc>
+              <a:buFont typeface="Arial" panose="020B0604020202020204" pitchFamily="34" charset="0"/>
+              <a:buChar char="•"/>
+            </a:pPr>
+            <a:r>
+              <a:rPr lang="ko-KR" altLang="en-US" sz="1600" dirty="0"/>
+              <a:t>글로벌 원자력 산업은 소수의 기업들이 원자력에너지 가치사슬에서 활동하고 있는 규제산업이다</a:t>
+            </a:r>
+            <a:r>
+              <a:rPr lang="en-US" altLang="ko-KR" sz="1600" dirty="0"/>
+              <a:t>.</a:t>
+            </a:r>
+          </a:p>
+          <a:p>
+            <a:pPr marL="835025" lvl="1" indent="-285750">
+              <a:lnSpc>
+                <a:spcPct val="150000"/>
+              </a:lnSpc>
+              <a:buFont typeface="Wingdings" panose="05000000000000000000" pitchFamily="2" charset="2"/>
+              <a:buChar char="ü"/>
+            </a:pPr>
+            <a:r>
+              <a:rPr lang="ko-KR" altLang="en-US" sz="1600" dirty="0"/>
+              <a:t>우라늄</a:t>
+            </a:r>
+            <a:r>
+              <a:rPr lang="en-US" altLang="ko-KR" sz="1600" dirty="0"/>
+              <a:t> </a:t>
+            </a:r>
+            <a:r>
+              <a:rPr lang="ko-KR" altLang="en-US" sz="1600" dirty="0"/>
+              <a:t>채굴</a:t>
+            </a:r>
+            <a:r>
+              <a:rPr lang="en-US" altLang="ko-KR" sz="1600" dirty="0"/>
+              <a:t>, </a:t>
+            </a:r>
+            <a:r>
+              <a:rPr lang="ko-KR" altLang="en-US" sz="1600" dirty="0"/>
+              <a:t>연료 가공부터 원자로 건설</a:t>
+            </a:r>
+            <a:r>
+              <a:rPr lang="en-US" altLang="ko-KR" sz="1600" dirty="0"/>
+              <a:t>, </a:t>
+            </a:r>
+            <a:r>
+              <a:rPr lang="ko-KR" altLang="en-US" sz="1600" dirty="0"/>
+              <a:t>운영과 폐쇄의 가치 사슬로 구성되어</a:t>
+            </a:r>
+            <a:r>
+              <a:rPr lang="en-US" altLang="ko-KR" sz="1600" dirty="0"/>
+              <a:t>, </a:t>
+            </a:r>
+            <a:r>
+              <a:rPr lang="ko-KR" altLang="en-US" sz="1600" dirty="0"/>
+              <a:t>국영기업과 다국적 기업들이 산업을 주도하고 있다</a:t>
+            </a:r>
+            <a:r>
+              <a:rPr lang="en-US" altLang="ko-KR" sz="1600"/>
+              <a:t>.</a:t>
+            </a:r>
+            <a:endParaRPr lang="en-US" altLang="ko-KR" sz="1600" dirty="0"/>
+          </a:p>
+        </p:txBody>
+      </p:sp>
+    </p:spTree>
+    <p:extLst>
+      <p:ext uri="{BB962C8B-B14F-4D97-AF65-F5344CB8AC3E}">
+        <p14:creationId xmlns:p14="http://schemas.microsoft.com/office/powerpoint/2010/main" val="2271990748"/>
+      </p:ext>
+    </p:extLst>
+  </p:cSld>
+  <p:clrMapOvr>
+    <a:masterClrMapping/>
+  </p:clrMapOvr>
+</p:sld>
+</file>
+
+<file path=ppt/slides/slide36.xml><?xml version="1.0" encoding="utf-8"?>
 <p:sld xmlns:a="http://schemas.openxmlformats.org/drawingml/2006/main" xmlns:r="http://schemas.openxmlformats.org/officeDocument/2006/relationships" xmlns:p="http://schemas.openxmlformats.org/presentationml/2006/main">
   <p:cSld>
     <p:spTree>
@@ -15676,7 +16822,7 @@
           <a:p>
             <a:fld id="{109C872D-39A9-4065-8BF3-6A613116E2A1}" type="slidenum">
               <a:rPr lang="ko-KR" altLang="en-US" smtClean="0"/>
-              <a:t>33</a:t>
+              <a:t>36</a:t>
             </a:fld>
             <a:endParaRPr lang="ko-KR" altLang="en-US"/>
           </a:p>
@@ -15748,7 +16894,7 @@
 </p:sld>
 </file>
 
-<file path=ppt/slides/slide34.xml><?xml version="1.0" encoding="utf-8"?>
+<file path=ppt/slides/slide37.xml><?xml version="1.0" encoding="utf-8"?>
 <p:sld xmlns:a="http://schemas.openxmlformats.org/drawingml/2006/main" xmlns:r="http://schemas.openxmlformats.org/officeDocument/2006/relationships" xmlns:p="http://schemas.openxmlformats.org/presentationml/2006/main">
   <p:cSld>
     <p:spTree>
@@ -15831,7 +16977,7 @@
           <a:p>
             <a:fld id="{109C872D-39A9-4065-8BF3-6A613116E2A1}" type="slidenum">
               <a:rPr lang="ko-KR" altLang="en-US" smtClean="0"/>
-              <a:t>34</a:t>
+              <a:t>37</a:t>
             </a:fld>
             <a:endParaRPr lang="ko-KR" altLang="en-US"/>
           </a:p>
@@ -15891,7 +17037,7 @@
 </p:sld>
 </file>
 
-<file path=ppt/slides/slide35.xml><?xml version="1.0" encoding="utf-8"?>
+<file path=ppt/slides/slide38.xml><?xml version="1.0" encoding="utf-8"?>
 <p:sld xmlns:a="http://schemas.openxmlformats.org/drawingml/2006/main" xmlns:r="http://schemas.openxmlformats.org/officeDocument/2006/relationships" xmlns:p="http://schemas.openxmlformats.org/presentationml/2006/main">
   <p:cSld>
     <p:spTree>
@@ -15974,7 +17120,7 @@
           <a:p>
             <a:fld id="{109C872D-39A9-4065-8BF3-6A613116E2A1}" type="slidenum">
               <a:rPr lang="ko-KR" altLang="en-US" smtClean="0"/>
-              <a:t>35</a:t>
+              <a:t>38</a:t>
             </a:fld>
             <a:endParaRPr lang="ko-KR" altLang="en-US"/>
           </a:p>
@@ -16034,7 +17180,7 @@
 </p:sld>
 </file>
 
-<file path=ppt/slides/slide36.xml><?xml version="1.0" encoding="utf-8"?>
+<file path=ppt/slides/slide39.xml><?xml version="1.0" encoding="utf-8"?>
 <p:sld xmlns:a="http://schemas.openxmlformats.org/drawingml/2006/main" xmlns:r="http://schemas.openxmlformats.org/officeDocument/2006/relationships" xmlns:p="http://schemas.openxmlformats.org/presentationml/2006/main">
   <p:cSld>
     <p:spTree>
@@ -16117,7 +17263,7 @@
           <a:p>
             <a:fld id="{109C872D-39A9-4065-8BF3-6A613116E2A1}" type="slidenum">
               <a:rPr lang="ko-KR" altLang="en-US" smtClean="0"/>
-              <a:t>36</a:t>
+              <a:t>39</a:t>
             </a:fld>
             <a:endParaRPr lang="ko-KR" altLang="en-US"/>
           </a:p>
@@ -16168,153 +17314,6 @@
     <p:extLst>
       <p:ext uri="{BB962C8B-B14F-4D97-AF65-F5344CB8AC3E}">
         <p14:creationId xmlns:p14="http://schemas.microsoft.com/office/powerpoint/2010/main" val="1753895778"/>
-      </p:ext>
-    </p:extLst>
-  </p:cSld>
-  <p:clrMapOvr>
-    <a:masterClrMapping/>
-  </p:clrMapOvr>
-</p:sld>
-</file>
-
-<file path=ppt/slides/slide37.xml><?xml version="1.0" encoding="utf-8"?>
-<p:sld xmlns:a="http://schemas.openxmlformats.org/drawingml/2006/main" xmlns:r="http://schemas.openxmlformats.org/officeDocument/2006/relationships" xmlns:p="http://schemas.openxmlformats.org/presentationml/2006/main">
-  <p:cSld>
-    <p:spTree>
-      <p:nvGrpSpPr>
-        <p:cNvPr id="1" name="">
-          <a:extLst>
-            <a:ext uri="{FF2B5EF4-FFF2-40B4-BE49-F238E27FC236}">
-              <a16:creationId xmlns:a16="http://schemas.microsoft.com/office/drawing/2014/main" id="{2221EDDE-B308-8FA7-8116-DAD482D863C8}"/>
-            </a:ext>
-          </a:extLst>
-        </p:cNvPr>
-        <p:cNvGrpSpPr/>
-        <p:nvPr/>
-      </p:nvGrpSpPr>
-      <p:grpSpPr>
-        <a:xfrm>
-          <a:off x="0" y="0"/>
-          <a:ext cx="0" cy="0"/>
-          <a:chOff x="0" y="0"/>
-          <a:chExt cx="0" cy="0"/>
-        </a:xfrm>
-      </p:grpSpPr>
-      <p:pic>
-        <p:nvPicPr>
-          <p:cNvPr id="3" name="그림 2" descr="텍스트, 로고, 원, 폰트이(가) 표시된 사진&#10;&#10;AI 생성 콘텐츠는 정확하지 않을 수 있습니다.">
-            <a:extLst>
-              <a:ext uri="{FF2B5EF4-FFF2-40B4-BE49-F238E27FC236}">
-                <a16:creationId xmlns:a16="http://schemas.microsoft.com/office/drawing/2014/main" id="{396FF0BD-25A1-7840-4B63-B2ECDF7CFA54}"/>
-              </a:ext>
-            </a:extLst>
-          </p:cNvPr>
-          <p:cNvPicPr>
-            <a:picLocks noChangeAspect="1"/>
-          </p:cNvPicPr>
-          <p:nvPr/>
-        </p:nvPicPr>
-        <p:blipFill>
-          <a:blip r:embed="rId2">
-            <a:alphaModFix amt="20000"/>
-            <a:extLst>
-              <a:ext uri="{28A0092B-C50C-407E-A947-70E740481C1C}">
-                <a14:useLocalDpi xmlns:a14="http://schemas.microsoft.com/office/drawing/2010/main" val="0"/>
-              </a:ext>
-            </a:extLst>
-          </a:blip>
-          <a:stretch>
-            <a:fillRect/>
-          </a:stretch>
-        </p:blipFill>
-        <p:spPr>
-          <a:xfrm>
-            <a:off x="4012070" y="1673061"/>
-            <a:ext cx="4167861" cy="4167861"/>
-          </a:xfrm>
-          <a:prstGeom prst="rect">
-            <a:avLst/>
-          </a:prstGeom>
-        </p:spPr>
-      </p:pic>
-      <p:sp>
-        <p:nvSpPr>
-          <p:cNvPr id="2" name="제목 1">
-            <a:extLst>
-              <a:ext uri="{FF2B5EF4-FFF2-40B4-BE49-F238E27FC236}">
-                <a16:creationId xmlns:a16="http://schemas.microsoft.com/office/drawing/2014/main" id="{CA03F291-495C-4A31-DF0A-8F9CC97672B8}"/>
-              </a:ext>
-            </a:extLst>
-          </p:cNvPr>
-          <p:cNvSpPr>
-            <a:spLocks noGrp="1"/>
-          </p:cNvSpPr>
-          <p:nvPr>
-            <p:ph type="title"/>
-          </p:nvPr>
-        </p:nvSpPr>
-        <p:spPr>
-          <a:xfrm>
-            <a:off x="831850" y="1709739"/>
-            <a:ext cx="10515600" cy="2134292"/>
-          </a:xfrm>
-          <a:effectLst>
-            <a:reflection blurRad="50800" stA="45000" endPos="44000" dir="5400000" sy="-100000" algn="bl" rotWithShape="0"/>
-          </a:effectLst>
-        </p:spPr>
-        <p:txBody>
-          <a:bodyPr/>
-          <a:lstStyle/>
-          <a:p>
-            <a:r>
-              <a:rPr lang="en-US" altLang="ko-KR" b="1" i="0" spc="150">
-                <a:solidFill>
-                  <a:schemeClr val="accent2"/>
-                </a:solidFill>
-              </a:rPr>
-              <a:t>T</a:t>
-            </a:r>
-            <a:r>
-              <a:rPr lang="en-US" altLang="ko-KR" sz="5400" i="0" spc="100"/>
-              <a:t>hank you</a:t>
-            </a:r>
-            <a:endParaRPr lang="ko-KR" altLang="en-US" sz="5400" i="0" spc="100"/>
-          </a:p>
-        </p:txBody>
-      </p:sp>
-      <p:sp>
-        <p:nvSpPr>
-          <p:cNvPr id="4" name="슬라이드 번호 개체 틀 3">
-            <a:extLst>
-              <a:ext uri="{FF2B5EF4-FFF2-40B4-BE49-F238E27FC236}">
-                <a16:creationId xmlns:a16="http://schemas.microsoft.com/office/drawing/2014/main" id="{6EFC0B50-C677-27B7-56F6-14F7BF9A70A9}"/>
-              </a:ext>
-            </a:extLst>
-          </p:cNvPr>
-          <p:cNvSpPr>
-            <a:spLocks noGrp="1"/>
-          </p:cNvSpPr>
-          <p:nvPr>
-            <p:ph type="sldNum" sz="quarter" idx="12"/>
-          </p:nvPr>
-        </p:nvSpPr>
-        <p:spPr/>
-        <p:txBody>
-          <a:bodyPr/>
-          <a:lstStyle/>
-          <a:p>
-            <a:fld id="{109C872D-39A9-4065-8BF3-6A613116E2A1}" type="slidenum">
-              <a:rPr lang="ko-KR" altLang="en-US" smtClean="0"/>
-              <a:t>37</a:t>
-            </a:fld>
-            <a:endParaRPr lang="ko-KR" altLang="en-US"/>
-          </a:p>
-        </p:txBody>
-      </p:sp>
-    </p:spTree>
-    <p:extLst>
-      <p:ext uri="{BB962C8B-B14F-4D97-AF65-F5344CB8AC3E}">
-        <p14:creationId xmlns:p14="http://schemas.microsoft.com/office/powerpoint/2010/main" val="103939182"/>
       </p:ext>
     </p:extLst>
   </p:cSld>
@@ -16729,6 +17728,153 @@
     <p:extLst>
       <p:ext uri="{BB962C8B-B14F-4D97-AF65-F5344CB8AC3E}">
         <p14:creationId xmlns:p14="http://schemas.microsoft.com/office/powerpoint/2010/main" val="2183003270"/>
+      </p:ext>
+    </p:extLst>
+  </p:cSld>
+  <p:clrMapOvr>
+    <a:masterClrMapping/>
+  </p:clrMapOvr>
+</p:sld>
+</file>
+
+<file path=ppt/slides/slide40.xml><?xml version="1.0" encoding="utf-8"?>
+<p:sld xmlns:a="http://schemas.openxmlformats.org/drawingml/2006/main" xmlns:r="http://schemas.openxmlformats.org/officeDocument/2006/relationships" xmlns:p="http://schemas.openxmlformats.org/presentationml/2006/main">
+  <p:cSld>
+    <p:spTree>
+      <p:nvGrpSpPr>
+        <p:cNvPr id="1" name="">
+          <a:extLst>
+            <a:ext uri="{FF2B5EF4-FFF2-40B4-BE49-F238E27FC236}">
+              <a16:creationId xmlns:a16="http://schemas.microsoft.com/office/drawing/2014/main" id="{2221EDDE-B308-8FA7-8116-DAD482D863C8}"/>
+            </a:ext>
+          </a:extLst>
+        </p:cNvPr>
+        <p:cNvGrpSpPr/>
+        <p:nvPr/>
+      </p:nvGrpSpPr>
+      <p:grpSpPr>
+        <a:xfrm>
+          <a:off x="0" y="0"/>
+          <a:ext cx="0" cy="0"/>
+          <a:chOff x="0" y="0"/>
+          <a:chExt cx="0" cy="0"/>
+        </a:xfrm>
+      </p:grpSpPr>
+      <p:pic>
+        <p:nvPicPr>
+          <p:cNvPr id="3" name="그림 2" descr="텍스트, 로고, 원, 폰트이(가) 표시된 사진&#10;&#10;AI 생성 콘텐츠는 정확하지 않을 수 있습니다.">
+            <a:extLst>
+              <a:ext uri="{FF2B5EF4-FFF2-40B4-BE49-F238E27FC236}">
+                <a16:creationId xmlns:a16="http://schemas.microsoft.com/office/drawing/2014/main" id="{396FF0BD-25A1-7840-4B63-B2ECDF7CFA54}"/>
+              </a:ext>
+            </a:extLst>
+          </p:cNvPr>
+          <p:cNvPicPr>
+            <a:picLocks noChangeAspect="1"/>
+          </p:cNvPicPr>
+          <p:nvPr/>
+        </p:nvPicPr>
+        <p:blipFill>
+          <a:blip r:embed="rId2">
+            <a:alphaModFix amt="20000"/>
+            <a:extLst>
+              <a:ext uri="{28A0092B-C50C-407E-A947-70E740481C1C}">
+                <a14:useLocalDpi xmlns:a14="http://schemas.microsoft.com/office/drawing/2010/main" val="0"/>
+              </a:ext>
+            </a:extLst>
+          </a:blip>
+          <a:stretch>
+            <a:fillRect/>
+          </a:stretch>
+        </p:blipFill>
+        <p:spPr>
+          <a:xfrm>
+            <a:off x="4012070" y="1673061"/>
+            <a:ext cx="4167861" cy="4167861"/>
+          </a:xfrm>
+          <a:prstGeom prst="rect">
+            <a:avLst/>
+          </a:prstGeom>
+        </p:spPr>
+      </p:pic>
+      <p:sp>
+        <p:nvSpPr>
+          <p:cNvPr id="2" name="제목 1">
+            <a:extLst>
+              <a:ext uri="{FF2B5EF4-FFF2-40B4-BE49-F238E27FC236}">
+                <a16:creationId xmlns:a16="http://schemas.microsoft.com/office/drawing/2014/main" id="{CA03F291-495C-4A31-DF0A-8F9CC97672B8}"/>
+              </a:ext>
+            </a:extLst>
+          </p:cNvPr>
+          <p:cNvSpPr>
+            <a:spLocks noGrp="1"/>
+          </p:cNvSpPr>
+          <p:nvPr>
+            <p:ph type="title"/>
+          </p:nvPr>
+        </p:nvSpPr>
+        <p:spPr>
+          <a:xfrm>
+            <a:off x="831850" y="1709739"/>
+            <a:ext cx="10515600" cy="2134292"/>
+          </a:xfrm>
+          <a:effectLst>
+            <a:reflection blurRad="50800" stA="45000" endPos="44000" dir="5400000" sy="-100000" algn="bl" rotWithShape="0"/>
+          </a:effectLst>
+        </p:spPr>
+        <p:txBody>
+          <a:bodyPr/>
+          <a:lstStyle/>
+          <a:p>
+            <a:r>
+              <a:rPr lang="en-US" altLang="ko-KR" b="1" i="0" spc="150">
+                <a:solidFill>
+                  <a:schemeClr val="accent2"/>
+                </a:solidFill>
+              </a:rPr>
+              <a:t>T</a:t>
+            </a:r>
+            <a:r>
+              <a:rPr lang="en-US" altLang="ko-KR" sz="5400" i="0" spc="100"/>
+              <a:t>hank you</a:t>
+            </a:r>
+            <a:endParaRPr lang="ko-KR" altLang="en-US" sz="5400" i="0" spc="100"/>
+          </a:p>
+        </p:txBody>
+      </p:sp>
+      <p:sp>
+        <p:nvSpPr>
+          <p:cNvPr id="4" name="슬라이드 번호 개체 틀 3">
+            <a:extLst>
+              <a:ext uri="{FF2B5EF4-FFF2-40B4-BE49-F238E27FC236}">
+                <a16:creationId xmlns:a16="http://schemas.microsoft.com/office/drawing/2014/main" id="{6EFC0B50-C677-27B7-56F6-14F7BF9A70A9}"/>
+              </a:ext>
+            </a:extLst>
+          </p:cNvPr>
+          <p:cNvSpPr>
+            <a:spLocks noGrp="1"/>
+          </p:cNvSpPr>
+          <p:nvPr>
+            <p:ph type="sldNum" sz="quarter" idx="12"/>
+          </p:nvPr>
+        </p:nvSpPr>
+        <p:spPr/>
+        <p:txBody>
+          <a:bodyPr/>
+          <a:lstStyle/>
+          <a:p>
+            <a:fld id="{109C872D-39A9-4065-8BF3-6A613116E2A1}" type="slidenum">
+              <a:rPr lang="ko-KR" altLang="en-US" smtClean="0"/>
+              <a:t>40</a:t>
+            </a:fld>
+            <a:endParaRPr lang="ko-KR" altLang="en-US"/>
+          </a:p>
+        </p:txBody>
+      </p:sp>
+    </p:spTree>
+    <p:extLst>
+      <p:ext uri="{BB962C8B-B14F-4D97-AF65-F5344CB8AC3E}">
+        <p14:creationId xmlns:p14="http://schemas.microsoft.com/office/powerpoint/2010/main" val="103939182"/>
       </p:ext>
     </p:extLst>
   </p:cSld>
